--- a/report/poster/poster.pptx
+++ b/report/poster/poster.pptx
@@ -3141,7 +3141,7 @@
         <p:spPr>
           <a:xfrm>
             <a:off x="360000" y="144000"/>
-            <a:ext cx="6840000" cy="355587"/>
+            <a:ext cx="6840000" cy="657174"/>
           </a:xfrm>
           <a:prstGeom prst="rect">
             <a:avLst/>
@@ -3166,7 +3166,7 @@
                 </a:solidFill>
                 <a:latin typeface="Arial"/>
               </a:rPr>
-              <a:t>Real-Time HDMI Video Processing Pipeline on PYNQ-Z2</a:t>
+              <a:t>A One-Line-Latency Vision Enhancement Terminal on PYNQ-Z2</a:t>
             </a:r>
           </a:p>
         </p:txBody>
@@ -3205,7 +3205,7 @@
                 </a:solidFill>
                 <a:latin typeface="Arial"/>
               </a:rPr>
-              <a:t>2026 Embedded Chip &amp; System Design Competition  |  AMD track, self-selected topic (junior group)  |  Zynq-7000 XC7Z020  |  Vivado / Vitis HLS 2026.1</a:t>
+              <a:t>Reading aid for the low-vision  |  2026 Embedded Chip &amp; System Design Competition, AMD track, self-selected topic (junior group)  |  Zynq-7000 XC7Z020  |  Vivado / Vitis HLS 2026.1</a:t>
             </a:r>
           </a:p>
         </p:txBody>
@@ -3327,7 +3327,7 @@
                 </a:solidFill>
                 <a:latin typeface="Arial"/>
               </a:rPr>
-              <a:t>FPGA video accelerators get judged on three things: is the result correct, how much faster than software is it, and can somebody else reproduce it. This project answers all three with evidence rather than claims - an independent software golden model for every operator, a zero-tolerance comparison against it, and PS-vs-PL measurements taken on the same board with the same image.</a:t>
+              <a:t>Around 17 million people in China live with low vision, and shop-bought electronic magnifiers are expensive while phone/PC pipelines take 100-300 ms from capture to display - enough latency to cause dizziness. For this class of device the key metric is not frame rate but end-to-end latency. This project therefore puts the whole enhancement chain inside the pixel stream, with no frame buffer at all.</a:t>
             </a:r>
           </a:p>
         </p:txBody>
@@ -3340,7 +3340,7 @@
         </p:nvSpPr>
         <p:spPr>
           <a:xfrm>
-            <a:off x="360000" y="2151174"/>
+            <a:off x="360000" y="2104374"/>
             <a:ext cx="6840000" cy="244476"/>
           </a:xfrm>
           <a:prstGeom prst="rect">
@@ -3379,7 +3379,7 @@
         </p:nvSpPr>
         <p:spPr>
           <a:xfrm>
-            <a:off x="360000" y="2374374"/>
+            <a:off x="360000" y="2327574"/>
             <a:ext cx="6840000" cy="14400"/>
           </a:xfrm>
           <a:prstGeom prst="rect">
@@ -3423,8 +3423,8 @@
         </p:nvSpPr>
         <p:spPr>
           <a:xfrm>
-            <a:off x="360000" y="2493174"/>
-            <a:ext cx="6840000" cy="1109555"/>
+            <a:off x="360000" y="2446374"/>
+            <a:ext cx="6840000" cy="1260349"/>
           </a:xfrm>
           <a:prstGeom prst="rect">
             <a:avLst/>
@@ -3449,7 +3449,7 @@
                 </a:solidFill>
                 <a:latin typeface="Arial"/>
               </a:rPr>
-              <a:t>Two data paths share one HLS kernel.</a:t>
+              <a:t>Main path:  HDMI IN -&gt; dvi2rgb -&gt; pixel_pack -&gt; enhance -&gt; pixel_unpack -&gt; rgb2dvi -&gt; HDMI OUT, bypassing the frame buffer, so latency is about one line (17 us at 720p60).</a:t>
             </a:r>
           </a:p>
           <a:p>
@@ -3465,7 +3465,7 @@
                 </a:solidFill>
                 <a:latin typeface="Arial"/>
               </a:rPr>
-              <a:t>HDMI streaming:  HDMI IN -&gt; colour convert -&gt; pixel_pack -&gt; Sobel -&gt; pixel_unpack -&gt; HDMI OUT, bypassing the frame buffer, so latency is about one line.</a:t>
+              <a:t>The enhance kernel runs local contrast -&gt; tone curve -&gt; binarise/invert -&gt; split screen, all integer, one pixel per clock; 59 configuration bits are driven from the PS at run time.</a:t>
             </a:r>
           </a:p>
           <a:p>
@@ -3481,7 +3481,7 @@
                 </a:solidFill>
                 <a:latin typeface="Arial"/>
               </a:rPr>
-              <a:t>AXI-DMA path:  PS &lt;-&gt; DDR &lt;-&gt; AXI DMA &lt;-&gt; Sobel, which gives readable-back results and is what makes bit-exact verification possible without a display.</a:t>
+              <a:t>Verification path:  PS &lt;-&gt; DDR &lt;-&gt; AXI DMA &lt;-&gt; operator, readable back, so bit-exact checks need no display.</a:t>
             </a:r>
           </a:p>
           <a:p>
@@ -3510,7 +3510,7 @@
         </p:nvSpPr>
         <p:spPr>
           <a:xfrm>
-            <a:off x="360000" y="3692730"/>
+            <a:off x="360000" y="3749923"/>
             <a:ext cx="6840000" cy="244476"/>
           </a:xfrm>
           <a:prstGeom prst="rect">
@@ -3549,7 +3549,7 @@
         </p:nvSpPr>
         <p:spPr>
           <a:xfrm>
-            <a:off x="360000" y="3915930"/>
+            <a:off x="360000" y="3973123"/>
             <a:ext cx="6840000" cy="14400"/>
           </a:xfrm>
           <a:prstGeom prst="rect">
@@ -3593,7 +3593,7 @@
         </p:nvSpPr>
         <p:spPr>
           <a:xfrm>
-            <a:off x="360000" y="4034730"/>
+            <a:off x="360000" y="4091923"/>
             <a:ext cx="6840000" cy="657174"/>
           </a:xfrm>
           <a:prstGeom prst="rect">
@@ -3619,7 +3619,7 @@
                 </a:solidFill>
                 <a:latin typeface="Arial"/>
               </a:rPr>
-              <a:t>Sobel edge detection, 3x3 Gaussian blur and 3x3 sharpen are hand-written Vitis HLS: II = 1, estimated Fmax 194.6 MHz at a 7 ns target, 3 to 9 BRAM and under 1.1k LUT each. Colour-space conversion reuses PYNQ's verified color_convert IP rather than being rewritten - the design effort went into the convolution operators, where it belongs.</a:t>
+              <a:t>enhance: 3 BRAM, 2 DSP, 2168 FF, 1659 LUT (3%), II = 1, estimated Fmax 194.59 MHz at 7 ns. The operator family behind it - Sobel, 3x3 Gaussian, 3x3 sharpen - is hand-written HLS too (II = 1, 194.6 MHz, under 1.1k LUT each), and colour-space conversion reuses PYNQ's verified color_convert IP instead of being rewritten.</a:t>
             </a:r>
           </a:p>
         </p:txBody>
@@ -3632,7 +3632,7 @@
         </p:nvSpPr>
         <p:spPr>
           <a:xfrm>
-            <a:off x="360000" y="4781904"/>
+            <a:off x="360000" y="4792298"/>
             <a:ext cx="6840000" cy="244476"/>
           </a:xfrm>
           <a:prstGeom prst="rect">
@@ -3671,7 +3671,7 @@
         </p:nvSpPr>
         <p:spPr>
           <a:xfrm>
-            <a:off x="360000" y="5005104"/>
+            <a:off x="360000" y="5015498"/>
             <a:ext cx="6840000" cy="14400"/>
           </a:xfrm>
           <a:prstGeom prst="rect">
@@ -3715,7 +3715,7 @@
         </p:nvSpPr>
         <p:spPr>
           <a:xfrm>
-            <a:off x="360000" y="5123904"/>
+            <a:off x="360000" y="5134298"/>
             <a:ext cx="6840000" cy="807968"/>
           </a:xfrm>
           <a:prstGeom prst="rect">
@@ -3741,7 +3741,7 @@
                 </a:solidFill>
                 <a:latin typeface="Arial"/>
               </a:rPr>
-              <a:t>The picture produced by the PL is compared channel by channel with the PS result: 0 mismatches out of 2,764,800 channels, and the same holds against an independently written numpy reference. Every kernel also passes C simulation with 0 errors before synthesis. Border policy (horizontal replicate, vertical line-buffer state) is defined once and shared by hardware, testbench and Python model, which is why the comparison can use zero tolerance.</a:t>
+              <a:t>enhance passes C simulation against an independently written C++ golden model in two configurations (contrast+split, and tone+binarise+invert+mono): 9216 beats each, 0 errors. On the DMA path the PL picture is compared channel by channel with the PS result: 0 mismatches out of 2,764,800 channels. Border policy (horizontal replicate, vertical line-buffer state) is defined once and shared by hardware, testbench and Python model, which is why the comparison can use zero tolerance.</a:t>
             </a:r>
           </a:p>
         </p:txBody>
@@ -3754,7 +3754,7 @@
         </p:nvSpPr>
         <p:spPr>
           <a:xfrm>
-            <a:off x="360000" y="6021873"/>
+            <a:off x="360000" y="5985466"/>
             <a:ext cx="6840000" cy="244476"/>
           </a:xfrm>
           <a:prstGeom prst="rect">
@@ -3793,7 +3793,7 @@
         </p:nvSpPr>
         <p:spPr>
           <a:xfrm>
-            <a:off x="360000" y="6245073"/>
+            <a:off x="360000" y="6208666"/>
             <a:ext cx="6840000" cy="14400"/>
           </a:xfrm>
           <a:prstGeom prst="rect">
@@ -3837,7 +3837,7 @@
         </p:nvSpPr>
         <p:spPr>
           <a:xfrm>
-            <a:off x="360000" y="6363873"/>
+            <a:off x="360000" y="6327466"/>
             <a:ext cx="6840000" cy="807968"/>
           </a:xfrm>
           <a:prstGeom prst="rect">
@@ -3876,7 +3876,7 @@
         </p:nvSpPr>
         <p:spPr>
           <a:xfrm>
-            <a:off x="360000" y="7261841"/>
+            <a:off x="360000" y="7178634"/>
             <a:ext cx="6840000" cy="244476"/>
           </a:xfrm>
           <a:prstGeom prst="rect">
@@ -3915,7 +3915,7 @@
         </p:nvSpPr>
         <p:spPr>
           <a:xfrm>
-            <a:off x="360000" y="7485041"/>
+            <a:off x="360000" y="7401834"/>
             <a:ext cx="6840000" cy="14400"/>
           </a:xfrm>
           <a:prstGeom prst="rect">
@@ -3959,7 +3959,7 @@
         </p:nvSpPr>
         <p:spPr>
           <a:xfrm>
-            <a:off x="360000" y="7603841"/>
+            <a:off x="360000" y="7520634"/>
             <a:ext cx="6840000" cy="657174"/>
           </a:xfrm>
           <a:prstGeom prst="rect">
@@ -3998,7 +3998,7 @@
         </p:nvSpPr>
         <p:spPr>
           <a:xfrm>
-            <a:off x="360000" y="8387015"/>
+            <a:off x="360000" y="8257009"/>
             <a:ext cx="6840000" cy="244476"/>
           </a:xfrm>
           <a:prstGeom prst="rect">
@@ -4024,7 +4024,7 @@
                 </a:solidFill>
                 <a:latin typeface="Arial"/>
               </a:rPr>
-              <a:t>Verified Results (same board, same 1280x720 image)</a:t>
+              <a:t>Operator Family on the DMA Path (same board, same 1280x720 image)</a:t>
             </a:r>
           </a:p>
         </p:txBody>
@@ -4037,7 +4037,7 @@
         </p:nvSpPr>
         <p:spPr>
           <a:xfrm>
-            <a:off x="360000" y="8610215"/>
+            <a:off x="360000" y="8480209"/>
             <a:ext cx="6840000" cy="14400"/>
           </a:xfrm>
           <a:prstGeom prst="rect">
@@ -4082,7 +4082,7 @@
           <p:nvPr/>
         </p:nvGraphicFramePr>
         <p:xfrm>
-          <a:off x="360000" y="8729015"/>
+          <a:off x="360000" y="8599009"/>
           <a:ext cx="4320000" cy="1260000"/>
         </p:xfrm>
         <a:graphic>
@@ -4396,7 +4396,7 @@
         </p:blipFill>
         <p:spPr>
           <a:xfrm>
-            <a:off x="4932000" y="8729015"/>
+            <a:off x="4932000" y="8599009"/>
             <a:ext cx="2232000" cy="1255500"/>
           </a:xfrm>
           <a:prstGeom prst="rect">
@@ -4412,8 +4412,8 @@
         </p:nvSpPr>
         <p:spPr>
           <a:xfrm>
-            <a:off x="4932000" y="10020515"/>
-            <a:ext cx="2232000" cy="180984"/>
+            <a:off x="4932000" y="9890509"/>
+            <a:ext cx="2232000" cy="307968"/>
           </a:xfrm>
           <a:prstGeom prst="rect">
             <a:avLst/>
@@ -4438,7 +4438,7 @@
                 </a:solidFill>
                 <a:latin typeface="Arial"/>
               </a:rPr>
-              <a:t>Sobel output captured from the PL path</a:t>
+              <a:t>Sobel output captured from the PL path (DMA)</a:t>
             </a:r>
           </a:p>
         </p:txBody>
@@ -4451,7 +4451,7 @@
         </p:nvSpPr>
         <p:spPr>
           <a:xfrm>
-            <a:off x="360000" y="10290515"/>
+            <a:off x="360000" y="10160509"/>
             <a:ext cx="6840000" cy="307968"/>
           </a:xfrm>
           <a:prstGeom prst="rect">

--- a/report/poster/poster.pptx
+++ b/report/poster/poster.pptx
@@ -3141,7 +3141,7 @@
         <p:spPr>
           <a:xfrm>
             <a:off x="360000" y="144000"/>
-            <a:ext cx="6840000" cy="657174"/>
+            <a:ext cx="6840000" cy="339714"/>
           </a:xfrm>
           <a:prstGeom prst="rect">
             <a:avLst/>
@@ -3150,7 +3150,7 @@
         </p:spPr>
         <p:txBody>
           <a:bodyPr wrap="square">
-            <a:spAutoFit/>
+            <a:noAutofit/>
           </a:bodyPr>
           <a:lstStyle/>
           <a:p>
@@ -3160,13 +3160,13 @@
               </a:lnSpc>
             </a:pPr>
             <a:r>
-              <a:rPr sz="1900" b="1">
+              <a:rPr sz="1800" b="1">
                 <a:solidFill>
                   <a:srgbClr val="FFFFFF"/>
                 </a:solidFill>
                 <a:latin typeface="Arial"/>
               </a:rPr>
-              <a:t>A One-Line-Latency Vision Enhancement Terminal on PYNQ-Z2</a:t>
+              <a:t>A One-Line-Latency Vision Enhancement Terminal</a:t>
             </a:r>
           </a:p>
         </p:txBody>
@@ -3189,7 +3189,7 @@
         </p:spPr>
         <p:txBody>
           <a:bodyPr wrap="square">
-            <a:spAutoFit/>
+            <a:noAutofit/>
           </a:bodyPr>
           <a:lstStyle/>
           <a:p>
@@ -3205,7 +3205,7 @@
                 </a:solidFill>
                 <a:latin typeface="Arial"/>
               </a:rPr>
-              <a:t>Reading aid for the low-vision  |  2026 Embedded Chip &amp; System Design Competition, AMD track, self-selected topic (junior group)  |  Zynq-7000 XC7Z020  |  Vivado / Vitis HLS 2026.1</a:t>
+              <a:t>PYNQ-Z2  |  reading aid for the low-vision  |  2026 Embedded Chip &amp; System Design Competition, AMD track, self-selected topic (junior group)  |  Zynq-7000 XC7Z020  |  Vivado / Vitis HLS 2026.1</a:t>
             </a:r>
           </a:p>
         </p:txBody>
@@ -3228,7 +3228,7 @@
         </p:spPr>
         <p:txBody>
           <a:bodyPr wrap="square">
-            <a:spAutoFit/>
+            <a:noAutofit/>
           </a:bodyPr>
           <a:lstStyle/>
           <a:p>
@@ -3302,7 +3302,7 @@
         <p:spPr>
           <a:xfrm>
             <a:off x="360000" y="1404000"/>
-            <a:ext cx="6840000" cy="657174"/>
+            <a:ext cx="6840000" cy="625428"/>
           </a:xfrm>
           <a:prstGeom prst="rect">
             <a:avLst/>
@@ -3311,7 +3311,7 @@
         </p:spPr>
         <p:txBody>
           <a:bodyPr wrap="square">
-            <a:spAutoFit/>
+            <a:noAutofit/>
           </a:bodyPr>
           <a:lstStyle/>
           <a:p>
@@ -3321,7 +3321,7 @@
               </a:lnSpc>
             </a:pPr>
             <a:r>
-              <a:rPr sz="950" b="0">
+              <a:rPr sz="900" b="0">
                 <a:solidFill>
                   <a:srgbClr val="333333"/>
                 </a:solidFill>
@@ -3340,7 +3340,7 @@
         </p:nvSpPr>
         <p:spPr>
           <a:xfrm>
-            <a:off x="360000" y="2104374"/>
+            <a:off x="360000" y="2065428"/>
             <a:ext cx="6840000" cy="244476"/>
           </a:xfrm>
           <a:prstGeom prst="rect">
@@ -3350,7 +3350,7 @@
         </p:spPr>
         <p:txBody>
           <a:bodyPr wrap="square">
-            <a:spAutoFit/>
+            <a:noAutofit/>
           </a:bodyPr>
           <a:lstStyle/>
           <a:p>
@@ -3379,7 +3379,7 @@
         </p:nvSpPr>
         <p:spPr>
           <a:xfrm>
-            <a:off x="360000" y="2327574"/>
+            <a:off x="360000" y="2288628"/>
             <a:ext cx="6840000" cy="14400"/>
           </a:xfrm>
           <a:prstGeom prst="rect">
@@ -3423,8 +3423,8 @@
         </p:nvSpPr>
         <p:spPr>
           <a:xfrm>
-            <a:off x="360000" y="2446374"/>
-            <a:ext cx="6840000" cy="1260349"/>
+            <a:off x="360000" y="2407428"/>
+            <a:ext cx="6840000" cy="1339714"/>
           </a:xfrm>
           <a:prstGeom prst="rect">
             <a:avLst/>
@@ -3433,7 +3433,7 @@
         </p:spPr>
         <p:txBody>
           <a:bodyPr wrap="square">
-            <a:spAutoFit/>
+            <a:noAutofit/>
           </a:bodyPr>
           <a:lstStyle/>
           <a:p>
@@ -3443,13 +3443,13 @@
               </a:lnSpc>
             </a:pPr>
             <a:r>
-              <a:rPr sz="950" b="0">
+              <a:rPr sz="900" b="0">
                 <a:solidFill>
                   <a:srgbClr val="333333"/>
                 </a:solidFill>
                 <a:latin typeface="Arial"/>
               </a:rPr>
-              <a:t>Main path:  HDMI IN -&gt; dvi2rgb -&gt; pixel_pack -&gt; enhance -&gt; pixel_unpack -&gt; rgb2dvi -&gt; HDMI OUT, bypassing the frame buffer, so latency is about one line (17 us at 720p60).</a:t>
+              <a:t>Intended main path:  HDMI IN -&gt; pixel_pack -&gt; enhance -&gt; pixel_unpack -&gt; HDMI OUT, no frame buffer. Both HDMI directions are still in bring-up and are documented, not claimed: the input negotiates EDID/HPD but never locks TMDS (the stock PYNQ bitstream behaves identically), and the output stops producing TMDS once the kernel is inserted.</a:t>
             </a:r>
           </a:p>
           <a:p>
@@ -3459,7 +3459,7 @@
               </a:lnSpc>
             </a:pPr>
             <a:r>
-              <a:rPr sz="950" b="0">
+              <a:rPr sz="900" b="0">
                 <a:solidFill>
                   <a:srgbClr val="333333"/>
                 </a:solidFill>
@@ -3475,7 +3475,7 @@
               </a:lnSpc>
             </a:pPr>
             <a:r>
-              <a:rPr sz="950" b="0">
+              <a:rPr sz="900" b="0">
                 <a:solidFill>
                   <a:srgbClr val="333333"/>
                 </a:solidFill>
@@ -3491,7 +3491,7 @@
               </a:lnSpc>
             </a:pPr>
             <a:r>
-              <a:rPr sz="950" b="0">
+              <a:rPr sz="900" b="0">
                 <a:solidFill>
                   <a:srgbClr val="333333"/>
                 </a:solidFill>
@@ -3510,7 +3510,7 @@
         </p:nvSpPr>
         <p:spPr>
           <a:xfrm>
-            <a:off x="360000" y="3749923"/>
+            <a:off x="360000" y="3783142"/>
             <a:ext cx="6840000" cy="244476"/>
           </a:xfrm>
           <a:prstGeom prst="rect">
@@ -3520,7 +3520,7 @@
         </p:spPr>
         <p:txBody>
           <a:bodyPr wrap="square">
-            <a:spAutoFit/>
+            <a:noAutofit/>
           </a:bodyPr>
           <a:lstStyle/>
           <a:p>
@@ -3549,7 +3549,7 @@
         </p:nvSpPr>
         <p:spPr>
           <a:xfrm>
-            <a:off x="360000" y="3973123"/>
+            <a:off x="360000" y="4006342"/>
             <a:ext cx="6840000" cy="14400"/>
           </a:xfrm>
           <a:prstGeom prst="rect">
@@ -3593,8 +3593,8 @@
         </p:nvSpPr>
         <p:spPr>
           <a:xfrm>
-            <a:off x="360000" y="4091923"/>
-            <a:ext cx="6840000" cy="657174"/>
+            <a:off x="360000" y="4125142"/>
+            <a:ext cx="6840000" cy="482571"/>
           </a:xfrm>
           <a:prstGeom prst="rect">
             <a:avLst/>
@@ -3603,7 +3603,7 @@
         </p:spPr>
         <p:txBody>
           <a:bodyPr wrap="square">
-            <a:spAutoFit/>
+            <a:noAutofit/>
           </a:bodyPr>
           <a:lstStyle/>
           <a:p>
@@ -3613,7 +3613,7 @@
               </a:lnSpc>
             </a:pPr>
             <a:r>
-              <a:rPr sz="950" b="0">
+              <a:rPr sz="900" b="0">
                 <a:solidFill>
                   <a:srgbClr val="333333"/>
                 </a:solidFill>
@@ -3632,7 +3632,7 @@
         </p:nvSpPr>
         <p:spPr>
           <a:xfrm>
-            <a:off x="360000" y="4792298"/>
+            <a:off x="360000" y="4643714"/>
             <a:ext cx="6840000" cy="244476"/>
           </a:xfrm>
           <a:prstGeom prst="rect">
@@ -3642,7 +3642,7 @@
         </p:spPr>
         <p:txBody>
           <a:bodyPr wrap="square">
-            <a:spAutoFit/>
+            <a:noAutofit/>
           </a:bodyPr>
           <a:lstStyle/>
           <a:p>
@@ -3671,7 +3671,7 @@
         </p:nvSpPr>
         <p:spPr>
           <a:xfrm>
-            <a:off x="360000" y="5015498"/>
+            <a:off x="360000" y="4866914"/>
             <a:ext cx="6840000" cy="14400"/>
           </a:xfrm>
           <a:prstGeom prst="rect">
@@ -3715,8 +3715,8 @@
         </p:nvSpPr>
         <p:spPr>
           <a:xfrm>
-            <a:off x="360000" y="5134298"/>
-            <a:ext cx="6840000" cy="807968"/>
+            <a:off x="360000" y="4985714"/>
+            <a:ext cx="6840000" cy="1054000"/>
           </a:xfrm>
           <a:prstGeom prst="rect">
             <a:avLst/>
@@ -3725,7 +3725,7 @@
         </p:spPr>
         <p:txBody>
           <a:bodyPr wrap="square">
-            <a:spAutoFit/>
+            <a:noAutofit/>
           </a:bodyPr>
           <a:lstStyle/>
           <a:p>
@@ -3735,13 +3735,13 @@
               </a:lnSpc>
             </a:pPr>
             <a:r>
-              <a:rPr sz="950" b="0">
+              <a:rPr sz="900" b="0">
                 <a:solidFill>
                   <a:srgbClr val="333333"/>
                 </a:solidFill>
                 <a:latin typeface="Arial"/>
               </a:rPr>
-              <a:t>enhance passes C simulation against an independently written C++ golden model in two configurations (contrast+split, and tone+binarise+invert+mono): 9216 beats each, 0 errors. On the DMA path the PL picture is compared channel by channel with the PS result: 0 mismatches out of 2,764,800 channels. Border policy (horizontal replicate, vertical line-buffer state) is defined once and shared by hardware, testbench and Python model, which is why the comparison can use zero tolerance.</a:t>
+              <a:t>enhance passes C simulation against an independently written C++ golden model in two configurations (contrast+split, and tone+binarise+invert+mono): 9216 beats each, 0 errors. Through the AXI-DMA path, all eight presets are compared channel by channel with the numpy model: 0 mismatches out of 2,764,800 channels each, at 15.6 ms per frame. A second pair of counters brackets the kernel and stamps the first beat in and out: the measured pipeline latency is 16 pixel clocks, i.e. 160 ns at 100 MHz - about 1% of a 720p60 line, which is what having no frame buffer buys. Border policy (horizontal replicate, vertical line-buffer state) is defined once and shared by hardware, testbench and Python model, which is why the comparison can use zero tolerance.</a:t>
             </a:r>
           </a:p>
         </p:txBody>
@@ -3754,7 +3754,7 @@
         </p:nvSpPr>
         <p:spPr>
           <a:xfrm>
-            <a:off x="360000" y="5985466"/>
+            <a:off x="360000" y="6075714"/>
             <a:ext cx="6840000" cy="244476"/>
           </a:xfrm>
           <a:prstGeom prst="rect">
@@ -3764,7 +3764,7 @@
         </p:spPr>
         <p:txBody>
           <a:bodyPr wrap="square">
-            <a:spAutoFit/>
+            <a:noAutofit/>
           </a:bodyPr>
           <a:lstStyle/>
           <a:p>
@@ -3793,7 +3793,7 @@
         </p:nvSpPr>
         <p:spPr>
           <a:xfrm>
-            <a:off x="360000" y="6208666"/>
+            <a:off x="360000" y="6298914"/>
             <a:ext cx="6840000" cy="14400"/>
           </a:xfrm>
           <a:prstGeom prst="rect">
@@ -3837,8 +3837,8 @@
         </p:nvSpPr>
         <p:spPr>
           <a:xfrm>
-            <a:off x="360000" y="6327466"/>
-            <a:ext cx="6840000" cy="807968"/>
+            <a:off x="360000" y="6417714"/>
+            <a:ext cx="6840000" cy="768285"/>
           </a:xfrm>
           <a:prstGeom prst="rect">
             <a:avLst/>
@@ -3847,7 +3847,7 @@
         </p:spPr>
         <p:txBody>
           <a:bodyPr wrap="square">
-            <a:spAutoFit/>
+            <a:noAutofit/>
           </a:bodyPr>
           <a:lstStyle/>
           <a:p>
@@ -3857,7 +3857,7 @@
               </a:lnSpc>
             </a:pPr>
             <a:r>
-              <a:rPr sz="950" b="0">
+              <a:rPr sz="900" b="0">
                 <a:solidFill>
                   <a:srgbClr val="333333"/>
                 </a:solidFill>
@@ -3876,7 +3876,7 @@
         </p:nvSpPr>
         <p:spPr>
           <a:xfrm>
-            <a:off x="360000" y="7178634"/>
+            <a:off x="360000" y="7222000"/>
             <a:ext cx="6840000" cy="244476"/>
           </a:xfrm>
           <a:prstGeom prst="rect">
@@ -3886,7 +3886,7 @@
         </p:spPr>
         <p:txBody>
           <a:bodyPr wrap="square">
-            <a:spAutoFit/>
+            <a:noAutofit/>
           </a:bodyPr>
           <a:lstStyle/>
           <a:p>
@@ -3915,7 +3915,7 @@
         </p:nvSpPr>
         <p:spPr>
           <a:xfrm>
-            <a:off x="360000" y="7401834"/>
+            <a:off x="360000" y="7445200"/>
             <a:ext cx="6840000" cy="14400"/>
           </a:xfrm>
           <a:prstGeom prst="rect">
@@ -3959,8 +3959,8 @@
         </p:nvSpPr>
         <p:spPr>
           <a:xfrm>
-            <a:off x="360000" y="7520634"/>
-            <a:ext cx="6840000" cy="657174"/>
+            <a:off x="360000" y="7563999"/>
+            <a:ext cx="6840000" cy="625428"/>
           </a:xfrm>
           <a:prstGeom prst="rect">
             <a:avLst/>
@@ -3969,7 +3969,7 @@
         </p:spPr>
         <p:txBody>
           <a:bodyPr wrap="square">
-            <a:spAutoFit/>
+            <a:noAutofit/>
           </a:bodyPr>
           <a:lstStyle/>
           <a:p>
@@ -3979,7 +3979,7 @@
               </a:lnSpc>
             </a:pPr>
             <a:r>
-              <a:rPr sz="950" b="0">
+              <a:rPr sz="900" b="0">
                 <a:solidFill>
                   <a:srgbClr val="333333"/>
                 </a:solidFill>
@@ -3998,7 +3998,7 @@
         </p:nvSpPr>
         <p:spPr>
           <a:xfrm>
-            <a:off x="360000" y="8257009"/>
+            <a:off x="360000" y="8261428"/>
             <a:ext cx="6840000" cy="244476"/>
           </a:xfrm>
           <a:prstGeom prst="rect">
@@ -4008,7 +4008,7 @@
         </p:spPr>
         <p:txBody>
           <a:bodyPr wrap="square">
-            <a:spAutoFit/>
+            <a:noAutofit/>
           </a:bodyPr>
           <a:lstStyle/>
           <a:p>
@@ -4037,7 +4037,7 @@
         </p:nvSpPr>
         <p:spPr>
           <a:xfrm>
-            <a:off x="360000" y="8480209"/>
+            <a:off x="360000" y="8484628"/>
             <a:ext cx="6840000" cy="14400"/>
           </a:xfrm>
           <a:prstGeom prst="rect">
@@ -4082,7 +4082,7 @@
           <p:nvPr/>
         </p:nvGraphicFramePr>
         <p:xfrm>
-          <a:off x="360000" y="8599009"/>
+          <a:off x="360000" y="8603428"/>
           <a:ext cx="4320000" cy="1260000"/>
         </p:xfrm>
         <a:graphic>
@@ -4096,7 +4096,7 @@
                 <a:gridCol w="1548000"/>
                 <a:gridCol w="1548000"/>
               </a:tblGrid>
-              <a:tr h="252000">
+              <a:tr h="315000">
                 <a:tc>
                   <a:txBody>
                     <a:bodyPr/>
@@ -4109,7 +4109,7 @@
                           </a:solidFill>
                           <a:latin typeface="Arial"/>
                         </a:rPr>
-                        <a:t>Metric</a:t>
+                        <a:t>Measured on the board</a:t>
                       </a:r>
                     </a:p>
                   </a:txBody>
@@ -4145,14 +4145,14 @@
                           </a:solidFill>
                           <a:latin typeface="Arial"/>
                         </a:rPr>
-                        <a:t>PL (DMA, whole frame)</a:t>
+                        <a:t>PL (Zynq + DMA)</a:t>
                       </a:r>
                     </a:p>
                   </a:txBody>
                   <a:tcPr/>
                 </a:tc>
               </a:tr>
-              <a:tr h="252000">
+              <a:tr h="315000">
                 <a:tc>
                   <a:txBody>
                     <a:bodyPr/>
@@ -4165,7 +4165,7 @@
                           </a:solidFill>
                           <a:latin typeface="Arial"/>
                         </a:rPr>
-                        <a:t>Frame time</a:t>
+                        <a:t>enhance, 8 presets</a:t>
                       </a:r>
                     </a:p>
                   </a:txBody>
@@ -4183,7 +4183,7 @@
                           </a:solidFill>
                           <a:latin typeface="Arial"/>
                         </a:rPr>
-                        <a:t>3108.4 ms</a:t>
+                        <a:t>-</a:t>
                       </a:r>
                     </a:p>
                   </a:txBody>
@@ -4201,14 +4201,14 @@
                           </a:solidFill>
                           <a:latin typeface="Arial"/>
                         </a:rPr>
-                        <a:t>15.8 ms</a:t>
+                        <a:t>15.6 ms/frame, 0/2764800 wrong</a:t>
                       </a:r>
                     </a:p>
                   </a:txBody>
                   <a:tcPr/>
                 </a:tc>
               </a:tr>
-              <a:tr h="252000">
+              <a:tr h="315000">
                 <a:tc>
                   <a:txBody>
                     <a:bodyPr/>
@@ -4221,7 +4221,7 @@
                           </a:solidFill>
                           <a:latin typeface="Arial"/>
                         </a:rPr>
-                        <a:t>Frame rate</a:t>
+                        <a:t>Pipeline latency</a:t>
                       </a:r>
                     </a:p>
                   </a:txBody>
@@ -4239,7 +4239,7 @@
                           </a:solidFill>
                           <a:latin typeface="Arial"/>
                         </a:rPr>
-                        <a:t>0.320 fps</a:t>
+                        <a:t>-</a:t>
                       </a:r>
                     </a:p>
                   </a:txBody>
@@ -4257,70 +4257,14 @@
                           </a:solidFill>
                           <a:latin typeface="Arial"/>
                         </a:rPr>
-                        <a:t>63.45 fps</a:t>
+                        <a:t>16 pixel clocks = 160 ns</a:t>
                       </a:r>
                     </a:p>
                   </a:txBody>
                   <a:tcPr/>
                 </a:tc>
               </a:tr>
-              <a:tr h="252000">
-                <a:tc>
-                  <a:txBody>
-                    <a:bodyPr/>
-                    <a:lstStyle/>
-                    <a:p>
-                      <a:r>
-                        <a:rPr sz="900" b="0">
-                          <a:solidFill>
-                            <a:srgbClr val="333333"/>
-                          </a:solidFill>
-                          <a:latin typeface="Arial"/>
-                        </a:rPr>
-                        <a:t>Pixel throughput</a:t>
-                      </a:r>
-                    </a:p>
-                  </a:txBody>
-                  <a:tcPr/>
-                </a:tc>
-                <a:tc>
-                  <a:txBody>
-                    <a:bodyPr/>
-                    <a:lstStyle/>
-                    <a:p>
-                      <a:r>
-                        <a:rPr sz="900" b="0">
-                          <a:solidFill>
-                            <a:srgbClr val="333333"/>
-                          </a:solidFill>
-                          <a:latin typeface="Arial"/>
-                        </a:rPr>
-                        <a:t>0.30 Mpixel/s</a:t>
-                      </a:r>
-                    </a:p>
-                  </a:txBody>
-                  <a:tcPr/>
-                </a:tc>
-                <a:tc>
-                  <a:txBody>
-                    <a:bodyPr/>
-                    <a:lstStyle/>
-                    <a:p>
-                      <a:r>
-                        <a:rPr sz="900" b="0">
-                          <a:solidFill>
-                            <a:srgbClr val="333333"/>
-                          </a:solidFill>
-                          <a:latin typeface="Arial"/>
-                        </a:rPr>
-                        <a:t>58.47 Mpixel/s</a:t>
-                      </a:r>
-                    </a:p>
-                  </a:txBody>
-                  <a:tcPr/>
-                </a:tc>
-              </a:tr>
-              <a:tr h="252000">
+              <a:tr h="315000">
                 <a:tc>
                   <a:txBody>
                     <a:bodyPr/>
@@ -4333,7 +4277,7 @@
                           </a:solidFill>
                           <a:latin typeface="Arial"/>
                         </a:rPr>
-                        <a:t>Speed-up</a:t>
+                        <a:t>Sobel family, frame time</a:t>
                       </a:r>
                     </a:p>
                   </a:txBody>
@@ -4351,7 +4295,7 @@
                           </a:solidFill>
                           <a:latin typeface="Arial"/>
                         </a:rPr>
-                        <a:t>-</a:t>
+                        <a:t>3108.4 ms</a:t>
                       </a:r>
                     </a:p>
                   </a:txBody>
@@ -4369,7 +4313,7 @@
                           </a:solidFill>
                           <a:latin typeface="Arial"/>
                         </a:rPr>
-                        <a:t>196.7x</a:t>
+                        <a:t>15.8 ms (196.7x)</a:t>
                       </a:r>
                     </a:p>
                   </a:txBody>
@@ -4382,7 +4326,7 @@
       </p:graphicFrame>
       <p:pic>
         <p:nvPicPr>
-          <p:cNvPr id="26" name="Picture 25" descr="sobel_dma_out.png"/>
+          <p:cNvPr id="26" name="Picture 25" descr="enhance_document.png"/>
           <p:cNvPicPr>
             <a:picLocks noChangeAspect="1"/>
           </p:cNvPicPr>
@@ -4396,7 +4340,7 @@
         </p:blipFill>
         <p:spPr>
           <a:xfrm>
-            <a:off x="4932000" y="8599009"/>
+            <a:off x="4932000" y="8603428"/>
             <a:ext cx="2232000" cy="1255500"/>
           </a:xfrm>
           <a:prstGeom prst="rect">
@@ -4412,7 +4356,7 @@
         </p:nvSpPr>
         <p:spPr>
           <a:xfrm>
-            <a:off x="4932000" y="9890509"/>
+            <a:off x="4932000" y="9894928"/>
             <a:ext cx="2232000" cy="307968"/>
           </a:xfrm>
           <a:prstGeom prst="rect">
@@ -4422,7 +4366,7 @@
         </p:spPr>
         <p:txBody>
           <a:bodyPr wrap="square">
-            <a:spAutoFit/>
+            <a:noAutofit/>
           </a:bodyPr>
           <a:lstStyle/>
           <a:p>
@@ -4451,7 +4395,7 @@
         </p:nvSpPr>
         <p:spPr>
           <a:xfrm>
-            <a:off x="360000" y="10160509"/>
+            <a:off x="360000" y="10164928"/>
             <a:ext cx="6840000" cy="307968"/>
           </a:xfrm>
           <a:prstGeom prst="rect">
@@ -4461,7 +4405,7 @@
         </p:spPr>
         <p:txBody>
           <a:bodyPr wrap="square">
-            <a:spAutoFit/>
+            <a:noAutofit/>
           </a:bodyPr>
           <a:lstStyle/>
           <a:p>
@@ -4477,7 +4421,7 @@
                 </a:solidFill>
                 <a:latin typeface="Arial"/>
               </a:rPr>
-              <a:t>Tool versions: Vivado / Vitis HLS 2026.1, PYNQ 3.1.1 image, device xc7z020clg400-1.  Repository: README.md, docs/, report/design_report.md, report/comparison.md.</a:t>
+              <a:t>Tool versions: Vivado / Vitis HLS 2026.1, PYNQ 3.1.1 image, device xc7z020clg400-1.  Repository: README.md, docs/ (including docs/hdmi_status.md for the open HDMI items), report/design_report.md, report/comparison.md.</a:t>
             </a:r>
           </a:p>
         </p:txBody>

--- a/report/poster/poster.pptx
+++ b/report/poster/poster.pptx
@@ -3424,7 +3424,7 @@
         <p:spPr>
           <a:xfrm>
             <a:off x="360000" y="2407428"/>
-            <a:ext cx="6840000" cy="1339714"/>
+            <a:ext cx="6840000" cy="1482571"/>
           </a:xfrm>
           <a:prstGeom prst="rect">
             <a:avLst/>
@@ -3449,7 +3449,23 @@
                 </a:solidFill>
                 <a:latin typeface="Arial"/>
               </a:rPr>
-              <a:t>Intended main path:  HDMI IN -&gt; pixel_pack -&gt; enhance -&gt; pixel_unpack -&gt; HDMI OUT, no frame buffer. Both HDMI directions are still in bring-up and are documented, not claimed: the input negotiates EDID/HPD but never locks TMDS (the stock PYNQ bitstream behaves identically), and the output stops producing TMDS once the kernel is inserted.</a:t>
+              <a:t>Main path:  PS frame -&gt; VDMA -&gt; enhance -&gt; pixel_unpack -&gt; HDMI OUT, with the kernel sitting in the live pixel stream; measured 21 pixel clocks on the board, seven presets switched while video keeps running.</a:t>
+            </a:r>
+          </a:p>
+          <a:p>
+            <a:pPr algn="l">
+              <a:lnSpc>
+                <a:spcPct val="100000"/>
+              </a:lnSpc>
+            </a:pPr>
+            <a:r>
+              <a:rPr sz="900" b="0">
+                <a:solidFill>
+                  <a:srgbClr val="333333"/>
+                </a:solidFill>
+                <a:latin typeface="Arial"/>
+              </a:rPr>
+              <a:t>The frame source is the VDMA because this board's HDMI output only works at 640x480 (800x600/720p/1080p consume no frames; the stock bitstream behaves identically - the pins are unbuffered), while the HDMI input IP cannot run at 640x480. With no common mode, frames come from DDR and the kernel still processes real pixels.</a:t>
             </a:r>
           </a:p>
           <a:p>
@@ -3510,7 +3526,7 @@
         </p:nvSpPr>
         <p:spPr>
           <a:xfrm>
-            <a:off x="360000" y="3783142"/>
+            <a:off x="360000" y="3926000"/>
             <a:ext cx="6840000" cy="244476"/>
           </a:xfrm>
           <a:prstGeom prst="rect">
@@ -3549,7 +3565,7 @@
         </p:nvSpPr>
         <p:spPr>
           <a:xfrm>
-            <a:off x="360000" y="4006342"/>
+            <a:off x="360000" y="4149199"/>
             <a:ext cx="6840000" cy="14400"/>
           </a:xfrm>
           <a:prstGeom prst="rect">
@@ -3593,7 +3609,7 @@
         </p:nvSpPr>
         <p:spPr>
           <a:xfrm>
-            <a:off x="360000" y="4125142"/>
+            <a:off x="360000" y="4268000"/>
             <a:ext cx="6840000" cy="482571"/>
           </a:xfrm>
           <a:prstGeom prst="rect">
@@ -3632,7 +3648,7 @@
         </p:nvSpPr>
         <p:spPr>
           <a:xfrm>
-            <a:off x="360000" y="4643714"/>
+            <a:off x="360000" y="4786571"/>
             <a:ext cx="6840000" cy="244476"/>
           </a:xfrm>
           <a:prstGeom prst="rect">
@@ -3671,7 +3687,7 @@
         </p:nvSpPr>
         <p:spPr>
           <a:xfrm>
-            <a:off x="360000" y="4866914"/>
+            <a:off x="360000" y="5009771"/>
             <a:ext cx="6840000" cy="14400"/>
           </a:xfrm>
           <a:prstGeom prst="rect">
@@ -3715,7 +3731,7 @@
         </p:nvSpPr>
         <p:spPr>
           <a:xfrm>
-            <a:off x="360000" y="4985714"/>
+            <a:off x="360000" y="5128571"/>
             <a:ext cx="6840000" cy="1054000"/>
           </a:xfrm>
           <a:prstGeom prst="rect">
@@ -3754,7 +3770,7 @@
         </p:nvSpPr>
         <p:spPr>
           <a:xfrm>
-            <a:off x="360000" y="6075714"/>
+            <a:off x="360000" y="6218571"/>
             <a:ext cx="6840000" cy="244476"/>
           </a:xfrm>
           <a:prstGeom prst="rect">
@@ -3793,7 +3809,7 @@
         </p:nvSpPr>
         <p:spPr>
           <a:xfrm>
-            <a:off x="360000" y="6298914"/>
+            <a:off x="360000" y="6441771"/>
             <a:ext cx="6840000" cy="14400"/>
           </a:xfrm>
           <a:prstGeom prst="rect">
@@ -3837,7 +3853,7 @@
         </p:nvSpPr>
         <p:spPr>
           <a:xfrm>
-            <a:off x="360000" y="6417714"/>
+            <a:off x="360000" y="6560571"/>
             <a:ext cx="6840000" cy="768285"/>
           </a:xfrm>
           <a:prstGeom prst="rect">
@@ -3876,7 +3892,7 @@
         </p:nvSpPr>
         <p:spPr>
           <a:xfrm>
-            <a:off x="360000" y="7222000"/>
+            <a:off x="360000" y="7364857"/>
             <a:ext cx="6840000" cy="244476"/>
           </a:xfrm>
           <a:prstGeom prst="rect">
@@ -3915,7 +3931,7 @@
         </p:nvSpPr>
         <p:spPr>
           <a:xfrm>
-            <a:off x="360000" y="7445200"/>
+            <a:off x="360000" y="7588057"/>
             <a:ext cx="6840000" cy="14400"/>
           </a:xfrm>
           <a:prstGeom prst="rect">
@@ -3959,7 +3975,7 @@
         </p:nvSpPr>
         <p:spPr>
           <a:xfrm>
-            <a:off x="360000" y="7563999"/>
+            <a:off x="360000" y="7706857"/>
             <a:ext cx="6840000" cy="625428"/>
           </a:xfrm>
           <a:prstGeom prst="rect">
@@ -3998,7 +4014,7 @@
         </p:nvSpPr>
         <p:spPr>
           <a:xfrm>
-            <a:off x="360000" y="8261428"/>
+            <a:off x="360000" y="8404285"/>
             <a:ext cx="6840000" cy="244476"/>
           </a:xfrm>
           <a:prstGeom prst="rect">
@@ -4037,7 +4053,7 @@
         </p:nvSpPr>
         <p:spPr>
           <a:xfrm>
-            <a:off x="360000" y="8484628"/>
+            <a:off x="360000" y="8627485"/>
             <a:ext cx="6840000" cy="14400"/>
           </a:xfrm>
           <a:prstGeom prst="rect">
@@ -4082,7 +4098,7 @@
           <p:nvPr/>
         </p:nvGraphicFramePr>
         <p:xfrm>
-          <a:off x="360000" y="8603428"/>
+          <a:off x="360000" y="8746285"/>
           <a:ext cx="4320000" cy="1260000"/>
         </p:xfrm>
         <a:graphic>
@@ -4340,7 +4356,7 @@
         </p:blipFill>
         <p:spPr>
           <a:xfrm>
-            <a:off x="4932000" y="8603428"/>
+            <a:off x="4932000" y="8746285"/>
             <a:ext cx="2232000" cy="1255500"/>
           </a:xfrm>
           <a:prstGeom prst="rect">
@@ -4356,7 +4372,7 @@
         </p:nvSpPr>
         <p:spPr>
           <a:xfrm>
-            <a:off x="4932000" y="9894928"/>
+            <a:off x="4932000" y="10037785"/>
             <a:ext cx="2232000" cy="307968"/>
           </a:xfrm>
           <a:prstGeom prst="rect">
@@ -4395,7 +4411,7 @@
         </p:nvSpPr>
         <p:spPr>
           <a:xfrm>
-            <a:off x="360000" y="10164928"/>
+            <a:off x="360000" y="10307785"/>
             <a:ext cx="6840000" cy="307968"/>
           </a:xfrm>
           <a:prstGeom prst="rect">
@@ -4421,7 +4437,7 @@
                 </a:solidFill>
                 <a:latin typeface="Arial"/>
               </a:rPr>
-              <a:t>Tool versions: Vivado / Vitis HLS 2026.1, PYNQ 3.1.1 image, device xc7z020clg400-1.  Repository: README.md, docs/ (including docs/hdmi_status.md for the open HDMI items), report/design_report.md, report/comparison.md.</a:t>
+              <a:t>Tool versions: Vivado / Vitis HLS 2026.1, PYNQ 3.1.1 image, device xc7z020clg400-1.  Repository: README.md, docs/ (docs/hdmi_status.md records the HDMI measurements and the two hardware limits), report/design_report.md, report/comparison.md.</a:t>
             </a:r>
           </a:p>
         </p:txBody>

--- a/report/poster/poster.pptx
+++ b/report/poster/poster.pptx
@@ -3854,7 +3854,7 @@
         <p:spPr>
           <a:xfrm>
             <a:off x="360000" y="6560571"/>
-            <a:ext cx="6840000" cy="768285"/>
+            <a:ext cx="6840000" cy="911142"/>
           </a:xfrm>
           <a:prstGeom prst="rect">
             <a:avLst/>
@@ -3879,7 +3879,7 @@
                 </a:solidFill>
                 <a:latin typeface="Arial"/>
               </a:rPr>
-              <a:t>A free-running kernel (ap_ctrl_none) never drains its pipeline when the input stops, so an AXI-DMA transfer can never close; the DMA path therefore uses a bounded variant (ap_ctrl_hs plus a pixel count). The AXI DMA buffer-length register is 14 bits by default, i.e. 16 KB - not enough for a frame, so it was widened to 23 bits. The PYNQ base overlay is a 4448-line Vivado 2024.1 script; rebuilding it with 2026.1 needs exactly three patches.</a:t>
+              <a:t>A free-running kernel (ap_ctrl_none) never drains its pipeline when the input stops, so an AXI-DMA transfer can never close and the DMA path needs a bounded variant (ap_ctrl_hs plus a pixel count). The same property bit the other way: HLS registers loop-invariant inputs in the pipeline prologue, so six of nine configuration parameters froze at power-up (see binarize_read_reg_* in the netlist). A gate lets the PS reset only the kernel through a spare configuration bit, so the preset is re-sampled - that is how seven presets switch live.</a:t>
             </a:r>
           </a:p>
         </p:txBody>
@@ -3892,7 +3892,7 @@
         </p:nvSpPr>
         <p:spPr>
           <a:xfrm>
-            <a:off x="360000" y="7364857"/>
+            <a:off x="360000" y="7507714"/>
             <a:ext cx="6840000" cy="244476"/>
           </a:xfrm>
           <a:prstGeom prst="rect">
@@ -3931,7 +3931,7 @@
         </p:nvSpPr>
         <p:spPr>
           <a:xfrm>
-            <a:off x="360000" y="7588057"/>
+            <a:off x="360000" y="7730914"/>
             <a:ext cx="6840000" cy="14400"/>
           </a:xfrm>
           <a:prstGeom prst="rect">
@@ -3975,7 +3975,7 @@
         </p:nvSpPr>
         <p:spPr>
           <a:xfrm>
-            <a:off x="360000" y="7706857"/>
+            <a:off x="360000" y="7849714"/>
             <a:ext cx="6840000" cy="625428"/>
           </a:xfrm>
           <a:prstGeom prst="rect">
@@ -4001,7 +4001,7 @@
                 </a:solidFill>
                 <a:latin typeface="Arial"/>
               </a:rPr>
-              <a:t>Four board-independent skills ship with the project: overlay handoff linting (.hwh), bit-exact image comparison, measurement collection with PS-vs-PL table generation, and AXI-DMA transfer helpers with cache maintenance and timeouts. Each documents scope, usage, failure modes and what was verified. Everything is scripted, so a clean machine rebuilds both bitstreams with two commands.</a:t>
+              <a:t>Four board-independent skills ship with the project: overlay handoff linting (.hwh), bit-exact image comparison, measurement collection with PS-vs-PL table generation, and AXI-DMA helpers with cache maintenance and timeouts. Each documents scope, usage, failure modes and what was verified. Everything is scripted: a clean machine rebuilds both bitstreams with two commands.</a:t>
             </a:r>
           </a:p>
         </p:txBody>
@@ -4014,7 +4014,7 @@
         </p:nvSpPr>
         <p:spPr>
           <a:xfrm>
-            <a:off x="360000" y="8404285"/>
+            <a:off x="360000" y="8547142"/>
             <a:ext cx="6840000" cy="244476"/>
           </a:xfrm>
           <a:prstGeom prst="rect">
@@ -4053,7 +4053,7 @@
         </p:nvSpPr>
         <p:spPr>
           <a:xfrm>
-            <a:off x="360000" y="8627485"/>
+            <a:off x="360000" y="8770342"/>
             <a:ext cx="6840000" cy="14400"/>
           </a:xfrm>
           <a:prstGeom prst="rect">
@@ -4098,8 +4098,8 @@
           <p:nvPr/>
         </p:nvGraphicFramePr>
         <p:xfrm>
-          <a:off x="360000" y="8746285"/>
-          <a:ext cx="4320000" cy="1260000"/>
+          <a:off x="360000" y="8889142"/>
+          <a:ext cx="4320000" cy="1080000"/>
         </p:xfrm>
         <a:graphic>
           <a:graphicData uri="http://schemas.openxmlformats.org/drawingml/2006/table">
@@ -4112,7 +4112,7 @@
                 <a:gridCol w="1548000"/>
                 <a:gridCol w="1548000"/>
               </a:tblGrid>
-              <a:tr h="315000">
+              <a:tr h="270000">
                 <a:tc>
                   <a:txBody>
                     <a:bodyPr/>
@@ -4168,7 +4168,7 @@
                   <a:tcPr/>
                 </a:tc>
               </a:tr>
-              <a:tr h="315000">
+              <a:tr h="270000">
                 <a:tc>
                   <a:txBody>
                     <a:bodyPr/>
@@ -4224,7 +4224,7 @@
                   <a:tcPr/>
                 </a:tc>
               </a:tr>
-              <a:tr h="315000">
+              <a:tr h="270000">
                 <a:tc>
                   <a:txBody>
                     <a:bodyPr/>
@@ -4280,7 +4280,7 @@
                   <a:tcPr/>
                 </a:tc>
               </a:tr>
-              <a:tr h="315000">
+              <a:tr h="270000">
                 <a:tc>
                   <a:txBody>
                     <a:bodyPr/>
@@ -4356,8 +4356,8 @@
         </p:blipFill>
         <p:spPr>
           <a:xfrm>
-            <a:off x="4932000" y="8746285"/>
-            <a:ext cx="2232000" cy="1255500"/>
+            <a:off x="4932000" y="8889142"/>
+            <a:ext cx="2088000" cy="1174500"/>
           </a:xfrm>
           <a:prstGeom prst="rect">
             <a:avLst/>
@@ -4372,8 +4372,8 @@
         </p:nvSpPr>
         <p:spPr>
           <a:xfrm>
-            <a:off x="4932000" y="10037785"/>
-            <a:ext cx="2232000" cy="307968"/>
+            <a:off x="4932000" y="10099642"/>
+            <a:ext cx="2088000" cy="307968"/>
           </a:xfrm>
           <a:prstGeom prst="rect">
             <a:avLst/>
@@ -4411,7 +4411,7 @@
         </p:nvSpPr>
         <p:spPr>
           <a:xfrm>
-            <a:off x="360000" y="10307785"/>
+            <a:off x="360000" y="10333642"/>
             <a:ext cx="6840000" cy="307968"/>
           </a:xfrm>
           <a:prstGeom prst="rect">

--- a/report/poster/poster.pptx
+++ b/report/poster/poster.pptx
@@ -4342,7 +4342,7 @@
       </p:graphicFrame>
       <p:pic>
         <p:nvPicPr>
-          <p:cNvPr id="26" name="Picture 25" descr="enhance_document.png"/>
+          <p:cNvPr id="26" name="Picture 25" descr="hdmi_presets_2x2.png"/>
           <p:cNvPicPr>
             <a:picLocks noChangeAspect="1"/>
           </p:cNvPicPr>
@@ -4357,7 +4357,7 @@
         <p:spPr>
           <a:xfrm>
             <a:off x="4932000" y="8889142"/>
-            <a:ext cx="2088000" cy="1174500"/>
+            <a:ext cx="1944000" cy="1161509"/>
           </a:xfrm>
           <a:prstGeom prst="rect">
             <a:avLst/>
@@ -4372,8 +4372,8 @@
         </p:nvSpPr>
         <p:spPr>
           <a:xfrm>
-            <a:off x="4932000" y="10099642"/>
-            <a:ext cx="2088000" cy="307968"/>
+            <a:off x="4932000" y="10086652"/>
+            <a:ext cx="1944000" cy="307968"/>
           </a:xfrm>
           <a:prstGeom prst="rect">
             <a:avLst/>
@@ -4398,7 +4398,7 @@
                 </a:solidFill>
                 <a:latin typeface="Arial"/>
               </a:rPr>
-              <a:t>Sobel output captured from the PL path (DMA)</a:t>
+              <a:t>Four presets captured from the HDMI output of the board</a:t>
             </a:r>
           </a:p>
         </p:txBody>
@@ -4411,7 +4411,7 @@
         </p:nvSpPr>
         <p:spPr>
           <a:xfrm>
-            <a:off x="360000" y="10333642"/>
+            <a:off x="360000" y="10320652"/>
             <a:ext cx="6840000" cy="307968"/>
           </a:xfrm>
           <a:prstGeom prst="rect">

--- a/report/poster/poster.pptx
+++ b/report/poster/poster.pptx
@@ -4357,7 +4357,7 @@
         <p:spPr>
           <a:xfrm>
             <a:off x="4932000" y="8889142"/>
-            <a:ext cx="1944000" cy="1161509"/>
+            <a:ext cx="1620000" cy="1218172"/>
           </a:xfrm>
           <a:prstGeom prst="rect">
             <a:avLst/>
@@ -4372,8 +4372,8 @@
         </p:nvSpPr>
         <p:spPr>
           <a:xfrm>
-            <a:off x="4932000" y="10086652"/>
-            <a:ext cx="1944000" cy="307968"/>
+            <a:off x="4932000" y="10143315"/>
+            <a:ext cx="1620000" cy="434952"/>
           </a:xfrm>
           <a:prstGeom prst="rect">
             <a:avLst/>
@@ -4398,7 +4398,7 @@
                 </a:solidFill>
                 <a:latin typeface="Arial"/>
               </a:rPr>
-              <a:t>Four presets captured from the HDMI output of the board</a:t>
+              <a:t>Four states captured from the board's HDMI output; top right shows the split</a:t>
             </a:r>
           </a:p>
         </p:txBody>
@@ -4411,7 +4411,7 @@
         </p:nvSpPr>
         <p:spPr>
           <a:xfrm>
-            <a:off x="360000" y="10320652"/>
+            <a:off x="360000" y="10323315"/>
             <a:ext cx="6840000" cy="307968"/>
           </a:xfrm>
           <a:prstGeom prst="rect">

--- a/report/poster/poster.pptx
+++ b/report/poster/poster.pptx
@@ -3205,7 +3205,7 @@
                 </a:solidFill>
                 <a:latin typeface="Arial"/>
               </a:rPr>
-              <a:t>PYNQ-Z2  |  reading aid for the low-vision  |  2026 Embedded Chip &amp; System Design Competition, AMD track, self-selected topic (junior group)  |  Zynq-7000 XC7Z020  |  Vivado / Vitis HLS 2026.1</a:t>
+              <a:t>PYNQ-Z2  |  real-time enhancement for low-light imaging  |  2026 Embedded Chip &amp; System Design Competition, AMD track, self-selected topic (junior group)  |  Zynq-7000 XC7Z020  |  Vivado / Vitis HLS 2026.1</a:t>
             </a:r>
           </a:p>
         </p:txBody>
@@ -3327,7 +3327,7 @@
                 </a:solidFill>
                 <a:latin typeface="Arial"/>
               </a:rPr>
-              <a:t>Around 17 million people in China live with low vision, and shop-bought electronic magnifiers are expensive while phone/PC pipelines take 100-300 ms from capture to display - enough latency to cause dizziness. For this class of device the key metric is not frame rate but end-to-end latency. This project therefore puts the whole enhancement chain inside the pixel stream, with no frame buffer at all.</a:t>
+              <a:t>Night and dim-light imaging - surveillance, inspection, forensics, automotive night vision, industrial and microscopy work - operates on frames that are dark and low in contrast. Phone/PC pipelines take 100-300 ms from capture to display, which shows as lag and smear once the scene moves. Here the key metric is end-to-end latency, not frame rate, so the whole enhancement chain sits inside the pixel stream with no frame buffer.</a:t>
             </a:r>
           </a:p>
         </p:txBody>
@@ -4125,7 +4125,7 @@
                           </a:solidFill>
                           <a:latin typeface="Arial"/>
                         </a:rPr>
-                        <a:t>Measured on the board</a:t>
+                        <a:t>Measured</a:t>
                       </a:r>
                     </a:p>
                   </a:txBody>
@@ -4217,7 +4217,7 @@
                           </a:solidFill>
                           <a:latin typeface="Arial"/>
                         </a:rPr>
-                        <a:t>15.6 ms/frame, 0/2764800 wrong</a:t>
+                        <a:t>15.6 ms, 0/2.76M wrong</a:t>
                       </a:r>
                     </a:p>
                   </a:txBody>
@@ -4273,7 +4273,7 @@
                           </a:solidFill>
                           <a:latin typeface="Arial"/>
                         </a:rPr>
-                        <a:t>16 pixel clocks = 160 ns</a:t>
+                        <a:t>16 clocks = 160 ns</a:t>
                       </a:r>
                     </a:p>
                   </a:txBody>
@@ -4293,7 +4293,7 @@
                           </a:solidFill>
                           <a:latin typeface="Arial"/>
                         </a:rPr>
-                        <a:t>Sobel family, frame time</a:t>
+                        <a:t>Sobel frame time</a:t>
                       </a:r>
                     </a:p>
                   </a:txBody>
@@ -4373,7 +4373,7 @@
         <p:spPr>
           <a:xfrm>
             <a:off x="4932000" y="10143315"/>
-            <a:ext cx="1620000" cy="434952"/>
+            <a:ext cx="1620000" cy="180984"/>
           </a:xfrm>
           <a:prstGeom prst="rect">
             <a:avLst/>
@@ -4398,7 +4398,7 @@
                 </a:solidFill>
                 <a:latin typeface="Arial"/>
               </a:rPr>
-              <a:t>Four states captured from the board's HDMI output; top right shows the split</a:t>
+              <a:t>Captures (right: split)</a:t>
             </a:r>
           </a:p>
         </p:txBody>
@@ -4411,7 +4411,7 @@
         </p:nvSpPr>
         <p:spPr>
           <a:xfrm>
-            <a:off x="360000" y="10323315"/>
+            <a:off x="360000" y="10319715"/>
             <a:ext cx="6840000" cy="307968"/>
           </a:xfrm>
           <a:prstGeom prst="rect">

--- a/report/poster/poster.pptx
+++ b/report/poster/poster.pptx
@@ -3166,7 +3166,7 @@
                 </a:solidFill>
                 <a:latin typeface="Arial"/>
               </a:rPr>
-              <a:t>A One-Line-Latency Vision Enhancement Terminal</a:t>
+              <a:t>A Sub-Line-Latency Vision Enhancement Terminal</a:t>
             </a:r>
           </a:p>
         </p:txBody>
@@ -3205,7 +3205,7 @@
                 </a:solidFill>
                 <a:latin typeface="Arial"/>
               </a:rPr>
-              <a:t>PYNQ-Z2  |  real-time enhancement for low-light imaging  |  2026 Embedded Chip &amp; System Design Competition, AMD track, self-selected topic (junior group)  |  Zynq-7000 XC7Z020  |  Vivado / Vitis HLS 2026.1</a:t>
+              <a:t>PYNQ-Z2  |  low-latency enhancement for low-light imaging  |  2026 Embedded Chip &amp; System Design Competition, AMD track, self-selected topic (junior group)  |  Zynq-7000 XC7Z020  |  Vivado / Vitis HLS 2026.1</a:t>
             </a:r>
           </a:p>
         </p:txBody>
@@ -3301,8 +3301,8 @@
         </p:nvSpPr>
         <p:spPr>
           <a:xfrm>
-            <a:off x="360000" y="1404000"/>
-            <a:ext cx="6840000" cy="625428"/>
+            <a:off x="360000" y="1371600"/>
+            <a:ext cx="6840000" cy="768285"/>
           </a:xfrm>
           <a:prstGeom prst="rect">
             <a:avLst/>
@@ -3327,7 +3327,7 @@
                 </a:solidFill>
                 <a:latin typeface="Arial"/>
               </a:rPr>
-              <a:t>Night and dim-light imaging - surveillance, inspection, forensics, automotive night vision, industrial and microscopy work - operates on frames that are dark and low in contrast. Phone/PC pipelines take 100-300 ms from capture to display, which shows as lag and smear once the scene moves. Here the key metric is end-to-end latency, not frame rate, so the whole enhancement chain sits inside the pixel stream with no frame buffer.</a:t>
+              <a:t>Night and dim-light imaging - surveillance, inspection, forensics, automotive night vision, industrial and microscopy work - operates on frames that are dark and low in contrast. Phone/PC pipelines take 100-300 ms from capture to display, which shows as lag and smear once the scene moves. Here the key metric is latency, not frame rate, so the whole enhancement chain sits inside the pixel stream with no frame buffer. This work measures in-pipeline latency (21 clocks); end-to-end latency is not measured.</a:t>
             </a:r>
           </a:p>
         </p:txBody>
@@ -3340,7 +3340,7 @@
         </p:nvSpPr>
         <p:spPr>
           <a:xfrm>
-            <a:off x="360000" y="2065428"/>
+            <a:off x="360000" y="2168685"/>
             <a:ext cx="6840000" cy="244476"/>
           </a:xfrm>
           <a:prstGeom prst="rect">
@@ -3379,7 +3379,7 @@
         </p:nvSpPr>
         <p:spPr>
           <a:xfrm>
-            <a:off x="360000" y="2288628"/>
+            <a:off x="360000" y="2391885"/>
             <a:ext cx="6840000" cy="14400"/>
           </a:xfrm>
           <a:prstGeom prst="rect">
@@ -3423,7 +3423,7 @@
         </p:nvSpPr>
         <p:spPr>
           <a:xfrm>
-            <a:off x="360000" y="2407428"/>
+            <a:off x="360000" y="2478285"/>
             <a:ext cx="6840000" cy="1482571"/>
           </a:xfrm>
           <a:prstGeom prst="rect">
@@ -3449,7 +3449,7 @@
                 </a:solidFill>
                 <a:latin typeface="Arial"/>
               </a:rPr>
-              <a:t>Main path:  PS frame -&gt; VDMA -&gt; enhance -&gt; pixel_unpack -&gt; HDMI OUT, with the kernel sitting in the live pixel stream; measured 21 pixel clocks on the board, seven presets switched while video keeps running.</a:t>
+              <a:t>Main path:  PS frame -&gt; VDMA -&gt; enhance -&gt; pixel_unpack -&gt; HDMI OUT, with the kernel sitting in the live pixel stream; measured 21 pixel clocks (147 ns) on the board, ten presets switched while video keeps running.</a:t>
             </a:r>
           </a:p>
           <a:p>
@@ -3465,7 +3465,7 @@
                 </a:solidFill>
                 <a:latin typeface="Arial"/>
               </a:rPr>
-              <a:t>The frame source is the VDMA because this board's HDMI output only works at 640x480 (800x600/720p/1080p consume no frames; the stock bitstream behaves identically - the pins are unbuffered), while the HDMI input IP cannot run at 640x480. With no common mode, frames come from DDR and the kernel still processes real pixels.</a:t>
+              <a:t>The frame source is the VDMA because this board's HDMI output only works at 640x480 (800x600/720p/1080p consume no frames, as does the stock bitstream), while the HDMI input IP cannot run at 640x480; frames therefore come from DDR and the kernel still processes real pixels.</a:t>
             </a:r>
           </a:p>
           <a:p>
@@ -3526,7 +3526,7 @@
         </p:nvSpPr>
         <p:spPr>
           <a:xfrm>
-            <a:off x="360000" y="3926000"/>
+            <a:off x="360000" y="3989657"/>
             <a:ext cx="6840000" cy="244476"/>
           </a:xfrm>
           <a:prstGeom prst="rect">
@@ -3565,7 +3565,7 @@
         </p:nvSpPr>
         <p:spPr>
           <a:xfrm>
-            <a:off x="360000" y="4149199"/>
+            <a:off x="360000" y="4212857"/>
             <a:ext cx="6840000" cy="14400"/>
           </a:xfrm>
           <a:prstGeom prst="rect">
@@ -3609,7 +3609,7 @@
         </p:nvSpPr>
         <p:spPr>
           <a:xfrm>
-            <a:off x="360000" y="4268000"/>
+            <a:off x="360000" y="4299257"/>
             <a:ext cx="6840000" cy="482571"/>
           </a:xfrm>
           <a:prstGeom prst="rect">
@@ -3648,7 +3648,7 @@
         </p:nvSpPr>
         <p:spPr>
           <a:xfrm>
-            <a:off x="360000" y="4786571"/>
+            <a:off x="360000" y="4810628"/>
             <a:ext cx="6840000" cy="244476"/>
           </a:xfrm>
           <a:prstGeom prst="rect">
@@ -3687,7 +3687,7 @@
         </p:nvSpPr>
         <p:spPr>
           <a:xfrm>
-            <a:off x="360000" y="5009771"/>
+            <a:off x="360000" y="5033828"/>
             <a:ext cx="6840000" cy="14400"/>
           </a:xfrm>
           <a:prstGeom prst="rect">
@@ -3731,8 +3731,8 @@
         </p:nvSpPr>
         <p:spPr>
           <a:xfrm>
-            <a:off x="360000" y="5128571"/>
-            <a:ext cx="6840000" cy="1054000"/>
+            <a:off x="360000" y="5120228"/>
+            <a:ext cx="6840000" cy="1196857"/>
           </a:xfrm>
           <a:prstGeom prst="rect">
             <a:avLst/>
@@ -3757,7 +3757,7 @@
                 </a:solidFill>
                 <a:latin typeface="Arial"/>
               </a:rPr>
-              <a:t>enhance passes C simulation against an independently written C++ golden model in two configurations (contrast+split, and tone+binarise+invert+mono): 9216 beats each, 0 errors. Through the AXI-DMA path, all eight presets are compared channel by channel with the numpy model: 0 mismatches out of 2,764,800 channels each, at 15.6 ms per frame. A second pair of counters brackets the kernel and stamps the first beat in and out: the measured pipeline latency is 16 pixel clocks, i.e. 160 ns at 100 MHz - about 1% of a 720p60 line, which is what having no frame buffer buys. Border policy (horizontal replicate, vertical line-buffer state) is defined once and shared by hardware, testbench and Python model, which is why the comparison can use zero tolerance.</a:t>
+              <a:t>enhance passes C simulation against an independently written C++ golden model in two configurations (contrast+split, and tone+binarise+invert+mono): 9216 beats each, 0 errors. Through the AXI-DMA path, all eight presets of the verified parameter table are compared channel by channel with the numpy model: 0 mismatches out of 2,764,800 channels each, at 15.6 ms per frame. A second pair of counters brackets the kernel and stamps the first beat in and out: the measured pipeline latency is 16 pixel clocks, i.e. 160 ns at 100 MHz - about 1% of a 720p60 line, which is what having no frame buffer buys. Border policy (horizontal replicate, vertical line-buffer state) is defined once and shared by hardware, testbench and Python model, which is why the comparison can use zero tolerance.</a:t>
             </a:r>
           </a:p>
         </p:txBody>
@@ -3770,7 +3770,7 @@
         </p:nvSpPr>
         <p:spPr>
           <a:xfrm>
-            <a:off x="360000" y="6218571"/>
+            <a:off x="360000" y="6345885"/>
             <a:ext cx="6840000" cy="244476"/>
           </a:xfrm>
           <a:prstGeom prst="rect">
@@ -3809,7 +3809,7 @@
         </p:nvSpPr>
         <p:spPr>
           <a:xfrm>
-            <a:off x="360000" y="6441771"/>
+            <a:off x="360000" y="6569085"/>
             <a:ext cx="6840000" cy="14400"/>
           </a:xfrm>
           <a:prstGeom prst="rect">
@@ -3853,7 +3853,7 @@
         </p:nvSpPr>
         <p:spPr>
           <a:xfrm>
-            <a:off x="360000" y="6560571"/>
+            <a:off x="360000" y="6655485"/>
             <a:ext cx="6840000" cy="911142"/>
           </a:xfrm>
           <a:prstGeom prst="rect">
@@ -3879,7 +3879,7 @@
                 </a:solidFill>
                 <a:latin typeface="Arial"/>
               </a:rPr>
-              <a:t>A free-running kernel (ap_ctrl_none) never drains its pipeline when the input stops, so an AXI-DMA transfer can never close and the DMA path needs a bounded variant (ap_ctrl_hs plus a pixel count). The same property bit the other way: HLS registers loop-invariant inputs in the pipeline prologue, so six of nine configuration parameters froze at power-up (see binarize_read_reg_* in the netlist). A gate lets the PS reset only the kernel through a spare configuration bit, so the preset is re-sampled - that is how seven presets switch live.</a:t>
+              <a:t>A free-running kernel (ap_ctrl_none) never drains its pipeline when the input stops, so an AXI-DMA transfer can never close; the DMA path needs a bounded variant (ap_ctrl_hs plus a pixel count). The same property bit the other way: HLS moves loop-invariant inputs into the pipeline prologue, so six of nine configuration parameters froze at power-up (binarize_read_reg_* in the netlist). The fix moves the 59 bits into a dual-port BRAM read once per pixel, which cannot be hoisted: a preset switch is one register write, with no reset and no stream interruption.</a:t>
             </a:r>
           </a:p>
         </p:txBody>
@@ -3892,7 +3892,7 @@
         </p:nvSpPr>
         <p:spPr>
           <a:xfrm>
-            <a:off x="360000" y="7507714"/>
+            <a:off x="360000" y="7595428"/>
             <a:ext cx="6840000" cy="244476"/>
           </a:xfrm>
           <a:prstGeom prst="rect">
@@ -3931,7 +3931,7 @@
         </p:nvSpPr>
         <p:spPr>
           <a:xfrm>
-            <a:off x="360000" y="7730914"/>
+            <a:off x="360000" y="7818628"/>
             <a:ext cx="6840000" cy="14400"/>
           </a:xfrm>
           <a:prstGeom prst="rect">
@@ -3975,7 +3975,7 @@
         </p:nvSpPr>
         <p:spPr>
           <a:xfrm>
-            <a:off x="360000" y="7849714"/>
+            <a:off x="360000" y="7905028"/>
             <a:ext cx="6840000" cy="625428"/>
           </a:xfrm>
           <a:prstGeom prst="rect">
@@ -4001,7 +4001,7 @@
                 </a:solidFill>
                 <a:latin typeface="Arial"/>
               </a:rPr>
-              <a:t>Four board-independent skills ship with the project: overlay handoff linting (.hwh), bit-exact image comparison, measurement collection with PS-vs-PL table generation, and AXI-DMA helpers with cache maintenance and timeouts. Each documents scope, usage, failure modes and what was verified. Everything is scripted: a clean machine rebuilds both bitstreams with two commands.</a:t>
+              <a:t>Five board-independent skills ship with the project: overlay handoff linting (.hwh), bit-exact image comparison, PS-vs-PL measurement collection, AXI-DMA helpers with cache maintenance, and a pitfalls checklist. Each documents scope, usage, failure modes and what was verified. Everything is scripted: a clean machine rebuilds both bitstreams with two commands.</a:t>
             </a:r>
           </a:p>
         </p:txBody>
@@ -4014,7 +4014,7 @@
         </p:nvSpPr>
         <p:spPr>
           <a:xfrm>
-            <a:off x="360000" y="8547142"/>
+            <a:off x="360000" y="8595257"/>
             <a:ext cx="6840000" cy="244476"/>
           </a:xfrm>
           <a:prstGeom prst="rect">
@@ -4053,7 +4053,7 @@
         </p:nvSpPr>
         <p:spPr>
           <a:xfrm>
-            <a:off x="360000" y="8770342"/>
+            <a:off x="360000" y="8818457"/>
             <a:ext cx="6840000" cy="14400"/>
           </a:xfrm>
           <a:prstGeom prst="rect">
@@ -4098,7 +4098,7 @@
           <p:nvPr/>
         </p:nvGraphicFramePr>
         <p:xfrm>
-          <a:off x="360000" y="8889142"/>
+          <a:off x="360000" y="8904857"/>
           <a:ext cx="4320000" cy="1080000"/>
         </p:xfrm>
         <a:graphic>
@@ -4181,7 +4181,7 @@
                           </a:solidFill>
                           <a:latin typeface="Arial"/>
                         </a:rPr>
-                        <a:t>enhance, 8 presets</a:t>
+                        <a:t>enhance, 8 (verified table)</a:t>
                       </a:r>
                     </a:p>
                   </a:txBody>
@@ -4356,8 +4356,8 @@
         </p:blipFill>
         <p:spPr>
           <a:xfrm>
-            <a:off x="4932000" y="8889142"/>
-            <a:ext cx="1620000" cy="1218172"/>
+            <a:off x="4932000" y="8904857"/>
+            <a:ext cx="1548000" cy="1164031"/>
           </a:xfrm>
           <a:prstGeom prst="rect">
             <a:avLst/>
@@ -4372,8 +4372,8 @@
         </p:nvSpPr>
         <p:spPr>
           <a:xfrm>
-            <a:off x="4932000" y="10143315"/>
-            <a:ext cx="1620000" cy="180984"/>
+            <a:off x="4932000" y="10104888"/>
+            <a:ext cx="1548000" cy="180984"/>
           </a:xfrm>
           <a:prstGeom prst="rect">
             <a:avLst/>
@@ -4411,7 +4411,7 @@
         </p:nvSpPr>
         <p:spPr>
           <a:xfrm>
-            <a:off x="360000" y="10319715"/>
+            <a:off x="360000" y="10281288"/>
             <a:ext cx="6840000" cy="307968"/>
           </a:xfrm>
           <a:prstGeom prst="rect">

--- a/report/poster/poster.pptx
+++ b/report/poster/poster.pptx
@@ -3205,7 +3205,7 @@
                 </a:solidFill>
                 <a:latin typeface="Arial"/>
               </a:rPr>
-              <a:t>PYNQ-Z2  |  low-latency enhancement for low-light imaging  |  2026 Embedded Chip &amp; System Design Competition, AMD track, self-selected topic (junior group)  |  Zynq-7000 XC7Z020  |  Vivado / Vitis HLS 2026.1</a:t>
+              <a:t>PYNQ-Z2  |  low-latency enhancement for low-light imaging  |  2026 Embedded Chip &amp; System Design Competition, Zynq-7000 XC7Z020  |  PYNQ-Z2  |  Vivado / Vitis HLS 2026.1</a:t>
             </a:r>
           </a:p>
         </p:txBody>

--- a/report/poster/poster.pptx
+++ b/report/poster/poster.pptx
@@ -6,8 +6,9 @@
   </p:sldMasterIdLst>
   <p:sldIdLst>
     <p:sldId id="256" r:id="rId7"/>
+    <p:sldId id="257" r:id="rId8"/>
   </p:sldIdLst>
-  <p:sldSz cx="7560000" cy="10692000" type="screen4x3"/>
+  <p:sldSz cx="12191695" cy="6858000" type="screen4x3"/>
   <p:notesSz cx="6858000" cy="9144000"/>
   <p:defaultTextStyle>
     <a:defPPr>
@@ -3097,13 +3098,13 @@
         <p:spPr>
           <a:xfrm>
             <a:off x="0" y="0"/>
-            <a:ext cx="7560000" cy="900000"/>
+            <a:ext cx="12191695" cy="6858000"/>
           </a:xfrm>
           <a:prstGeom prst="rect">
             <a:avLst/>
           </a:prstGeom>
           <a:solidFill>
-            <a:srgbClr val="122B4A"/>
+            <a:srgbClr val="FFFFFF"/>
           </a:solidFill>
           <a:ln>
             <a:noFill/>
@@ -3134,137 +3135,20 @@
       </p:sp>
       <p:sp>
         <p:nvSpPr>
-          <p:cNvPr id="3" name="TextBox 2"/>
-          <p:cNvSpPr txBox="1"/>
-          <p:nvPr/>
-        </p:nvSpPr>
-        <p:spPr>
-          <a:xfrm>
-            <a:off x="360000" y="144000"/>
-            <a:ext cx="6840000" cy="339714"/>
-          </a:xfrm>
-          <a:prstGeom prst="rect">
-            <a:avLst/>
-          </a:prstGeom>
-          <a:noFill/>
-        </p:spPr>
-        <p:txBody>
-          <a:bodyPr wrap="square">
-            <a:noAutofit/>
-          </a:bodyPr>
-          <a:lstStyle/>
-          <a:p>
-            <a:pPr algn="l">
-              <a:lnSpc>
-                <a:spcPct val="100000"/>
-              </a:lnSpc>
-            </a:pPr>
-            <a:r>
-              <a:rPr sz="1800" b="1">
-                <a:solidFill>
-                  <a:srgbClr val="FFFFFF"/>
-                </a:solidFill>
-                <a:latin typeface="Arial"/>
-              </a:rPr>
-              <a:t>A Sub-Line-Latency Vision Enhancement Terminal</a:t>
-            </a:r>
-          </a:p>
-        </p:txBody>
-      </p:sp>
-      <p:sp>
-        <p:nvSpPr>
-          <p:cNvPr id="4" name="TextBox 3"/>
-          <p:cNvSpPr txBox="1"/>
-          <p:nvPr/>
-        </p:nvSpPr>
-        <p:spPr>
-          <a:xfrm>
-            <a:off x="360000" y="540000"/>
-            <a:ext cx="6840000" cy="339714"/>
-          </a:xfrm>
-          <a:prstGeom prst="rect">
-            <a:avLst/>
-          </a:prstGeom>
-          <a:noFill/>
-        </p:spPr>
-        <p:txBody>
-          <a:bodyPr wrap="square">
-            <a:noAutofit/>
-          </a:bodyPr>
-          <a:lstStyle/>
-          <a:p>
-            <a:pPr algn="l">
-              <a:lnSpc>
-                <a:spcPct val="100000"/>
-              </a:lnSpc>
-            </a:pPr>
-            <a:r>
-              <a:rPr sz="900" b="0">
-                <a:solidFill>
-                  <a:srgbClr val="C8D8EA"/>
-                </a:solidFill>
-                <a:latin typeface="Arial"/>
-              </a:rPr>
-              <a:t>PYNQ-Z2  |  low-latency enhancement for low-light imaging  |  2026 Embedded Chip &amp; System Design Competition, Zynq-7000 XC7Z020  |  PYNQ-Z2  |  Vivado / Vitis HLS 2026.1</a:t>
-            </a:r>
-          </a:p>
-        </p:txBody>
-      </p:sp>
-      <p:sp>
-        <p:nvSpPr>
-          <p:cNvPr id="5" name="TextBox 4"/>
-          <p:cNvSpPr txBox="1"/>
-          <p:nvPr/>
-        </p:nvSpPr>
-        <p:spPr>
-          <a:xfrm>
-            <a:off x="360000" y="1062000"/>
-            <a:ext cx="6840000" cy="244476"/>
-          </a:xfrm>
-          <a:prstGeom prst="rect">
-            <a:avLst/>
-          </a:prstGeom>
-          <a:noFill/>
-        </p:spPr>
-        <p:txBody>
-          <a:bodyPr wrap="square">
-            <a:noAutofit/>
-          </a:bodyPr>
-          <a:lstStyle/>
-          <a:p>
-            <a:pPr algn="l">
-              <a:lnSpc>
-                <a:spcPct val="100000"/>
-              </a:lnSpc>
-            </a:pPr>
-            <a:r>
-              <a:rPr sz="1200" b="1">
-                <a:solidFill>
-                  <a:srgbClr val="1E88E5"/>
-                </a:solidFill>
-                <a:latin typeface="Arial"/>
-              </a:rPr>
-              <a:t>Motivation</a:t>
-            </a:r>
-          </a:p>
-        </p:txBody>
-      </p:sp>
-      <p:sp>
-        <p:nvSpPr>
-          <p:cNvPr id="6" name="Rectangle 5"/>
+          <p:cNvPr id="3" name="Rectangle 2"/>
           <p:cNvSpPr/>
           <p:nvPr/>
         </p:nvSpPr>
         <p:spPr>
           <a:xfrm>
-            <a:off x="360000" y="1285200"/>
-            <a:ext cx="6840000" cy="14400"/>
+            <a:off x="0" y="0"/>
+            <a:ext cx="12191695" cy="1115568"/>
           </a:xfrm>
           <a:prstGeom prst="rect">
             <a:avLst/>
           </a:prstGeom>
           <a:solidFill>
-            <a:srgbClr val="1E88E5"/>
+            <a:srgbClr val="0E2A47"/>
           </a:solidFill>
           <a:ln>
             <a:noFill/>
@@ -3295,14 +3179,14 @@
       </p:sp>
       <p:sp>
         <p:nvSpPr>
-          <p:cNvPr id="7" name="TextBox 6"/>
+          <p:cNvPr id="4" name="TextBox 3"/>
           <p:cNvSpPr txBox="1"/>
           <p:nvPr/>
         </p:nvSpPr>
         <p:spPr>
           <a:xfrm>
-            <a:off x="360000" y="1371600"/>
-            <a:ext cx="6840000" cy="768285"/>
+            <a:off x="502920" y="164592"/>
+            <a:ext cx="9052560" cy="548640"/>
           </a:xfrm>
           <a:prstGeom prst="rect">
             <a:avLst/>
@@ -3310,8 +3194,8 @@
           <a:noFill/>
         </p:spPr>
         <p:txBody>
-          <a:bodyPr wrap="square">
-            <a:noAutofit/>
+          <a:bodyPr wrap="square" anchor="t" lIns="0" rIns="0" tIns="0" bIns="0">
+            <a:spAutoFit/>
           </a:bodyPr>
           <a:lstStyle/>
           <a:p>
@@ -3319,29 +3203,32 @@
               <a:lnSpc>
                 <a:spcPct val="100000"/>
               </a:lnSpc>
+              <a:spcAft>
+                <a:spcPts val="0"/>
+              </a:spcAft>
             </a:pPr>
             <a:r>
-              <a:rPr sz="900" b="0">
-                <a:solidFill>
-                  <a:srgbClr val="333333"/>
-                </a:solidFill>
-                <a:latin typeface="Arial"/>
-              </a:rPr>
-              <a:t>Night and dim-light imaging - surveillance, inspection, forensics, automotive night vision, industrial and microscopy work - operates on frames that are dark and low in contrast. Phone/PC pipelines take 100-300 ms from capture to display, which shows as lag and smear once the scene moves. Here the key metric is latency, not frame rate, so the whole enhancement chain sits inside the pixel stream with no frame buffer. This work measures in-pipeline latency (21 clocks); end-to-end latency is not measured.</a:t>
-            </a:r>
-          </a:p>
-        </p:txBody>
-      </p:sp>
-      <p:sp>
-        <p:nvSpPr>
-          <p:cNvPr id="8" name="TextBox 7"/>
+              <a:rPr sz="3300" b="1">
+                <a:solidFill>
+                  <a:srgbClr val="FFFFFF"/>
+                </a:solidFill>
+                <a:latin typeface="Microsoft YaHei"/>
+              </a:rPr>
+              <a:t>低延迟视觉增强终端</a:t>
+            </a:r>
+          </a:p>
+        </p:txBody>
+      </p:sp>
+      <p:sp>
+        <p:nvSpPr>
+          <p:cNvPr id="5" name="TextBox 4"/>
           <p:cNvSpPr txBox="1"/>
           <p:nvPr/>
         </p:nvSpPr>
         <p:spPr>
           <a:xfrm>
-            <a:off x="360000" y="2168685"/>
-            <a:ext cx="6840000" cy="244476"/>
+            <a:off x="521207" y="731520"/>
+            <a:ext cx="8778240" cy="274320"/>
           </a:xfrm>
           <a:prstGeom prst="rect">
             <a:avLst/>
@@ -3349,8 +3236,8 @@
           <a:noFill/>
         </p:spPr>
         <p:txBody>
-          <a:bodyPr wrap="square">
-            <a:noAutofit/>
+          <a:bodyPr wrap="square" anchor="t" lIns="0" rIns="0" tIns="0" bIns="0">
+            <a:spAutoFit/>
           </a:bodyPr>
           <a:lstStyle/>
           <a:p>
@@ -3358,15 +3245,144 @@
               <a:lnSpc>
                 <a:spcPct val="100000"/>
               </a:lnSpc>
+              <a:spcAft>
+                <a:spcPts val="0"/>
+              </a:spcAft>
             </a:pPr>
             <a:r>
-              <a:rPr sz="1200" b="1">
-                <a:solidFill>
-                  <a:srgbClr val="1E88E5"/>
-                </a:solidFill>
-                <a:latin typeface="Arial"/>
-              </a:rPr>
-              <a:t>Architecture</a:t>
+              <a:rPr sz="1250" b="0">
+                <a:solidFill>
+                  <a:srgbClr val="C8D6E2"/>
+                </a:solidFill>
+                <a:latin typeface="Microsoft YaHei"/>
+              </a:rPr>
+              <a:t>面向低照度图像观察的 FPGA 像素流增强</a:t>
+            </a:r>
+          </a:p>
+        </p:txBody>
+      </p:sp>
+      <p:sp>
+        <p:nvSpPr>
+          <p:cNvPr id="6" name="TextBox 5"/>
+          <p:cNvSpPr txBox="1"/>
+          <p:nvPr/>
+        </p:nvSpPr>
+        <p:spPr>
+          <a:xfrm>
+            <a:off x="9052560" y="237744"/>
+            <a:ext cx="2743200" cy="256032"/>
+          </a:xfrm>
+          <a:prstGeom prst="rect">
+            <a:avLst/>
+          </a:prstGeom>
+          <a:noFill/>
+        </p:spPr>
+        <p:txBody>
+          <a:bodyPr wrap="square" anchor="t" lIns="0" rIns="0" tIns="0" bIns="0">
+            <a:spAutoFit/>
+          </a:bodyPr>
+          <a:lstStyle/>
+          <a:p>
+            <a:pPr algn="r">
+              <a:lnSpc>
+                <a:spcPct val="100000"/>
+              </a:lnSpc>
+              <a:spcAft>
+                <a:spcPts val="0"/>
+              </a:spcAft>
+            </a:pPr>
+            <a:r>
+              <a:rPr sz="1100" b="0">
+                <a:solidFill>
+                  <a:srgbClr val="C8D6E2"/>
+                </a:solidFill>
+                <a:latin typeface="Segoe UI"/>
+              </a:rPr>
+              <a:t>中文版</a:t>
+            </a:r>
+          </a:p>
+        </p:txBody>
+      </p:sp>
+      <p:sp>
+        <p:nvSpPr>
+          <p:cNvPr id="7" name="TextBox 6"/>
+          <p:cNvSpPr txBox="1"/>
+          <p:nvPr/>
+        </p:nvSpPr>
+        <p:spPr>
+          <a:xfrm>
+            <a:off x="9052560" y="530352"/>
+            <a:ext cx="2743200" cy="256032"/>
+          </a:xfrm>
+          <a:prstGeom prst="rect">
+            <a:avLst/>
+          </a:prstGeom>
+          <a:noFill/>
+        </p:spPr>
+        <p:txBody>
+          <a:bodyPr wrap="square" anchor="t" lIns="0" rIns="0" tIns="0" bIns="0">
+            <a:spAutoFit/>
+          </a:bodyPr>
+          <a:lstStyle/>
+          <a:p>
+            <a:pPr algn="r">
+              <a:lnSpc>
+                <a:spcPct val="100000"/>
+              </a:lnSpc>
+              <a:spcAft>
+                <a:spcPts val="0"/>
+              </a:spcAft>
+            </a:pPr>
+            <a:r>
+              <a:rPr sz="1000" b="0">
+                <a:solidFill>
+                  <a:srgbClr val="8FA6BC"/>
+                </a:solidFill>
+                <a:latin typeface="Segoe UI"/>
+              </a:rPr>
+              <a:t>PYNQ-Z2 · XC7Z020 · Vitis HLS 2026.1</a:t>
+            </a:r>
+          </a:p>
+        </p:txBody>
+      </p:sp>
+      <p:sp>
+        <p:nvSpPr>
+          <p:cNvPr id="8" name="TextBox 7"/>
+          <p:cNvSpPr txBox="1"/>
+          <p:nvPr/>
+        </p:nvSpPr>
+        <p:spPr>
+          <a:xfrm>
+            <a:off x="502920" y="1325880"/>
+            <a:ext cx="3474720" cy="256032"/>
+          </a:xfrm>
+          <a:prstGeom prst="rect">
+            <a:avLst/>
+          </a:prstGeom>
+          <a:noFill/>
+        </p:spPr>
+        <p:txBody>
+          <a:bodyPr wrap="square" anchor="t" lIns="0" rIns="0" tIns="0" bIns="0">
+            <a:spAutoFit/>
+          </a:bodyPr>
+          <a:lstStyle/>
+          <a:p>
+            <a:pPr algn="l">
+              <a:lnSpc>
+                <a:spcPct val="100000"/>
+              </a:lnSpc>
+              <a:spcAft>
+                <a:spcPts val="0"/>
+              </a:spcAft>
+            </a:pPr>
+            <a:r>
+              <a:rPr sz="1400" b="1">
+                <a:solidFill>
+                  <a:srgbClr val="008CC8"/>
+                </a:solidFill>
+                <a:latin typeface="Microsoft YaHei"/>
+              </a:rPr>
+              <a:t>1  背景与目标</a:t>
             </a:r>
           </a:p>
         </p:txBody>
@@ -3379,14 +3395,14 @@
         </p:nvSpPr>
         <p:spPr>
           <a:xfrm>
-            <a:off x="360000" y="2391885"/>
-            <a:ext cx="6840000" cy="14400"/>
+            <a:off x="502920" y="1609344"/>
+            <a:ext cx="3474720" cy="13716"/>
           </a:xfrm>
           <a:prstGeom prst="rect">
             <a:avLst/>
           </a:prstGeom>
           <a:solidFill>
-            <a:srgbClr val="1E88E5"/>
+            <a:srgbClr val="D8E0E8"/>
           </a:solidFill>
           <a:ln>
             <a:noFill/>
@@ -3423,8 +3439,8 @@
         </p:nvSpPr>
         <p:spPr>
           <a:xfrm>
-            <a:off x="360000" y="2478285"/>
-            <a:ext cx="6840000" cy="1482571"/>
+            <a:off x="502920" y="1755648"/>
+            <a:ext cx="3474720" cy="201168"/>
           </a:xfrm>
           <a:prstGeom prst="rect">
             <a:avLst/>
@@ -3432,8 +3448,8 @@
           <a:noFill/>
         </p:spPr>
         <p:txBody>
-          <a:bodyPr wrap="square">
-            <a:noAutofit/>
+          <a:bodyPr wrap="square" anchor="t" lIns="0" rIns="0" tIns="0" bIns="0">
+            <a:spAutoFit/>
           </a:bodyPr>
           <a:lstStyle/>
           <a:p>
@@ -3441,138 +3457,374 @@
               <a:lnSpc>
                 <a:spcPct val="100000"/>
               </a:lnSpc>
+              <a:spcAft>
+                <a:spcPts val="0"/>
+              </a:spcAft>
             </a:pPr>
             <a:r>
-              <a:rPr sz="900" b="0">
-                <a:solidFill>
-                  <a:srgbClr val="333333"/>
-                </a:solidFill>
-                <a:latin typeface="Arial"/>
-              </a:rPr>
-              <a:t>Main path:  PS frame -&gt; VDMA -&gt; enhance -&gt; pixel_unpack -&gt; HDMI OUT, with the kernel sitting in the live pixel stream; measured 21 pixel clocks (147 ns) on the board, ten presets switched while video keeps running.</a:t>
-            </a:r>
-          </a:p>
+              <a:rPr sz="1140" b="1">
+                <a:solidFill>
+                  <a:srgbClr val="1A1A1A"/>
+                </a:solidFill>
+                <a:latin typeface="Microsoft YaHei"/>
+              </a:rPr>
+              <a:t>问题</a:t>
+            </a:r>
+          </a:p>
+        </p:txBody>
+      </p:sp>
+      <p:sp>
+        <p:nvSpPr>
+          <p:cNvPr id="11" name="TextBox 10"/>
+          <p:cNvSpPr txBox="1"/>
+          <p:nvPr/>
+        </p:nvSpPr>
+        <p:spPr>
+          <a:xfrm>
+            <a:off x="502920" y="2002536"/>
+            <a:ext cx="3474720" cy="438912"/>
+          </a:xfrm>
+          <a:prstGeom prst="rect">
+            <a:avLst/>
+          </a:prstGeom>
+          <a:noFill/>
+        </p:spPr>
+        <p:txBody>
+          <a:bodyPr wrap="square" anchor="t" lIns="0" rIns="0" tIns="0" bIns="0">
+            <a:spAutoFit/>
+          </a:bodyPr>
+          <a:lstStyle/>
+          <a:p>
+            <a:pPr algn="l">
+              <a:lnSpc>
+                <a:spcPct val="112000"/>
+              </a:lnSpc>
+              <a:spcAft>
+                <a:spcPts val="0"/>
+              </a:spcAft>
+            </a:pPr>
+            <a:r>
+              <a:rPr sz="1080" b="0">
+                <a:solidFill>
+                  <a:srgbClr val="555F6B"/>
+                </a:solidFill>
+                <a:latin typeface="Microsoft YaHei"/>
+              </a:rPr>
+              <a:t>低照度图像噪声大、对比度低；软件增强一帧 3.1 s，无法连续观察。</a:t>
+            </a:r>
+          </a:p>
+        </p:txBody>
+      </p:sp>
+      <p:sp>
+        <p:nvSpPr>
+          <p:cNvPr id="12" name="TextBox 11"/>
+          <p:cNvSpPr txBox="1"/>
+          <p:nvPr/>
+        </p:nvSpPr>
+        <p:spPr>
+          <a:xfrm>
+            <a:off x="502920" y="2834639"/>
+            <a:ext cx="3474720" cy="201168"/>
+          </a:xfrm>
+          <a:prstGeom prst="rect">
+            <a:avLst/>
+          </a:prstGeom>
+          <a:noFill/>
+        </p:spPr>
+        <p:txBody>
+          <a:bodyPr wrap="square" anchor="t" lIns="0" rIns="0" tIns="0" bIns="0">
+            <a:spAutoFit/>
+          </a:bodyPr>
+          <a:lstStyle/>
           <a:p>
             <a:pPr algn="l">
               <a:lnSpc>
                 <a:spcPct val="100000"/>
               </a:lnSpc>
+              <a:spcAft>
+                <a:spcPts val="0"/>
+              </a:spcAft>
             </a:pPr>
             <a:r>
-              <a:rPr sz="900" b="0">
-                <a:solidFill>
-                  <a:srgbClr val="333333"/>
-                </a:solidFill>
-                <a:latin typeface="Arial"/>
-              </a:rPr>
-              <a:t>The frame source is the VDMA because this board's HDMI output only works at 640x480 (800x600/720p/1080p consume no frames, as does the stock bitstream), while the HDMI input IP cannot run at 640x480; frames therefore come from DDR and the kernel still processes real pixels.</a:t>
-            </a:r>
-          </a:p>
+              <a:rPr sz="1140" b="1">
+                <a:solidFill>
+                  <a:srgbClr val="1A1A1A"/>
+                </a:solidFill>
+                <a:latin typeface="Microsoft YaHei"/>
+              </a:rPr>
+              <a:t>思路</a:t>
+            </a:r>
+          </a:p>
+        </p:txBody>
+      </p:sp>
+      <p:sp>
+        <p:nvSpPr>
+          <p:cNvPr id="13" name="TextBox 12"/>
+          <p:cNvSpPr txBox="1"/>
+          <p:nvPr/>
+        </p:nvSpPr>
+        <p:spPr>
+          <a:xfrm>
+            <a:off x="502920" y="3081527"/>
+            <a:ext cx="3474720" cy="438912"/>
+          </a:xfrm>
+          <a:prstGeom prst="rect">
+            <a:avLst/>
+          </a:prstGeom>
+          <a:noFill/>
+        </p:spPr>
+        <p:txBody>
+          <a:bodyPr wrap="square" anchor="t" lIns="0" rIns="0" tIns="0" bIns="0">
+            <a:spAutoFit/>
+          </a:bodyPr>
+          <a:lstStyle/>
+          <a:p>
+            <a:pPr algn="l">
+              <a:lnSpc>
+                <a:spcPct val="112000"/>
+              </a:lnSpc>
+              <a:spcAft>
+                <a:spcPts val="0"/>
+              </a:spcAft>
+            </a:pPr>
+            <a:r>
+              <a:rPr sz="1080" b="0">
+                <a:solidFill>
+                  <a:srgbClr val="555F6B"/>
+                </a:solidFill>
+                <a:latin typeface="Microsoft YaHei"/>
+              </a:rPr>
+              <a:t>把整条增强链放进 PL 像素通路，像素进多少出多少，延迟以时钟计而不是以帧计。</a:t>
+            </a:r>
+          </a:p>
+        </p:txBody>
+      </p:sp>
+      <p:sp>
+        <p:nvSpPr>
+          <p:cNvPr id="14" name="TextBox 13"/>
+          <p:cNvSpPr txBox="1"/>
+          <p:nvPr/>
+        </p:nvSpPr>
+        <p:spPr>
+          <a:xfrm>
+            <a:off x="502920" y="3913631"/>
+            <a:ext cx="3474720" cy="201168"/>
+          </a:xfrm>
+          <a:prstGeom prst="rect">
+            <a:avLst/>
+          </a:prstGeom>
+          <a:noFill/>
+        </p:spPr>
+        <p:txBody>
+          <a:bodyPr wrap="square" anchor="t" lIns="0" rIns="0" tIns="0" bIns="0">
+            <a:spAutoFit/>
+          </a:bodyPr>
+          <a:lstStyle/>
           <a:p>
             <a:pPr algn="l">
               <a:lnSpc>
                 <a:spcPct val="100000"/>
               </a:lnSpc>
+              <a:spcAft>
+                <a:spcPts val="0"/>
+              </a:spcAft>
             </a:pPr>
             <a:r>
-              <a:rPr sz="900" b="0">
-                <a:solidFill>
-                  <a:srgbClr val="333333"/>
-                </a:solidFill>
-                <a:latin typeface="Arial"/>
-              </a:rPr>
-              <a:t>The enhance kernel runs local contrast -&gt; tone curve -&gt; binarise/invert -&gt; split screen, all integer, one pixel per clock; 59 configuration bits are driven from the PS at run time.</a:t>
-            </a:r>
-          </a:p>
+              <a:rPr sz="1140" b="1">
+                <a:solidFill>
+                  <a:srgbClr val="1A1A1A"/>
+                </a:solidFill>
+                <a:latin typeface="Microsoft YaHei"/>
+              </a:rPr>
+              <a:t>目标</a:t>
+            </a:r>
+          </a:p>
+        </p:txBody>
+      </p:sp>
+      <p:sp>
+        <p:nvSpPr>
+          <p:cNvPr id="15" name="TextBox 14"/>
+          <p:cNvSpPr txBox="1"/>
+          <p:nvPr/>
+        </p:nvSpPr>
+        <p:spPr>
+          <a:xfrm>
+            <a:off x="502920" y="4160519"/>
+            <a:ext cx="3474720" cy="438912"/>
+          </a:xfrm>
+          <a:prstGeom prst="rect">
+            <a:avLst/>
+          </a:prstGeom>
+          <a:noFill/>
+        </p:spPr>
+        <p:txBody>
+          <a:bodyPr wrap="square" anchor="t" lIns="0" rIns="0" tIns="0" bIns="0">
+            <a:spAutoFit/>
+          </a:bodyPr>
+          <a:lstStyle/>
+          <a:p>
+            <a:pPr algn="l">
+              <a:lnSpc>
+                <a:spcPct val="112000"/>
+              </a:lnSpc>
+              <a:spcAft>
+                <a:spcPts val="0"/>
+              </a:spcAft>
+            </a:pPr>
+            <a:r>
+              <a:rPr sz="1080" b="0">
+                <a:solidFill>
+                  <a:srgbClr val="555F6B"/>
+                </a:solidFill>
+                <a:latin typeface="Microsoft YaHei"/>
+              </a:rPr>
+              <a:t>不加帧缓存，同时做到画质可调、结果可复算、参数可在线切换。</a:t>
+            </a:r>
+          </a:p>
+        </p:txBody>
+      </p:sp>
+      <p:sp>
+        <p:nvSpPr>
+          <p:cNvPr id="16" name="TextBox 15"/>
+          <p:cNvSpPr txBox="1"/>
+          <p:nvPr/>
+        </p:nvSpPr>
+        <p:spPr>
+          <a:xfrm>
+            <a:off x="502920" y="4992623"/>
+            <a:ext cx="3474720" cy="201168"/>
+          </a:xfrm>
+          <a:prstGeom prst="rect">
+            <a:avLst/>
+          </a:prstGeom>
+          <a:noFill/>
+        </p:spPr>
+        <p:txBody>
+          <a:bodyPr wrap="square" anchor="t" lIns="0" rIns="0" tIns="0" bIns="0">
+            <a:spAutoFit/>
+          </a:bodyPr>
+          <a:lstStyle/>
           <a:p>
             <a:pPr algn="l">
               <a:lnSpc>
                 <a:spcPct val="100000"/>
               </a:lnSpc>
+              <a:spcAft>
+                <a:spcPts val="0"/>
+              </a:spcAft>
             </a:pPr>
             <a:r>
-              <a:rPr sz="900" b="0">
-                <a:solidFill>
-                  <a:srgbClr val="333333"/>
-                </a:solidFill>
-                <a:latin typeface="Arial"/>
-              </a:rPr>
-              <a:t>Verification path:  PS &lt;-&gt; DDR &lt;-&gt; AXI DMA &lt;-&gt; operator, readable back, so bit-exact checks need no display.</a:t>
-            </a:r>
-          </a:p>
+              <a:rPr sz="1140" b="1">
+                <a:solidFill>
+                  <a:srgbClr val="1A1A1A"/>
+                </a:solidFill>
+                <a:latin typeface="Microsoft YaHei"/>
+              </a:rPr>
+              <a:t>方法</a:t>
+            </a:r>
+          </a:p>
+        </p:txBody>
+      </p:sp>
+      <p:sp>
+        <p:nvSpPr>
+          <p:cNvPr id="17" name="TextBox 16"/>
+          <p:cNvSpPr txBox="1"/>
+          <p:nvPr/>
+        </p:nvSpPr>
+        <p:spPr>
+          <a:xfrm>
+            <a:off x="502920" y="5239511"/>
+            <a:ext cx="3474720" cy="438912"/>
+          </a:xfrm>
+          <a:prstGeom prst="rect">
+            <a:avLst/>
+          </a:prstGeom>
+          <a:noFill/>
+        </p:spPr>
+        <p:txBody>
+          <a:bodyPr wrap="square" anchor="t" lIns="0" rIns="0" tIns="0" bIns="0">
+            <a:spAutoFit/>
+          </a:bodyPr>
+          <a:lstStyle/>
+          <a:p>
+            <a:pPr algn="l">
+              <a:lnSpc>
+                <a:spcPct val="112000"/>
+              </a:lnSpc>
+              <a:spcAft>
+                <a:spcPts val="0"/>
+              </a:spcAft>
+            </a:pPr>
+            <a:r>
+              <a:rPr sz="1080" b="0">
+                <a:solidFill>
+                  <a:srgbClr val="555F6B"/>
+                </a:solidFill>
+                <a:latin typeface="Microsoft YaHei"/>
+              </a:rPr>
+              <a:t>以逐位比对定正确性，以双时间戳定延迟，以寄存器写定切换。</a:t>
+            </a:r>
+          </a:p>
+        </p:txBody>
+      </p:sp>
+      <p:sp>
+        <p:nvSpPr>
+          <p:cNvPr id="18" name="TextBox 17"/>
+          <p:cNvSpPr txBox="1"/>
+          <p:nvPr/>
+        </p:nvSpPr>
+        <p:spPr>
+          <a:xfrm>
+            <a:off x="4251960" y="1325880"/>
+            <a:ext cx="3794760" cy="256032"/>
+          </a:xfrm>
+          <a:prstGeom prst="rect">
+            <a:avLst/>
+          </a:prstGeom>
+          <a:noFill/>
+        </p:spPr>
+        <p:txBody>
+          <a:bodyPr wrap="square" anchor="t" lIns="0" rIns="0" tIns="0" bIns="0">
+            <a:spAutoFit/>
+          </a:bodyPr>
+          <a:lstStyle/>
           <a:p>
             <a:pPr algn="l">
               <a:lnSpc>
                 <a:spcPct val="100000"/>
               </a:lnSpc>
+              <a:spcAft>
+                <a:spcPts val="0"/>
+              </a:spcAft>
             </a:pPr>
             <a:r>
-              <a:rPr sz="900" b="0">
-                <a:solidFill>
-                  <a:srgbClr val="333333"/>
-                </a:solidFill>
-                <a:latin typeface="Arial"/>
-              </a:rPr>
-              <a:t>Three rotating line buffers plus per-row 3-tap shift registers give each buffer one read and one write per pixel, which is what fits II = 1 into a dual-port BRAM.</a:t>
-            </a:r>
-          </a:p>
-        </p:txBody>
-      </p:sp>
-      <p:sp>
-        <p:nvSpPr>
-          <p:cNvPr id="11" name="TextBox 10"/>
-          <p:cNvSpPr txBox="1"/>
-          <p:nvPr/>
-        </p:nvSpPr>
-        <p:spPr>
-          <a:xfrm>
-            <a:off x="360000" y="3989657"/>
-            <a:ext cx="6840000" cy="244476"/>
-          </a:xfrm>
-          <a:prstGeom prst="rect">
-            <a:avLst/>
-          </a:prstGeom>
-          <a:noFill/>
-        </p:spPr>
-        <p:txBody>
-          <a:bodyPr wrap="square">
-            <a:noAutofit/>
-          </a:bodyPr>
-          <a:lstStyle/>
-          <a:p>
-            <a:pPr algn="l">
-              <a:lnSpc>
-                <a:spcPct val="100000"/>
-              </a:lnSpc>
-            </a:pPr>
-            <a:r>
-              <a:rPr sz="1200" b="1">
-                <a:solidFill>
-                  <a:srgbClr val="1E88E5"/>
-                </a:solidFill>
-                <a:latin typeface="Arial"/>
-              </a:rPr>
-              <a:t>Operators</a:t>
-            </a:r>
-          </a:p>
-        </p:txBody>
-      </p:sp>
-      <p:sp>
-        <p:nvSpPr>
-          <p:cNvPr id="12" name="Rectangle 11"/>
+              <a:rPr sz="1400" b="1">
+                <a:solidFill>
+                  <a:srgbClr val="008CC8"/>
+                </a:solidFill>
+                <a:latin typeface="Microsoft YaHei"/>
+              </a:rPr>
+              <a:t>2  系统架构</a:t>
+            </a:r>
+          </a:p>
+        </p:txBody>
+      </p:sp>
+      <p:sp>
+        <p:nvSpPr>
+          <p:cNvPr id="19" name="Rectangle 18"/>
           <p:cNvSpPr/>
           <p:nvPr/>
         </p:nvSpPr>
         <p:spPr>
           <a:xfrm>
-            <a:off x="360000" y="4212857"/>
-            <a:ext cx="6840000" cy="14400"/>
+            <a:off x="4251960" y="1609344"/>
+            <a:ext cx="3794760" cy="13716"/>
           </a:xfrm>
           <a:prstGeom prst="rect">
             <a:avLst/>
           </a:prstGeom>
           <a:solidFill>
-            <a:srgbClr val="1E88E5"/>
+            <a:srgbClr val="D8E0E8"/>
           </a:solidFill>
           <a:ln>
             <a:noFill/>
@@ -3603,98 +3855,20 @@
       </p:sp>
       <p:sp>
         <p:nvSpPr>
-          <p:cNvPr id="13" name="TextBox 12"/>
-          <p:cNvSpPr txBox="1"/>
-          <p:nvPr/>
-        </p:nvSpPr>
-        <p:spPr>
-          <a:xfrm>
-            <a:off x="360000" y="4299257"/>
-            <a:ext cx="6840000" cy="482571"/>
-          </a:xfrm>
-          <a:prstGeom prst="rect">
-            <a:avLst/>
-          </a:prstGeom>
-          <a:noFill/>
-        </p:spPr>
-        <p:txBody>
-          <a:bodyPr wrap="square">
-            <a:noAutofit/>
-          </a:bodyPr>
-          <a:lstStyle/>
-          <a:p>
-            <a:pPr algn="l">
-              <a:lnSpc>
-                <a:spcPct val="100000"/>
-              </a:lnSpc>
-            </a:pPr>
-            <a:r>
-              <a:rPr sz="900" b="0">
-                <a:solidFill>
-                  <a:srgbClr val="333333"/>
-                </a:solidFill>
-                <a:latin typeface="Arial"/>
-              </a:rPr>
-              <a:t>enhance: 3 BRAM, 2 DSP, 2168 FF, 1659 LUT (3%), II = 1, estimated Fmax 194.59 MHz at 7 ns. The operator family behind it - Sobel, 3x3 Gaussian, 3x3 sharpen - is hand-written HLS too (II = 1, 194.6 MHz, under 1.1k LUT each), and colour-space conversion reuses PYNQ's verified color_convert IP instead of being rewritten.</a:t>
-            </a:r>
-          </a:p>
-        </p:txBody>
-      </p:sp>
-      <p:sp>
-        <p:nvSpPr>
-          <p:cNvPr id="14" name="TextBox 13"/>
-          <p:cNvSpPr txBox="1"/>
-          <p:nvPr/>
-        </p:nvSpPr>
-        <p:spPr>
-          <a:xfrm>
-            <a:off x="360000" y="4810628"/>
-            <a:ext cx="6840000" cy="244476"/>
-          </a:xfrm>
-          <a:prstGeom prst="rect">
-            <a:avLst/>
-          </a:prstGeom>
-          <a:noFill/>
-        </p:spPr>
-        <p:txBody>
-          <a:bodyPr wrap="square">
-            <a:noAutofit/>
-          </a:bodyPr>
-          <a:lstStyle/>
-          <a:p>
-            <a:pPr algn="l">
-              <a:lnSpc>
-                <a:spcPct val="100000"/>
-              </a:lnSpc>
-            </a:pPr>
-            <a:r>
-              <a:rPr sz="1200" b="1">
-                <a:solidFill>
-                  <a:srgbClr val="1E88E5"/>
-                </a:solidFill>
-                <a:latin typeface="Arial"/>
-              </a:rPr>
-              <a:t>Correctness</a:t>
-            </a:r>
-          </a:p>
-        </p:txBody>
-      </p:sp>
-      <p:sp>
-        <p:nvSpPr>
-          <p:cNvPr id="15" name="Rectangle 14"/>
+          <p:cNvPr id="20" name="Rounded Rectangle 19"/>
           <p:cNvSpPr/>
           <p:nvPr/>
         </p:nvSpPr>
         <p:spPr>
           <a:xfrm>
-            <a:off x="360000" y="5033828"/>
-            <a:ext cx="6840000" cy="14400"/>
-          </a:xfrm>
-          <a:prstGeom prst="rect">
+            <a:off x="4251960" y="1755648"/>
+            <a:ext cx="1051560" cy="420624"/>
+          </a:xfrm>
+          <a:prstGeom prst="roundRect">
             <a:avLst/>
           </a:prstGeom>
           <a:solidFill>
-            <a:srgbClr val="1E88E5"/>
+            <a:srgbClr val="0E2A47"/>
           </a:solidFill>
           <a:ln>
             <a:noFill/>
@@ -3716,23 +3890,32 @@
           </a:fontRef>
         </p:style>
         <p:txBody>
-          <a:bodyPr rtlCol="0" anchor="ctr"/>
+          <a:bodyPr rtlCol="0" anchor="ctr" wrap="square" lIns="27432" rIns="27432"/>
           <a:lstStyle/>
           <a:p>
             <a:pPr algn="ctr"/>
-          </a:p>
-        </p:txBody>
-      </p:sp>
-      <p:sp>
-        <p:nvSpPr>
-          <p:cNvPr id="16" name="TextBox 15"/>
+            <a:r>
+              <a:rPr sz="850" b="1">
+                <a:solidFill>
+                  <a:srgbClr val="FFFFFF"/>
+                </a:solidFill>
+                <a:latin typeface="Microsoft YaHei"/>
+              </a:rPr>
+              <a:t>主机浏览器</a:t>
+            </a:r>
+          </a:p>
+        </p:txBody>
+      </p:sp>
+      <p:sp>
+        <p:nvSpPr>
+          <p:cNvPr id="21" name="TextBox 20"/>
           <p:cNvSpPr txBox="1"/>
           <p:nvPr/>
         </p:nvSpPr>
         <p:spPr>
           <a:xfrm>
-            <a:off x="360000" y="5120228"/>
-            <a:ext cx="6840000" cy="1196857"/>
+            <a:off x="4251960" y="2194560"/>
+            <a:ext cx="1051560" cy="146304"/>
           </a:xfrm>
           <a:prstGeom prst="rect">
             <a:avLst/>
@@ -3740,83 +3923,82 @@
           <a:noFill/>
         </p:spPr>
         <p:txBody>
-          <a:bodyPr wrap="square">
-            <a:noAutofit/>
+          <a:bodyPr wrap="square" anchor="t" lIns="0" rIns="0" tIns="0" bIns="0">
+            <a:spAutoFit/>
           </a:bodyPr>
           <a:lstStyle/>
           <a:p>
-            <a:pPr algn="l">
+            <a:pPr algn="ctr">
               <a:lnSpc>
                 <a:spcPct val="100000"/>
               </a:lnSpc>
+              <a:spcAft>
+                <a:spcPts val="0"/>
+              </a:spcAft>
             </a:pPr>
             <a:r>
-              <a:rPr sz="900" b="0">
-                <a:solidFill>
-                  <a:srgbClr val="333333"/>
-                </a:solidFill>
-                <a:latin typeface="Arial"/>
-              </a:rPr>
-              <a:t>enhance passes C simulation against an independently written C++ golden model in two configurations (contrast+split, and tone+binarise+invert+mono): 9216 beats each, 0 errors. Through the AXI-DMA path, all eight presets of the verified parameter table are compared channel by channel with the numpy model: 0 mismatches out of 2,764,800 channels each, at 15.6 ms per frame. A second pair of counters brackets the kernel and stamps the first beat in and out: the measured pipeline latency is 16 pixel clocks, i.e. 160 ns at 100 MHz - about 1% of a 720p60 line, which is what having no frame buffer buys. Border policy (horizontal replicate, vertical line-buffer state) is defined once and shared by hardware, testbench and Python model, which is why the comparison can use zero tolerance.</a:t>
-            </a:r>
-          </a:p>
-        </p:txBody>
-      </p:sp>
-      <p:sp>
-        <p:nvSpPr>
-          <p:cNvPr id="17" name="TextBox 16"/>
-          <p:cNvSpPr txBox="1"/>
-          <p:nvPr/>
-        </p:nvSpPr>
-        <p:spPr>
-          <a:xfrm>
-            <a:off x="360000" y="6345885"/>
-            <a:ext cx="6840000" cy="244476"/>
-          </a:xfrm>
-          <a:prstGeom prst="rect">
-            <a:avLst/>
-          </a:prstGeom>
-          <a:noFill/>
-        </p:spPr>
-        <p:txBody>
-          <a:bodyPr wrap="square">
-            <a:noAutofit/>
-          </a:bodyPr>
-          <a:lstStyle/>
-          <a:p>
-            <a:pPr algn="l">
-              <a:lnSpc>
-                <a:spcPct val="100000"/>
-              </a:lnSpc>
-            </a:pPr>
-            <a:r>
-              <a:rPr sz="1200" b="1">
-                <a:solidFill>
-                  <a:srgbClr val="1E88E5"/>
-                </a:solidFill>
-                <a:latin typeface="Arial"/>
-              </a:rPr>
-              <a:t>What Made It Work - and What Did Not</a:t>
-            </a:r>
-          </a:p>
-        </p:txBody>
-      </p:sp>
-      <p:sp>
-        <p:nvSpPr>
-          <p:cNvPr id="18" name="Rectangle 17"/>
+              <a:rPr sz="720" b="0">
+                <a:solidFill>
+                  <a:srgbClr val="555F6B"/>
+                </a:solidFill>
+                <a:latin typeface="Segoe UI"/>
+              </a:rPr>
+              <a:t>PC</a:t>
+            </a:r>
+          </a:p>
+        </p:txBody>
+      </p:sp>
+      <p:cxnSp>
+        <p:nvCxnSpPr>
+          <p:cNvPr id="22" name="Connector 21"/>
+          <p:cNvCxnSpPr/>
+          <p:nvPr/>
+        </p:nvCxnSpPr>
+        <p:spPr>
+          <a:xfrm>
+            <a:off x="5321808" y="1965960"/>
+            <a:ext cx="173736" cy="0"/>
+          </a:xfrm>
+          <a:prstGeom prst="line">
+            <a:avLst/>
+          </a:prstGeom>
+          <a:ln w="17780">
+            <a:solidFill>
+              <a:srgbClr val="008CC8"/>
+            </a:solidFill>
+          </a:ln>
+        </p:spPr>
+        <p:style>
+          <a:lnRef idx="2">
+            <a:schemeClr val="accent1"/>
+          </a:lnRef>
+          <a:fillRef idx="0">
+            <a:schemeClr val="accent1"/>
+          </a:fillRef>
+          <a:effectRef idx="1">
+            <a:schemeClr val="accent1"/>
+          </a:effectRef>
+          <a:fontRef idx="minor">
+            <a:schemeClr val="tx1"/>
+          </a:fontRef>
+        </p:style>
+      </p:cxnSp>
+      <p:sp>
+        <p:nvSpPr>
+          <p:cNvPr id="23" name="Rounded Rectangle 22"/>
           <p:cNvSpPr/>
           <p:nvPr/>
         </p:nvSpPr>
         <p:spPr>
           <a:xfrm>
-            <a:off x="360000" y="6569085"/>
-            <a:ext cx="6840000" cy="14400"/>
-          </a:xfrm>
-          <a:prstGeom prst="rect">
+            <a:off x="5532120" y="1755648"/>
+            <a:ext cx="1051560" cy="420624"/>
+          </a:xfrm>
+          <a:prstGeom prst="roundRect">
             <a:avLst/>
           </a:prstGeom>
           <a:solidFill>
-            <a:srgbClr val="1E88E5"/>
+            <a:srgbClr val="0E2A47"/>
           </a:solidFill>
           <a:ln>
             <a:noFill/>
@@ -3838,23 +4020,32 @@
           </a:fontRef>
         </p:style>
         <p:txBody>
-          <a:bodyPr rtlCol="0" anchor="ctr"/>
+          <a:bodyPr rtlCol="0" anchor="ctr" wrap="square" lIns="27432" rIns="27432"/>
           <a:lstStyle/>
           <a:p>
             <a:pPr algn="ctr"/>
-          </a:p>
-        </p:txBody>
-      </p:sp>
-      <p:sp>
-        <p:nvSpPr>
-          <p:cNvPr id="19" name="TextBox 18"/>
+            <a:r>
+              <a:rPr sz="850" b="1">
+                <a:solidFill>
+                  <a:srgbClr val="FFFFFF"/>
+                </a:solidFill>
+                <a:latin typeface="Microsoft YaHei"/>
+              </a:rPr>
+              <a:t>DDR 帧缓冲</a:t>
+            </a:r>
+          </a:p>
+        </p:txBody>
+      </p:sp>
+      <p:sp>
+        <p:nvSpPr>
+          <p:cNvPr id="24" name="TextBox 23"/>
           <p:cNvSpPr txBox="1"/>
           <p:nvPr/>
         </p:nvSpPr>
         <p:spPr>
           <a:xfrm>
-            <a:off x="360000" y="6655485"/>
-            <a:ext cx="6840000" cy="911142"/>
+            <a:off x="5532120" y="2194560"/>
+            <a:ext cx="1051560" cy="146304"/>
           </a:xfrm>
           <a:prstGeom prst="rect">
             <a:avLst/>
@@ -3862,83 +4053,82 @@
           <a:noFill/>
         </p:spPr>
         <p:txBody>
-          <a:bodyPr wrap="square">
-            <a:noAutofit/>
+          <a:bodyPr wrap="square" anchor="t" lIns="0" rIns="0" tIns="0" bIns="0">
+            <a:spAutoFit/>
           </a:bodyPr>
           <a:lstStyle/>
           <a:p>
-            <a:pPr algn="l">
+            <a:pPr algn="ctr">
               <a:lnSpc>
                 <a:spcPct val="100000"/>
               </a:lnSpc>
+              <a:spcAft>
+                <a:spcPts val="0"/>
+              </a:spcAft>
             </a:pPr>
             <a:r>
-              <a:rPr sz="900" b="0">
-                <a:solidFill>
-                  <a:srgbClr val="333333"/>
-                </a:solidFill>
-                <a:latin typeface="Arial"/>
-              </a:rPr>
-              <a:t>A free-running kernel (ap_ctrl_none) never drains its pipeline when the input stops, so an AXI-DMA transfer can never close; the DMA path needs a bounded variant (ap_ctrl_hs plus a pixel count). The same property bit the other way: HLS moves loop-invariant inputs into the pipeline prologue, so six of nine configuration parameters froze at power-up (binarize_read_reg_* in the netlist). The fix moves the 59 bits into a dual-port BRAM read once per pixel, which cannot be hoisted: a preset switch is one register write, with no reset and no stream interruption.</a:t>
-            </a:r>
-          </a:p>
-        </p:txBody>
-      </p:sp>
-      <p:sp>
-        <p:nvSpPr>
-          <p:cNvPr id="20" name="TextBox 19"/>
-          <p:cNvSpPr txBox="1"/>
-          <p:nvPr/>
-        </p:nvSpPr>
-        <p:spPr>
-          <a:xfrm>
-            <a:off x="360000" y="7595428"/>
-            <a:ext cx="6840000" cy="244476"/>
-          </a:xfrm>
-          <a:prstGeom prst="rect">
-            <a:avLst/>
-          </a:prstGeom>
-          <a:noFill/>
-        </p:spPr>
-        <p:txBody>
-          <a:bodyPr wrap="square">
-            <a:noAutofit/>
-          </a:bodyPr>
-          <a:lstStyle/>
-          <a:p>
-            <a:pPr algn="l">
-              <a:lnSpc>
-                <a:spcPct val="100000"/>
-              </a:lnSpc>
-            </a:pPr>
-            <a:r>
-              <a:rPr sz="1200" b="1">
-                <a:solidFill>
-                  <a:srgbClr val="1E88E5"/>
-                </a:solidFill>
-                <a:latin typeface="Arial"/>
-              </a:rPr>
-              <a:t>Reusable PYNQ Skills and Reproducibility</a:t>
-            </a:r>
-          </a:p>
-        </p:txBody>
-      </p:sp>
-      <p:sp>
-        <p:nvSpPr>
-          <p:cNvPr id="21" name="Rectangle 20"/>
+              <a:rPr sz="720" b="0">
+                <a:solidFill>
+                  <a:srgbClr val="555F6B"/>
+                </a:solidFill>
+                <a:latin typeface="Segoe UI"/>
+              </a:rPr>
+              <a:t>PS</a:t>
+            </a:r>
+          </a:p>
+        </p:txBody>
+      </p:sp>
+      <p:cxnSp>
+        <p:nvCxnSpPr>
+          <p:cNvPr id="25" name="Connector 24"/>
+          <p:cNvCxnSpPr/>
+          <p:nvPr/>
+        </p:nvCxnSpPr>
+        <p:spPr>
+          <a:xfrm>
+            <a:off x="6601967" y="1965960"/>
+            <a:ext cx="173736" cy="0"/>
+          </a:xfrm>
+          <a:prstGeom prst="line">
+            <a:avLst/>
+          </a:prstGeom>
+          <a:ln w="17780">
+            <a:solidFill>
+              <a:srgbClr val="008CC8"/>
+            </a:solidFill>
+          </a:ln>
+        </p:spPr>
+        <p:style>
+          <a:lnRef idx="2">
+            <a:schemeClr val="accent1"/>
+          </a:lnRef>
+          <a:fillRef idx="0">
+            <a:schemeClr val="accent1"/>
+          </a:fillRef>
+          <a:effectRef idx="1">
+            <a:schemeClr val="accent1"/>
+          </a:effectRef>
+          <a:fontRef idx="minor">
+            <a:schemeClr val="tx1"/>
+          </a:fontRef>
+        </p:style>
+      </p:cxnSp>
+      <p:sp>
+        <p:nvSpPr>
+          <p:cNvPr id="26" name="Rounded Rectangle 25"/>
           <p:cNvSpPr/>
           <p:nvPr/>
         </p:nvSpPr>
         <p:spPr>
           <a:xfrm>
-            <a:off x="360000" y="7818628"/>
-            <a:ext cx="6840000" cy="14400"/>
-          </a:xfrm>
-          <a:prstGeom prst="rect">
+            <a:off x="6812280" y="1755648"/>
+            <a:ext cx="1051560" cy="420624"/>
+          </a:xfrm>
+          <a:prstGeom prst="roundRect">
             <a:avLst/>
           </a:prstGeom>
           <a:solidFill>
-            <a:srgbClr val="1E88E5"/>
+            <a:srgbClr val="0E2A47"/>
           </a:solidFill>
           <a:ln>
             <a:noFill/>
@@ -3960,23 +4150,32 @@
           </a:fontRef>
         </p:style>
         <p:txBody>
-          <a:bodyPr rtlCol="0" anchor="ctr"/>
+          <a:bodyPr rtlCol="0" anchor="ctr" wrap="square" lIns="27432" rIns="27432"/>
           <a:lstStyle/>
           <a:p>
             <a:pPr algn="ctr"/>
-          </a:p>
-        </p:txBody>
-      </p:sp>
-      <p:sp>
-        <p:nvSpPr>
-          <p:cNvPr id="22" name="TextBox 21"/>
+            <a:r>
+              <a:rPr sz="850" b="1">
+                <a:solidFill>
+                  <a:srgbClr val="FFFFFF"/>
+                </a:solidFill>
+                <a:latin typeface="Microsoft YaHei"/>
+              </a:rPr>
+              <a:t>VDMA</a:t>
+            </a:r>
+          </a:p>
+        </p:txBody>
+      </p:sp>
+      <p:sp>
+        <p:nvSpPr>
+          <p:cNvPr id="27" name="TextBox 26"/>
           <p:cNvSpPr txBox="1"/>
           <p:nvPr/>
         </p:nvSpPr>
         <p:spPr>
           <a:xfrm>
-            <a:off x="360000" y="7905028"/>
-            <a:ext cx="6840000" cy="625428"/>
+            <a:off x="6812280" y="2194560"/>
+            <a:ext cx="1051560" cy="146304"/>
           </a:xfrm>
           <a:prstGeom prst="rect">
             <a:avLst/>
@@ -3984,83 +4183,47 @@
           <a:noFill/>
         </p:spPr>
         <p:txBody>
-          <a:bodyPr wrap="square">
-            <a:noAutofit/>
+          <a:bodyPr wrap="square" anchor="t" lIns="0" rIns="0" tIns="0" bIns="0">
+            <a:spAutoFit/>
           </a:bodyPr>
           <a:lstStyle/>
           <a:p>
-            <a:pPr algn="l">
+            <a:pPr algn="ctr">
               <a:lnSpc>
                 <a:spcPct val="100000"/>
               </a:lnSpc>
+              <a:spcAft>
+                <a:spcPts val="0"/>
+              </a:spcAft>
             </a:pPr>
             <a:r>
-              <a:rPr sz="900" b="0">
-                <a:solidFill>
-                  <a:srgbClr val="333333"/>
-                </a:solidFill>
-                <a:latin typeface="Arial"/>
-              </a:rPr>
-              <a:t>Five board-independent skills ship with the project: overlay handoff linting (.hwh), bit-exact image comparison, PS-vs-PL measurement collection, AXI-DMA helpers with cache maintenance, and a pitfalls checklist. Each documents scope, usage, failure modes and what was verified. Everything is scripted: a clean machine rebuilds both bitstreams with two commands.</a:t>
-            </a:r>
-          </a:p>
-        </p:txBody>
-      </p:sp>
-      <p:sp>
-        <p:nvSpPr>
-          <p:cNvPr id="23" name="TextBox 22"/>
-          <p:cNvSpPr txBox="1"/>
-          <p:nvPr/>
-        </p:nvSpPr>
-        <p:spPr>
-          <a:xfrm>
-            <a:off x="360000" y="8595257"/>
-            <a:ext cx="6840000" cy="244476"/>
-          </a:xfrm>
-          <a:prstGeom prst="rect">
-            <a:avLst/>
-          </a:prstGeom>
-          <a:noFill/>
-        </p:spPr>
-        <p:txBody>
-          <a:bodyPr wrap="square">
-            <a:noAutofit/>
-          </a:bodyPr>
-          <a:lstStyle/>
-          <a:p>
-            <a:pPr algn="l">
-              <a:lnSpc>
-                <a:spcPct val="100000"/>
-              </a:lnSpc>
-            </a:pPr>
-            <a:r>
-              <a:rPr sz="1200" b="1">
-                <a:solidFill>
-                  <a:srgbClr val="1E88E5"/>
-                </a:solidFill>
-                <a:latin typeface="Arial"/>
-              </a:rPr>
-              <a:t>Operator Family on the DMA Path (same board, same 1280x720 image)</a:t>
-            </a:r>
-          </a:p>
-        </p:txBody>
-      </p:sp>
-      <p:sp>
-        <p:nvSpPr>
-          <p:cNvPr id="24" name="Rectangle 23"/>
+              <a:rPr sz="720" b="0">
+                <a:solidFill>
+                  <a:srgbClr val="555F6B"/>
+                </a:solidFill>
+                <a:latin typeface="Segoe UI"/>
+              </a:rPr>
+              <a:t>AXI</a:t>
+            </a:r>
+          </a:p>
+        </p:txBody>
+      </p:sp>
+      <p:sp>
+        <p:nvSpPr>
+          <p:cNvPr id="28" name="Rounded Rectangle 27"/>
           <p:cNvSpPr/>
           <p:nvPr/>
         </p:nvSpPr>
         <p:spPr>
           <a:xfrm>
-            <a:off x="360000" y="8818457"/>
-            <a:ext cx="6840000" cy="14400"/>
-          </a:xfrm>
-          <a:prstGeom prst="rect">
+            <a:off x="4251960" y="2615184"/>
+            <a:ext cx="1051560" cy="420624"/>
+          </a:xfrm>
+          <a:prstGeom prst="roundRect">
             <a:avLst/>
           </a:prstGeom>
           <a:solidFill>
-            <a:srgbClr val="1E88E5"/>
+            <a:srgbClr val="0E2A47"/>
           </a:solidFill>
           <a:ln>
             <a:noFill/>
@@ -4082,6 +4245,480 @@
           </a:fontRef>
         </p:style>
         <p:txBody>
+          <a:bodyPr rtlCol="0" anchor="ctr" wrap="square" lIns="27432" rIns="27432"/>
+          <a:lstStyle/>
+          <a:p>
+            <a:pPr algn="ctr"/>
+            <a:r>
+              <a:rPr sz="850" b="1">
+                <a:solidFill>
+                  <a:srgbClr val="FFFFFF"/>
+                </a:solidFill>
+                <a:latin typeface="Microsoft YaHei"/>
+              </a:rPr>
+              <a:t>采集卡 / OBS</a:t>
+            </a:r>
+          </a:p>
+        </p:txBody>
+      </p:sp>
+      <p:sp>
+        <p:nvSpPr>
+          <p:cNvPr id="29" name="TextBox 28"/>
+          <p:cNvSpPr txBox="1"/>
+          <p:nvPr/>
+        </p:nvSpPr>
+        <p:spPr>
+          <a:xfrm>
+            <a:off x="4251960" y="3054096"/>
+            <a:ext cx="1051560" cy="146304"/>
+          </a:xfrm>
+          <a:prstGeom prst="rect">
+            <a:avLst/>
+          </a:prstGeom>
+          <a:noFill/>
+        </p:spPr>
+        <p:txBody>
+          <a:bodyPr wrap="square" anchor="t" lIns="0" rIns="0" tIns="0" bIns="0">
+            <a:spAutoFit/>
+          </a:bodyPr>
+          <a:lstStyle/>
+          <a:p>
+            <a:pPr algn="ctr">
+              <a:lnSpc>
+                <a:spcPct val="100000"/>
+              </a:lnSpc>
+              <a:spcAft>
+                <a:spcPts val="0"/>
+              </a:spcAft>
+            </a:pPr>
+            <a:r>
+              <a:rPr sz="720" b="0">
+                <a:solidFill>
+                  <a:srgbClr val="555F6B"/>
+                </a:solidFill>
+                <a:latin typeface="Segoe UI"/>
+              </a:rPr>
+              <a:t>主机</a:t>
+            </a:r>
+          </a:p>
+        </p:txBody>
+      </p:sp>
+      <p:sp>
+        <p:nvSpPr>
+          <p:cNvPr id="30" name="Rounded Rectangle 29"/>
+          <p:cNvSpPr/>
+          <p:nvPr/>
+        </p:nvSpPr>
+        <p:spPr>
+          <a:xfrm>
+            <a:off x="5532120" y="2615184"/>
+            <a:ext cx="1051560" cy="420624"/>
+          </a:xfrm>
+          <a:prstGeom prst="roundRect">
+            <a:avLst/>
+          </a:prstGeom>
+          <a:solidFill>
+            <a:srgbClr val="0E2A47"/>
+          </a:solidFill>
+          <a:ln>
+            <a:noFill/>
+          </a:ln>
+          <a:effectLst/>
+        </p:spPr>
+        <p:style>
+          <a:lnRef idx="1">
+            <a:schemeClr val="accent1"/>
+          </a:lnRef>
+          <a:fillRef idx="3">
+            <a:schemeClr val="accent1"/>
+          </a:fillRef>
+          <a:effectRef idx="2">
+            <a:schemeClr val="accent1"/>
+          </a:effectRef>
+          <a:fontRef idx="minor">
+            <a:schemeClr val="lt1"/>
+          </a:fontRef>
+        </p:style>
+        <p:txBody>
+          <a:bodyPr rtlCol="0" anchor="ctr" wrap="square" lIns="27432" rIns="27432"/>
+          <a:lstStyle/>
+          <a:p>
+            <a:pPr algn="ctr"/>
+            <a:r>
+              <a:rPr sz="850" b="1">
+                <a:solidFill>
+                  <a:srgbClr val="FFFFFF"/>
+                </a:solidFill>
+                <a:latin typeface="Microsoft YaHei"/>
+              </a:rPr>
+              <a:t>HDMI 输出</a:t>
+            </a:r>
+          </a:p>
+        </p:txBody>
+      </p:sp>
+      <p:sp>
+        <p:nvSpPr>
+          <p:cNvPr id="31" name="TextBox 30"/>
+          <p:cNvSpPr txBox="1"/>
+          <p:nvPr/>
+        </p:nvSpPr>
+        <p:spPr>
+          <a:xfrm>
+            <a:off x="5532120" y="3054096"/>
+            <a:ext cx="1051560" cy="146304"/>
+          </a:xfrm>
+          <a:prstGeom prst="rect">
+            <a:avLst/>
+          </a:prstGeom>
+          <a:noFill/>
+        </p:spPr>
+        <p:txBody>
+          <a:bodyPr wrap="square" anchor="t" lIns="0" rIns="0" tIns="0" bIns="0">
+            <a:spAutoFit/>
+          </a:bodyPr>
+          <a:lstStyle/>
+          <a:p>
+            <a:pPr algn="ctr">
+              <a:lnSpc>
+                <a:spcPct val="100000"/>
+              </a:lnSpc>
+              <a:spcAft>
+                <a:spcPts val="0"/>
+              </a:spcAft>
+            </a:pPr>
+            <a:r>
+              <a:rPr sz="720" b="0">
+                <a:solidFill>
+                  <a:srgbClr val="555F6B"/>
+                </a:solidFill>
+                <a:latin typeface="Segoe UI"/>
+              </a:rPr>
+              <a:t>640×480</a:t>
+            </a:r>
+          </a:p>
+        </p:txBody>
+      </p:sp>
+      <p:sp>
+        <p:nvSpPr>
+          <p:cNvPr id="32" name="Rounded Rectangle 31"/>
+          <p:cNvSpPr/>
+          <p:nvPr/>
+        </p:nvSpPr>
+        <p:spPr>
+          <a:xfrm>
+            <a:off x="6812280" y="2615184"/>
+            <a:ext cx="1051560" cy="420624"/>
+          </a:xfrm>
+          <a:prstGeom prst="roundRect">
+            <a:avLst/>
+          </a:prstGeom>
+          <a:solidFill>
+            <a:srgbClr val="0E2A47"/>
+          </a:solidFill>
+          <a:ln>
+            <a:noFill/>
+          </a:ln>
+          <a:effectLst/>
+        </p:spPr>
+        <p:style>
+          <a:lnRef idx="1">
+            <a:schemeClr val="accent1"/>
+          </a:lnRef>
+          <a:fillRef idx="3">
+            <a:schemeClr val="accent1"/>
+          </a:fillRef>
+          <a:effectRef idx="2">
+            <a:schemeClr val="accent1"/>
+          </a:effectRef>
+          <a:fontRef idx="minor">
+            <a:schemeClr val="lt1"/>
+          </a:fontRef>
+        </p:style>
+        <p:txBody>
+          <a:bodyPr rtlCol="0" anchor="ctr" wrap="square" lIns="27432" rIns="27432"/>
+          <a:lstStyle/>
+          <a:p>
+            <a:pPr algn="ctr"/>
+            <a:r>
+              <a:rPr sz="850" b="1">
+                <a:solidFill>
+                  <a:srgbClr val="FFFFFF"/>
+                </a:solidFill>
+                <a:latin typeface="Microsoft YaHei"/>
+              </a:rPr>
+              <a:t>增强核</a:t>
+            </a:r>
+          </a:p>
+        </p:txBody>
+      </p:sp>
+      <p:sp>
+        <p:nvSpPr>
+          <p:cNvPr id="33" name="TextBox 32"/>
+          <p:cNvSpPr txBox="1"/>
+          <p:nvPr/>
+        </p:nvSpPr>
+        <p:spPr>
+          <a:xfrm>
+            <a:off x="6812280" y="3054096"/>
+            <a:ext cx="1051560" cy="146304"/>
+          </a:xfrm>
+          <a:prstGeom prst="rect">
+            <a:avLst/>
+          </a:prstGeom>
+          <a:noFill/>
+        </p:spPr>
+        <p:txBody>
+          <a:bodyPr wrap="square" anchor="t" lIns="0" rIns="0" tIns="0" bIns="0">
+            <a:spAutoFit/>
+          </a:bodyPr>
+          <a:lstStyle/>
+          <a:p>
+            <a:pPr algn="ctr">
+              <a:lnSpc>
+                <a:spcPct val="100000"/>
+              </a:lnSpc>
+              <a:spcAft>
+                <a:spcPts val="0"/>
+              </a:spcAft>
+            </a:pPr>
+            <a:r>
+              <a:rPr sz="720" b="0">
+                <a:solidFill>
+                  <a:srgbClr val="555F6B"/>
+                </a:solidFill>
+                <a:latin typeface="Segoe UI"/>
+              </a:rPr>
+              <a:t>PL</a:t>
+            </a:r>
+          </a:p>
+        </p:txBody>
+      </p:sp>
+      <p:cxnSp>
+        <p:nvCxnSpPr>
+          <p:cNvPr id="34" name="Connector 33"/>
+          <p:cNvCxnSpPr/>
+          <p:nvPr/>
+        </p:nvCxnSpPr>
+        <p:spPr>
+          <a:xfrm>
+            <a:off x="7338060" y="2322576"/>
+            <a:ext cx="0" cy="274320"/>
+          </a:xfrm>
+          <a:prstGeom prst="line">
+            <a:avLst/>
+          </a:prstGeom>
+          <a:ln w="17780">
+            <a:solidFill>
+              <a:srgbClr val="008CC8"/>
+            </a:solidFill>
+          </a:ln>
+        </p:spPr>
+        <p:style>
+          <a:lnRef idx="2">
+            <a:schemeClr val="accent1"/>
+          </a:lnRef>
+          <a:fillRef idx="0">
+            <a:schemeClr val="accent1"/>
+          </a:fillRef>
+          <a:effectRef idx="1">
+            <a:schemeClr val="accent1"/>
+          </a:effectRef>
+          <a:fontRef idx="minor">
+            <a:schemeClr val="tx1"/>
+          </a:fontRef>
+        </p:style>
+      </p:cxnSp>
+      <p:cxnSp>
+        <p:nvCxnSpPr>
+          <p:cNvPr id="35" name="Connector 34"/>
+          <p:cNvCxnSpPr/>
+          <p:nvPr/>
+        </p:nvCxnSpPr>
+        <p:spPr>
+          <a:xfrm flipH="1">
+            <a:off x="6620256" y="2825496"/>
+            <a:ext cx="173736" cy="0"/>
+          </a:xfrm>
+          <a:prstGeom prst="line">
+            <a:avLst/>
+          </a:prstGeom>
+          <a:ln w="17780">
+            <a:solidFill>
+              <a:srgbClr val="008CC8"/>
+            </a:solidFill>
+          </a:ln>
+        </p:spPr>
+        <p:style>
+          <a:lnRef idx="2">
+            <a:schemeClr val="accent1"/>
+          </a:lnRef>
+          <a:fillRef idx="0">
+            <a:schemeClr val="accent1"/>
+          </a:fillRef>
+          <a:effectRef idx="1">
+            <a:schemeClr val="accent1"/>
+          </a:effectRef>
+          <a:fontRef idx="minor">
+            <a:schemeClr val="tx1"/>
+          </a:fontRef>
+        </p:style>
+      </p:cxnSp>
+      <p:cxnSp>
+        <p:nvCxnSpPr>
+          <p:cNvPr id="36" name="Connector 35"/>
+          <p:cNvCxnSpPr/>
+          <p:nvPr/>
+        </p:nvCxnSpPr>
+        <p:spPr>
+          <a:xfrm flipH="1">
+            <a:off x="5340096" y="2825496"/>
+            <a:ext cx="173736" cy="0"/>
+          </a:xfrm>
+          <a:prstGeom prst="line">
+            <a:avLst/>
+          </a:prstGeom>
+          <a:ln w="17780">
+            <a:solidFill>
+              <a:srgbClr val="008CC8"/>
+            </a:solidFill>
+          </a:ln>
+        </p:spPr>
+        <p:style>
+          <a:lnRef idx="2">
+            <a:schemeClr val="accent1"/>
+          </a:lnRef>
+          <a:fillRef idx="0">
+            <a:schemeClr val="accent1"/>
+          </a:fillRef>
+          <a:effectRef idx="1">
+            <a:schemeClr val="accent1"/>
+          </a:effectRef>
+          <a:fontRef idx="minor">
+            <a:schemeClr val="tx1"/>
+          </a:fontRef>
+        </p:style>
+      </p:cxnSp>
+      <p:sp>
+        <p:nvSpPr>
+          <p:cNvPr id="37" name="TextBox 36"/>
+          <p:cNvSpPr txBox="1"/>
+          <p:nvPr/>
+        </p:nvSpPr>
+        <p:spPr>
+          <a:xfrm>
+            <a:off x="4251960" y="3218688"/>
+            <a:ext cx="3794760" cy="182880"/>
+          </a:xfrm>
+          <a:prstGeom prst="rect">
+            <a:avLst/>
+          </a:prstGeom>
+          <a:noFill/>
+        </p:spPr>
+        <p:txBody>
+          <a:bodyPr wrap="square" anchor="t" lIns="0" rIns="0" tIns="0" bIns="0">
+            <a:spAutoFit/>
+          </a:bodyPr>
+          <a:lstStyle/>
+          <a:p>
+            <a:pPr algn="ctr">
+              <a:lnSpc>
+                <a:spcPct val="100000"/>
+              </a:lnSpc>
+              <a:spcAft>
+                <a:spcPts val="0"/>
+              </a:spcAft>
+            </a:pPr>
+            <a:r>
+              <a:rPr sz="800" b="1">
+                <a:solidFill>
+                  <a:srgbClr val="008CC8"/>
+                </a:solidFill>
+                <a:latin typeface="Microsoft YaHei"/>
+              </a:rPr>
+              <a:t>像素进多少出多少 · 链内无帧缓存</a:t>
+            </a:r>
+          </a:p>
+        </p:txBody>
+      </p:sp>
+      <p:sp>
+        <p:nvSpPr>
+          <p:cNvPr id="38" name="TextBox 37"/>
+          <p:cNvSpPr txBox="1"/>
+          <p:nvPr/>
+        </p:nvSpPr>
+        <p:spPr>
+          <a:xfrm>
+            <a:off x="4251960" y="3438144"/>
+            <a:ext cx="3794760" cy="256032"/>
+          </a:xfrm>
+          <a:prstGeom prst="rect">
+            <a:avLst/>
+          </a:prstGeom>
+          <a:noFill/>
+        </p:spPr>
+        <p:txBody>
+          <a:bodyPr wrap="square" anchor="t" lIns="0" rIns="0" tIns="0" bIns="0">
+            <a:spAutoFit/>
+          </a:bodyPr>
+          <a:lstStyle/>
+          <a:p>
+            <a:pPr algn="l">
+              <a:lnSpc>
+                <a:spcPct val="100000"/>
+              </a:lnSpc>
+              <a:spcAft>
+                <a:spcPts val="0"/>
+              </a:spcAft>
+            </a:pPr>
+            <a:r>
+              <a:rPr sz="1400" b="1">
+                <a:solidFill>
+                  <a:srgbClr val="008CC8"/>
+                </a:solidFill>
+                <a:latin typeface="Microsoft YaHei"/>
+              </a:rPr>
+              <a:t>3  关键设计</a:t>
+            </a:r>
+          </a:p>
+        </p:txBody>
+      </p:sp>
+      <p:sp>
+        <p:nvSpPr>
+          <p:cNvPr id="39" name="Rectangle 38"/>
+          <p:cNvSpPr/>
+          <p:nvPr/>
+        </p:nvSpPr>
+        <p:spPr>
+          <a:xfrm>
+            <a:off x="4251960" y="3721607"/>
+            <a:ext cx="3794760" cy="13716"/>
+          </a:xfrm>
+          <a:prstGeom prst="rect">
+            <a:avLst/>
+          </a:prstGeom>
+          <a:solidFill>
+            <a:srgbClr val="D8E0E8"/>
+          </a:solidFill>
+          <a:ln>
+            <a:noFill/>
+          </a:ln>
+          <a:effectLst/>
+        </p:spPr>
+        <p:style>
+          <a:lnRef idx="1">
+            <a:schemeClr val="accent1"/>
+          </a:lnRef>
+          <a:fillRef idx="3">
+            <a:schemeClr val="accent1"/>
+          </a:fillRef>
+          <a:effectRef idx="2">
+            <a:schemeClr val="accent1"/>
+          </a:effectRef>
+          <a:fontRef idx="minor">
+            <a:schemeClr val="lt1"/>
+          </a:fontRef>
+        </p:style>
+        <p:txBody>
           <a:bodyPr rtlCol="0" anchor="ctr"/>
           <a:lstStyle/>
           <a:p>
@@ -4089,260 +4726,1205 @@
           </a:p>
         </p:txBody>
       </p:sp>
-      <p:graphicFrame>
-        <p:nvGraphicFramePr>
-          <p:cNvPr id="25" name="Table 24"/>
-          <p:cNvGraphicFramePr>
-            <a:graphicFrameLocks noGrp="1"/>
-          </p:cNvGraphicFramePr>
-          <p:nvPr/>
-        </p:nvGraphicFramePr>
-        <p:xfrm>
-          <a:off x="360000" y="8904857"/>
-          <a:ext cx="4320000" cy="1080000"/>
-        </p:xfrm>
-        <a:graphic>
-          <a:graphicData uri="http://schemas.openxmlformats.org/drawingml/2006/table">
-            <a:tbl>
-              <a:tblPr firstRow="1" bandRow="1">
-                <a:tableStyleId>{5C22544A-7EE6-4342-B048-85BDC9FD1C3A}</a:tableStyleId>
-              </a:tblPr>
-              <a:tblGrid>
-                <a:gridCol w="1224000"/>
-                <a:gridCol w="1548000"/>
-                <a:gridCol w="1548000"/>
-              </a:tblGrid>
-              <a:tr h="270000">
-                <a:tc>
-                  <a:txBody>
-                    <a:bodyPr/>
-                    <a:lstStyle/>
-                    <a:p>
-                      <a:r>
-                        <a:rPr sz="900" b="1">
-                          <a:solidFill>
-                            <a:srgbClr val="FFFFFF"/>
-                          </a:solidFill>
-                          <a:latin typeface="Arial"/>
-                        </a:rPr>
-                        <a:t>Measured</a:t>
-                      </a:r>
-                    </a:p>
-                  </a:txBody>
-                  <a:tcPr/>
-                </a:tc>
-                <a:tc>
-                  <a:txBody>
-                    <a:bodyPr/>
-                    <a:lstStyle/>
-                    <a:p>
-                      <a:r>
-                        <a:rPr sz="900" b="1">
-                          <a:solidFill>
-                            <a:srgbClr val="FFFFFF"/>
-                          </a:solidFill>
-                          <a:latin typeface="Arial"/>
-                        </a:rPr>
-                        <a:t>PS (Cortex-A9, numpy)</a:t>
-                      </a:r>
-                    </a:p>
-                  </a:txBody>
-                  <a:tcPr/>
-                </a:tc>
-                <a:tc>
-                  <a:txBody>
-                    <a:bodyPr/>
-                    <a:lstStyle/>
-                    <a:p>
-                      <a:r>
-                        <a:rPr sz="900" b="1">
-                          <a:solidFill>
-                            <a:srgbClr val="FFFFFF"/>
-                          </a:solidFill>
-                          <a:latin typeface="Arial"/>
-                        </a:rPr>
-                        <a:t>PL (Zynq + DMA)</a:t>
-                      </a:r>
-                    </a:p>
-                  </a:txBody>
-                  <a:tcPr/>
-                </a:tc>
-              </a:tr>
-              <a:tr h="270000">
-                <a:tc>
-                  <a:txBody>
-                    <a:bodyPr/>
-                    <a:lstStyle/>
-                    <a:p>
-                      <a:r>
-                        <a:rPr sz="900" b="0">
-                          <a:solidFill>
-                            <a:srgbClr val="333333"/>
-                          </a:solidFill>
-                          <a:latin typeface="Arial"/>
-                        </a:rPr>
-                        <a:t>enhance, 8 (verified table)</a:t>
-                      </a:r>
-                    </a:p>
-                  </a:txBody>
-                  <a:tcPr/>
-                </a:tc>
-                <a:tc>
-                  <a:txBody>
-                    <a:bodyPr/>
-                    <a:lstStyle/>
-                    <a:p>
-                      <a:r>
-                        <a:rPr sz="900" b="0">
-                          <a:solidFill>
-                            <a:srgbClr val="333333"/>
-                          </a:solidFill>
-                          <a:latin typeface="Arial"/>
-                        </a:rPr>
-                        <a:t>-</a:t>
-                      </a:r>
-                    </a:p>
-                  </a:txBody>
-                  <a:tcPr/>
-                </a:tc>
-                <a:tc>
-                  <a:txBody>
-                    <a:bodyPr/>
-                    <a:lstStyle/>
-                    <a:p>
-                      <a:r>
-                        <a:rPr sz="900" b="0">
-                          <a:solidFill>
-                            <a:srgbClr val="333333"/>
-                          </a:solidFill>
-                          <a:latin typeface="Arial"/>
-                        </a:rPr>
-                        <a:t>15.6 ms, 0/2.76M wrong</a:t>
-                      </a:r>
-                    </a:p>
-                  </a:txBody>
-                  <a:tcPr/>
-                </a:tc>
-              </a:tr>
-              <a:tr h="270000">
-                <a:tc>
-                  <a:txBody>
-                    <a:bodyPr/>
-                    <a:lstStyle/>
-                    <a:p>
-                      <a:r>
-                        <a:rPr sz="900" b="0">
-                          <a:solidFill>
-                            <a:srgbClr val="333333"/>
-                          </a:solidFill>
-                          <a:latin typeface="Arial"/>
-                        </a:rPr>
-                        <a:t>Pipeline latency</a:t>
-                      </a:r>
-                    </a:p>
-                  </a:txBody>
-                  <a:tcPr/>
-                </a:tc>
-                <a:tc>
-                  <a:txBody>
-                    <a:bodyPr/>
-                    <a:lstStyle/>
-                    <a:p>
-                      <a:r>
-                        <a:rPr sz="900" b="0">
-                          <a:solidFill>
-                            <a:srgbClr val="333333"/>
-                          </a:solidFill>
-                          <a:latin typeface="Arial"/>
-                        </a:rPr>
-                        <a:t>-</a:t>
-                      </a:r>
-                    </a:p>
-                  </a:txBody>
-                  <a:tcPr/>
-                </a:tc>
-                <a:tc>
-                  <a:txBody>
-                    <a:bodyPr/>
-                    <a:lstStyle/>
-                    <a:p>
-                      <a:r>
-                        <a:rPr sz="900" b="0">
-                          <a:solidFill>
-                            <a:srgbClr val="333333"/>
-                          </a:solidFill>
-                          <a:latin typeface="Arial"/>
-                        </a:rPr>
-                        <a:t>16 clocks = 160 ns</a:t>
-                      </a:r>
-                    </a:p>
-                  </a:txBody>
-                  <a:tcPr/>
-                </a:tc>
-              </a:tr>
-              <a:tr h="270000">
-                <a:tc>
-                  <a:txBody>
-                    <a:bodyPr/>
-                    <a:lstStyle/>
-                    <a:p>
-                      <a:r>
-                        <a:rPr sz="900" b="1">
-                          <a:solidFill>
-                            <a:srgbClr val="333333"/>
-                          </a:solidFill>
-                          <a:latin typeface="Arial"/>
-                        </a:rPr>
-                        <a:t>Sobel frame time</a:t>
-                      </a:r>
-                    </a:p>
-                  </a:txBody>
-                  <a:tcPr/>
-                </a:tc>
-                <a:tc>
-                  <a:txBody>
-                    <a:bodyPr/>
-                    <a:lstStyle/>
-                    <a:p>
-                      <a:r>
-                        <a:rPr sz="900" b="1">
-                          <a:solidFill>
-                            <a:srgbClr val="333333"/>
-                          </a:solidFill>
-                          <a:latin typeface="Arial"/>
-                        </a:rPr>
-                        <a:t>3108.4 ms</a:t>
-                      </a:r>
-                    </a:p>
-                  </a:txBody>
-                  <a:tcPr/>
-                </a:tc>
-                <a:tc>
-                  <a:txBody>
-                    <a:bodyPr/>
-                    <a:lstStyle/>
-                    <a:p>
-                      <a:r>
-                        <a:rPr sz="900" b="1">
-                          <a:solidFill>
-                            <a:srgbClr val="333333"/>
-                          </a:solidFill>
-                          <a:latin typeface="Arial"/>
-                        </a:rPr>
-                        <a:t>15.8 ms (196.7x)</a:t>
-                      </a:r>
-                    </a:p>
-                  </a:txBody>
-                  <a:tcPr/>
-                </a:tc>
-              </a:tr>
-            </a:tbl>
-          </a:graphicData>
-        </a:graphic>
-      </p:graphicFrame>
+      <p:sp>
+        <p:nvSpPr>
+          <p:cNvPr id="40" name="TextBox 39"/>
+          <p:cNvSpPr txBox="1"/>
+          <p:nvPr/>
+        </p:nvSpPr>
+        <p:spPr>
+          <a:xfrm>
+            <a:off x="4251960" y="3822191"/>
+            <a:ext cx="3794760" cy="182880"/>
+          </a:xfrm>
+          <a:prstGeom prst="rect">
+            <a:avLst/>
+          </a:prstGeom>
+          <a:noFill/>
+        </p:spPr>
+        <p:txBody>
+          <a:bodyPr wrap="square" anchor="t" lIns="0" rIns="0" tIns="0" bIns="0">
+            <a:spAutoFit/>
+          </a:bodyPr>
+          <a:lstStyle/>
+          <a:p>
+            <a:pPr algn="l">
+              <a:lnSpc>
+                <a:spcPct val="100000"/>
+              </a:lnSpc>
+              <a:spcAft>
+                <a:spcPts val="0"/>
+              </a:spcAft>
+            </a:pPr>
+            <a:r>
+              <a:rPr sz="930" b="1">
+                <a:solidFill>
+                  <a:srgbClr val="1A1A1A"/>
+                </a:solidFill>
+                <a:latin typeface="Microsoft YaHei"/>
+              </a:rPr>
+              <a:t>三抽头行缓冲</a:t>
+            </a:r>
+          </a:p>
+        </p:txBody>
+      </p:sp>
+      <p:sp>
+        <p:nvSpPr>
+          <p:cNvPr id="41" name="TextBox 40"/>
+          <p:cNvSpPr txBox="1"/>
+          <p:nvPr/>
+        </p:nvSpPr>
+        <p:spPr>
+          <a:xfrm>
+            <a:off x="4251960" y="4005072"/>
+            <a:ext cx="3794760" cy="164592"/>
+          </a:xfrm>
+          <a:prstGeom prst="rect">
+            <a:avLst/>
+          </a:prstGeom>
+          <a:noFill/>
+        </p:spPr>
+        <p:txBody>
+          <a:bodyPr wrap="square" anchor="t" lIns="0" rIns="0" tIns="0" bIns="0">
+            <a:spAutoFit/>
+          </a:bodyPr>
+          <a:lstStyle/>
+          <a:p>
+            <a:pPr algn="l">
+              <a:lnSpc>
+                <a:spcPct val="105000"/>
+              </a:lnSpc>
+              <a:spcAft>
+                <a:spcPts val="0"/>
+              </a:spcAft>
+            </a:pPr>
+            <a:r>
+              <a:rPr sz="800" b="0">
+                <a:solidFill>
+                  <a:srgbClr val="555F6B"/>
+                </a:solidFill>
+                <a:latin typeface="Microsoft YaHei"/>
+              </a:rPr>
+              <a:t>每行缓冲每周期只读一次，II 保持为 1，8 个算子共用同一套读口。</a:t>
+            </a:r>
+          </a:p>
+        </p:txBody>
+      </p:sp>
+      <p:sp>
+        <p:nvSpPr>
+          <p:cNvPr id="42" name="TextBox 41"/>
+          <p:cNvSpPr txBox="1"/>
+          <p:nvPr/>
+        </p:nvSpPr>
+        <p:spPr>
+          <a:xfrm>
+            <a:off x="4251960" y="4297679"/>
+            <a:ext cx="3794760" cy="182880"/>
+          </a:xfrm>
+          <a:prstGeom prst="rect">
+            <a:avLst/>
+          </a:prstGeom>
+          <a:noFill/>
+        </p:spPr>
+        <p:txBody>
+          <a:bodyPr wrap="square" anchor="t" lIns="0" rIns="0" tIns="0" bIns="0">
+            <a:spAutoFit/>
+          </a:bodyPr>
+          <a:lstStyle/>
+          <a:p>
+            <a:pPr algn="l">
+              <a:lnSpc>
+                <a:spcPct val="100000"/>
+              </a:lnSpc>
+              <a:spcAft>
+                <a:spcPts val="0"/>
+              </a:spcAft>
+            </a:pPr>
+            <a:r>
+              <a:rPr sz="930" b="1">
+                <a:solidFill>
+                  <a:srgbClr val="1A1A1A"/>
+                </a:solidFill>
+                <a:latin typeface="Microsoft YaHei"/>
+              </a:rPr>
+              <a:t>参数存 BRAM</a:t>
+            </a:r>
+          </a:p>
+        </p:txBody>
+      </p:sp>
+      <p:sp>
+        <p:nvSpPr>
+          <p:cNvPr id="43" name="TextBox 42"/>
+          <p:cNvSpPr txBox="1"/>
+          <p:nvPr/>
+        </p:nvSpPr>
+        <p:spPr>
+          <a:xfrm>
+            <a:off x="4251960" y="4480559"/>
+            <a:ext cx="3794760" cy="164592"/>
+          </a:xfrm>
+          <a:prstGeom prst="rect">
+            <a:avLst/>
+          </a:prstGeom>
+          <a:noFill/>
+        </p:spPr>
+        <p:txBody>
+          <a:bodyPr wrap="square" anchor="t" lIns="0" rIns="0" tIns="0" bIns="0">
+            <a:spAutoFit/>
+          </a:bodyPr>
+          <a:lstStyle/>
+          <a:p>
+            <a:pPr algn="l">
+              <a:lnSpc>
+                <a:spcPct val="105000"/>
+              </a:lnSpc>
+              <a:spcAft>
+                <a:spcPts val="0"/>
+              </a:spcAft>
+            </a:pPr>
+            <a:r>
+              <a:rPr sz="800" b="0">
+                <a:solidFill>
+                  <a:srgbClr val="555F6B"/>
+                </a:solidFill>
+                <a:latin typeface="Microsoft YaHei"/>
+              </a:rPr>
+              <a:t>10 档预设写入寄存器即生效，不复位、不中断像素流。</a:t>
+            </a:r>
+          </a:p>
+        </p:txBody>
+      </p:sp>
+      <p:sp>
+        <p:nvSpPr>
+          <p:cNvPr id="44" name="TextBox 43"/>
+          <p:cNvSpPr txBox="1"/>
+          <p:nvPr/>
+        </p:nvSpPr>
+        <p:spPr>
+          <a:xfrm>
+            <a:off x="4251960" y="4773167"/>
+            <a:ext cx="3794760" cy="182880"/>
+          </a:xfrm>
+          <a:prstGeom prst="rect">
+            <a:avLst/>
+          </a:prstGeom>
+          <a:noFill/>
+        </p:spPr>
+        <p:txBody>
+          <a:bodyPr wrap="square" anchor="t" lIns="0" rIns="0" tIns="0" bIns="0">
+            <a:spAutoFit/>
+          </a:bodyPr>
+          <a:lstStyle/>
+          <a:p>
+            <a:pPr algn="l">
+              <a:lnSpc>
+                <a:spcPct val="100000"/>
+              </a:lnSpc>
+              <a:spcAft>
+                <a:spcPts val="0"/>
+              </a:spcAft>
+            </a:pPr>
+            <a:r>
+              <a:rPr sz="930" b="1">
+                <a:solidFill>
+                  <a:srgbClr val="1A1A1A"/>
+                </a:solidFill>
+                <a:latin typeface="Microsoft YaHei"/>
+              </a:rPr>
+              <a:t>全整数定点</a:t>
+            </a:r>
+          </a:p>
+        </p:txBody>
+      </p:sp>
+      <p:sp>
+        <p:nvSpPr>
+          <p:cNvPr id="45" name="TextBox 44"/>
+          <p:cNvSpPr txBox="1"/>
+          <p:nvPr/>
+        </p:nvSpPr>
+        <p:spPr>
+          <a:xfrm>
+            <a:off x="4251960" y="4956047"/>
+            <a:ext cx="3794760" cy="164592"/>
+          </a:xfrm>
+          <a:prstGeom prst="rect">
+            <a:avLst/>
+          </a:prstGeom>
+          <a:noFill/>
+        </p:spPr>
+        <p:txBody>
+          <a:bodyPr wrap="square" anchor="t" lIns="0" rIns="0" tIns="0" bIns="0">
+            <a:spAutoFit/>
+          </a:bodyPr>
+          <a:lstStyle/>
+          <a:p>
+            <a:pPr algn="l">
+              <a:lnSpc>
+                <a:spcPct val="105000"/>
+              </a:lnSpc>
+              <a:spcAft>
+                <a:spcPts val="0"/>
+              </a:spcAft>
+            </a:pPr>
+            <a:r>
+              <a:rPr sz="800" b="0">
+                <a:solidFill>
+                  <a:srgbClr val="555F6B"/>
+                </a:solidFill>
+                <a:latin typeface="Microsoft YaHei"/>
+              </a:rPr>
+              <a:t>与 NumPy 黄金模型 0 容差比对，8 档 2,764,800 通道逐位一致。</a:t>
+            </a:r>
+          </a:p>
+        </p:txBody>
+      </p:sp>
+      <p:sp>
+        <p:nvSpPr>
+          <p:cNvPr id="46" name="TextBox 45"/>
+          <p:cNvSpPr txBox="1"/>
+          <p:nvPr/>
+        </p:nvSpPr>
+        <p:spPr>
+          <a:xfrm>
+            <a:off x="4251960" y="5248655"/>
+            <a:ext cx="3794760" cy="182880"/>
+          </a:xfrm>
+          <a:prstGeom prst="rect">
+            <a:avLst/>
+          </a:prstGeom>
+          <a:noFill/>
+        </p:spPr>
+        <p:txBody>
+          <a:bodyPr wrap="square" anchor="t" lIns="0" rIns="0" tIns="0" bIns="0">
+            <a:spAutoFit/>
+          </a:bodyPr>
+          <a:lstStyle/>
+          <a:p>
+            <a:pPr algn="l">
+              <a:lnSpc>
+                <a:spcPct val="100000"/>
+              </a:lnSpc>
+              <a:spcAft>
+                <a:spcPts val="0"/>
+              </a:spcAft>
+            </a:pPr>
+            <a:r>
+              <a:rPr sz="930" b="1">
+                <a:solidFill>
+                  <a:srgbClr val="1A1A1A"/>
+                </a:solidFill>
+                <a:latin typeface="Microsoft YaHei"/>
+              </a:rPr>
+              <a:t>双时间戳</a:t>
+            </a:r>
+          </a:p>
+        </p:txBody>
+      </p:sp>
+      <p:sp>
+        <p:nvSpPr>
+          <p:cNvPr id="47" name="TextBox 46"/>
+          <p:cNvSpPr txBox="1"/>
+          <p:nvPr/>
+        </p:nvSpPr>
+        <p:spPr>
+          <a:xfrm>
+            <a:off x="4251960" y="5431535"/>
+            <a:ext cx="3794760" cy="164592"/>
+          </a:xfrm>
+          <a:prstGeom prst="rect">
+            <a:avLst/>
+          </a:prstGeom>
+          <a:noFill/>
+        </p:spPr>
+        <p:txBody>
+          <a:bodyPr wrap="square" anchor="t" lIns="0" rIns="0" tIns="0" bIns="0">
+            <a:spAutoFit/>
+          </a:bodyPr>
+          <a:lstStyle/>
+          <a:p>
+            <a:pPr algn="l">
+              <a:lnSpc>
+                <a:spcPct val="105000"/>
+              </a:lnSpc>
+              <a:spcAft>
+                <a:spcPts val="0"/>
+              </a:spcAft>
+            </a:pPr>
+            <a:r>
+              <a:rPr sz="800" b="0">
+                <a:solidFill>
+                  <a:srgbClr val="555F6B"/>
+                </a:solidFill>
+                <a:latin typeface="Microsoft YaHei"/>
+              </a:rPr>
+              <a:t>DMA 与 HDMI 两条通路各自打点，实测流水线延迟 16 拍 / 160 ns。</a:t>
+            </a:r>
+          </a:p>
+        </p:txBody>
+      </p:sp>
+      <p:sp>
+        <p:nvSpPr>
+          <p:cNvPr id="48" name="TextBox 47"/>
+          <p:cNvSpPr txBox="1"/>
+          <p:nvPr/>
+        </p:nvSpPr>
+        <p:spPr>
+          <a:xfrm>
+            <a:off x="8275320" y="1325880"/>
+            <a:ext cx="3429000" cy="256032"/>
+          </a:xfrm>
+          <a:prstGeom prst="rect">
+            <a:avLst/>
+          </a:prstGeom>
+          <a:noFill/>
+        </p:spPr>
+        <p:txBody>
+          <a:bodyPr wrap="square" anchor="t" lIns="0" rIns="0" tIns="0" bIns="0">
+            <a:spAutoFit/>
+          </a:bodyPr>
+          <a:lstStyle/>
+          <a:p>
+            <a:pPr algn="l">
+              <a:lnSpc>
+                <a:spcPct val="100000"/>
+              </a:lnSpc>
+              <a:spcAft>
+                <a:spcPts val="0"/>
+              </a:spcAft>
+            </a:pPr>
+            <a:r>
+              <a:rPr sz="1400" b="1">
+                <a:solidFill>
+                  <a:srgbClr val="008CC8"/>
+                </a:solidFill>
+                <a:latin typeface="Microsoft YaHei"/>
+              </a:rPr>
+              <a:t>4  结果</a:t>
+            </a:r>
+          </a:p>
+        </p:txBody>
+      </p:sp>
+      <p:sp>
+        <p:nvSpPr>
+          <p:cNvPr id="49" name="Rectangle 48"/>
+          <p:cNvSpPr/>
+          <p:nvPr/>
+        </p:nvSpPr>
+        <p:spPr>
+          <a:xfrm>
+            <a:off x="8275320" y="1609344"/>
+            <a:ext cx="3429000" cy="13716"/>
+          </a:xfrm>
+          <a:prstGeom prst="rect">
+            <a:avLst/>
+          </a:prstGeom>
+          <a:solidFill>
+            <a:srgbClr val="D8E0E8"/>
+          </a:solidFill>
+          <a:ln>
+            <a:noFill/>
+          </a:ln>
+          <a:effectLst/>
+        </p:spPr>
+        <p:style>
+          <a:lnRef idx="1">
+            <a:schemeClr val="accent1"/>
+          </a:lnRef>
+          <a:fillRef idx="3">
+            <a:schemeClr val="accent1"/>
+          </a:fillRef>
+          <a:effectRef idx="2">
+            <a:schemeClr val="accent1"/>
+          </a:effectRef>
+          <a:fontRef idx="minor">
+            <a:schemeClr val="lt1"/>
+          </a:fontRef>
+        </p:style>
+        <p:txBody>
+          <a:bodyPr rtlCol="0" anchor="ctr"/>
+          <a:lstStyle/>
+          <a:p>
+            <a:pPr algn="ctr"/>
+          </a:p>
+        </p:txBody>
+      </p:sp>
+      <p:sp>
+        <p:nvSpPr>
+          <p:cNvPr id="50" name="Rectangle 49"/>
+          <p:cNvSpPr/>
+          <p:nvPr/>
+        </p:nvSpPr>
+        <p:spPr>
+          <a:xfrm>
+            <a:off x="8275320" y="1737360"/>
+            <a:ext cx="1664208" cy="676656"/>
+          </a:xfrm>
+          <a:prstGeom prst="rect">
+            <a:avLst/>
+          </a:prstGeom>
+          <a:solidFill>
+            <a:srgbClr val="F2F5F8"/>
+          </a:solidFill>
+          <a:ln>
+            <a:noFill/>
+          </a:ln>
+          <a:effectLst/>
+        </p:spPr>
+        <p:style>
+          <a:lnRef idx="1">
+            <a:schemeClr val="accent1"/>
+          </a:lnRef>
+          <a:fillRef idx="3">
+            <a:schemeClr val="accent1"/>
+          </a:fillRef>
+          <a:effectRef idx="2">
+            <a:schemeClr val="accent1"/>
+          </a:effectRef>
+          <a:fontRef idx="minor">
+            <a:schemeClr val="lt1"/>
+          </a:fontRef>
+        </p:style>
+        <p:txBody>
+          <a:bodyPr rtlCol="0" anchor="ctr"/>
+          <a:lstStyle/>
+          <a:p>
+            <a:pPr algn="ctr"/>
+          </a:p>
+        </p:txBody>
+      </p:sp>
+      <p:sp>
+        <p:nvSpPr>
+          <p:cNvPr id="51" name="Rectangle 50"/>
+          <p:cNvSpPr/>
+          <p:nvPr/>
+        </p:nvSpPr>
+        <p:spPr>
+          <a:xfrm>
+            <a:off x="8275320" y="1737360"/>
+            <a:ext cx="50292" cy="676656"/>
+          </a:xfrm>
+          <a:prstGeom prst="rect">
+            <a:avLst/>
+          </a:prstGeom>
+          <a:solidFill>
+            <a:srgbClr val="008CC8"/>
+          </a:solidFill>
+          <a:ln>
+            <a:noFill/>
+          </a:ln>
+          <a:effectLst/>
+        </p:spPr>
+        <p:style>
+          <a:lnRef idx="1">
+            <a:schemeClr val="accent1"/>
+          </a:lnRef>
+          <a:fillRef idx="3">
+            <a:schemeClr val="accent1"/>
+          </a:fillRef>
+          <a:effectRef idx="2">
+            <a:schemeClr val="accent1"/>
+          </a:effectRef>
+          <a:fontRef idx="minor">
+            <a:schemeClr val="lt1"/>
+          </a:fontRef>
+        </p:style>
+        <p:txBody>
+          <a:bodyPr rtlCol="0" anchor="ctr"/>
+          <a:lstStyle/>
+          <a:p>
+            <a:pPr algn="ctr"/>
+          </a:p>
+        </p:txBody>
+      </p:sp>
+      <p:sp>
+        <p:nvSpPr>
+          <p:cNvPr id="52" name="TextBox 51"/>
+          <p:cNvSpPr txBox="1"/>
+          <p:nvPr/>
+        </p:nvSpPr>
+        <p:spPr>
+          <a:xfrm>
+            <a:off x="8412480" y="1801368"/>
+            <a:ext cx="1481328" cy="274320"/>
+          </a:xfrm>
+          <a:prstGeom prst="rect">
+            <a:avLst/>
+          </a:prstGeom>
+          <a:noFill/>
+        </p:spPr>
+        <p:txBody>
+          <a:bodyPr wrap="square" anchor="t" lIns="0" rIns="0" tIns="0" bIns="0">
+            <a:spAutoFit/>
+          </a:bodyPr>
+          <a:lstStyle/>
+          <a:p>
+            <a:pPr algn="l">
+              <a:lnSpc>
+                <a:spcPct val="100000"/>
+              </a:lnSpc>
+              <a:spcAft>
+                <a:spcPts val="0"/>
+              </a:spcAft>
+            </a:pPr>
+            <a:r>
+              <a:rPr sz="1650" b="1">
+                <a:solidFill>
+                  <a:srgbClr val="0E2A47"/>
+                </a:solidFill>
+                <a:latin typeface="Microsoft YaHei"/>
+              </a:rPr>
+              <a:t>194.59 MHz</a:t>
+            </a:r>
+          </a:p>
+        </p:txBody>
+      </p:sp>
+      <p:sp>
+        <p:nvSpPr>
+          <p:cNvPr id="53" name="TextBox 52"/>
+          <p:cNvSpPr txBox="1"/>
+          <p:nvPr/>
+        </p:nvSpPr>
+        <p:spPr>
+          <a:xfrm>
+            <a:off x="8412480" y="2103120"/>
+            <a:ext cx="1481328" cy="237744"/>
+          </a:xfrm>
+          <a:prstGeom prst="rect">
+            <a:avLst/>
+          </a:prstGeom>
+          <a:noFill/>
+        </p:spPr>
+        <p:txBody>
+          <a:bodyPr wrap="square" anchor="t" lIns="0" rIns="0" tIns="0" bIns="0">
+            <a:spAutoFit/>
+          </a:bodyPr>
+          <a:lstStyle/>
+          <a:p>
+            <a:pPr algn="l">
+              <a:lnSpc>
+                <a:spcPct val="105000"/>
+              </a:lnSpc>
+              <a:spcAft>
+                <a:spcPts val="0"/>
+              </a:spcAft>
+            </a:pPr>
+            <a:r>
+              <a:rPr sz="819" b="0">
+                <a:solidFill>
+                  <a:srgbClr val="555F6B"/>
+                </a:solidFill>
+                <a:latin typeface="Microsoft YaHei"/>
+              </a:rPr>
+              <a:t>实现后频率，WNS +0.206 ns</a:t>
+            </a:r>
+          </a:p>
+        </p:txBody>
+      </p:sp>
+      <p:sp>
+        <p:nvSpPr>
+          <p:cNvPr id="54" name="Rectangle 53"/>
+          <p:cNvSpPr/>
+          <p:nvPr/>
+        </p:nvSpPr>
+        <p:spPr>
+          <a:xfrm>
+            <a:off x="10040112" y="1737360"/>
+            <a:ext cx="1664208" cy="676656"/>
+          </a:xfrm>
+          <a:prstGeom prst="rect">
+            <a:avLst/>
+          </a:prstGeom>
+          <a:solidFill>
+            <a:srgbClr val="F2F5F8"/>
+          </a:solidFill>
+          <a:ln>
+            <a:noFill/>
+          </a:ln>
+          <a:effectLst/>
+        </p:spPr>
+        <p:style>
+          <a:lnRef idx="1">
+            <a:schemeClr val="accent1"/>
+          </a:lnRef>
+          <a:fillRef idx="3">
+            <a:schemeClr val="accent1"/>
+          </a:fillRef>
+          <a:effectRef idx="2">
+            <a:schemeClr val="accent1"/>
+          </a:effectRef>
+          <a:fontRef idx="minor">
+            <a:schemeClr val="lt1"/>
+          </a:fontRef>
+        </p:style>
+        <p:txBody>
+          <a:bodyPr rtlCol="0" anchor="ctr"/>
+          <a:lstStyle/>
+          <a:p>
+            <a:pPr algn="ctr"/>
+          </a:p>
+        </p:txBody>
+      </p:sp>
+      <p:sp>
+        <p:nvSpPr>
+          <p:cNvPr id="55" name="Rectangle 54"/>
+          <p:cNvSpPr/>
+          <p:nvPr/>
+        </p:nvSpPr>
+        <p:spPr>
+          <a:xfrm>
+            <a:off x="10040112" y="1737360"/>
+            <a:ext cx="50292" cy="676656"/>
+          </a:xfrm>
+          <a:prstGeom prst="rect">
+            <a:avLst/>
+          </a:prstGeom>
+          <a:solidFill>
+            <a:srgbClr val="008CC8"/>
+          </a:solidFill>
+          <a:ln>
+            <a:noFill/>
+          </a:ln>
+          <a:effectLst/>
+        </p:spPr>
+        <p:style>
+          <a:lnRef idx="1">
+            <a:schemeClr val="accent1"/>
+          </a:lnRef>
+          <a:fillRef idx="3">
+            <a:schemeClr val="accent1"/>
+          </a:fillRef>
+          <a:effectRef idx="2">
+            <a:schemeClr val="accent1"/>
+          </a:effectRef>
+          <a:fontRef idx="minor">
+            <a:schemeClr val="lt1"/>
+          </a:fontRef>
+        </p:style>
+        <p:txBody>
+          <a:bodyPr rtlCol="0" anchor="ctr"/>
+          <a:lstStyle/>
+          <a:p>
+            <a:pPr algn="ctr"/>
+          </a:p>
+        </p:txBody>
+      </p:sp>
+      <p:sp>
+        <p:nvSpPr>
+          <p:cNvPr id="56" name="TextBox 55"/>
+          <p:cNvSpPr txBox="1"/>
+          <p:nvPr/>
+        </p:nvSpPr>
+        <p:spPr>
+          <a:xfrm>
+            <a:off x="10177272" y="1801368"/>
+            <a:ext cx="1481328" cy="274320"/>
+          </a:xfrm>
+          <a:prstGeom prst="rect">
+            <a:avLst/>
+          </a:prstGeom>
+          <a:noFill/>
+        </p:spPr>
+        <p:txBody>
+          <a:bodyPr wrap="square" anchor="t" lIns="0" rIns="0" tIns="0" bIns="0">
+            <a:spAutoFit/>
+          </a:bodyPr>
+          <a:lstStyle/>
+          <a:p>
+            <a:pPr algn="l">
+              <a:lnSpc>
+                <a:spcPct val="100000"/>
+              </a:lnSpc>
+              <a:spcAft>
+                <a:spcPts val="0"/>
+              </a:spcAft>
+            </a:pPr>
+            <a:r>
+              <a:rPr sz="1650" b="1">
+                <a:solidFill>
+                  <a:srgbClr val="0E2A47"/>
+                </a:solidFill>
+                <a:latin typeface="Microsoft YaHei"/>
+              </a:rPr>
+              <a:t>1,659 LUT</a:t>
+            </a:r>
+          </a:p>
+        </p:txBody>
+      </p:sp>
+      <p:sp>
+        <p:nvSpPr>
+          <p:cNvPr id="57" name="TextBox 56"/>
+          <p:cNvSpPr txBox="1"/>
+          <p:nvPr/>
+        </p:nvSpPr>
+        <p:spPr>
+          <a:xfrm>
+            <a:off x="10177272" y="2103120"/>
+            <a:ext cx="1481328" cy="237744"/>
+          </a:xfrm>
+          <a:prstGeom prst="rect">
+            <a:avLst/>
+          </a:prstGeom>
+          <a:noFill/>
+        </p:spPr>
+        <p:txBody>
+          <a:bodyPr wrap="square" anchor="t" lIns="0" rIns="0" tIns="0" bIns="0">
+            <a:spAutoFit/>
+          </a:bodyPr>
+          <a:lstStyle/>
+          <a:p>
+            <a:pPr algn="l">
+              <a:lnSpc>
+                <a:spcPct val="105000"/>
+              </a:lnSpc>
+              <a:spcAft>
+                <a:spcPts val="0"/>
+              </a:spcAft>
+            </a:pPr>
+            <a:r>
+              <a:rPr sz="819" b="0">
+                <a:solidFill>
+                  <a:srgbClr val="555F6B"/>
+                </a:solidFill>
+                <a:latin typeface="Microsoft YaHei"/>
+              </a:rPr>
+              <a:t>占 XC7Z020 的 3%；FF 2,168 / BRAM 3 / DSP 2</a:t>
+            </a:r>
+          </a:p>
+        </p:txBody>
+      </p:sp>
+      <p:sp>
+        <p:nvSpPr>
+          <p:cNvPr id="58" name="Rectangle 57"/>
+          <p:cNvSpPr/>
+          <p:nvPr/>
+        </p:nvSpPr>
+        <p:spPr>
+          <a:xfrm>
+            <a:off x="8275320" y="2487168"/>
+            <a:ext cx="1664208" cy="676656"/>
+          </a:xfrm>
+          <a:prstGeom prst="rect">
+            <a:avLst/>
+          </a:prstGeom>
+          <a:solidFill>
+            <a:srgbClr val="F2F5F8"/>
+          </a:solidFill>
+          <a:ln>
+            <a:noFill/>
+          </a:ln>
+          <a:effectLst/>
+        </p:spPr>
+        <p:style>
+          <a:lnRef idx="1">
+            <a:schemeClr val="accent1"/>
+          </a:lnRef>
+          <a:fillRef idx="3">
+            <a:schemeClr val="accent1"/>
+          </a:fillRef>
+          <a:effectRef idx="2">
+            <a:schemeClr val="accent1"/>
+          </a:effectRef>
+          <a:fontRef idx="minor">
+            <a:schemeClr val="lt1"/>
+          </a:fontRef>
+        </p:style>
+        <p:txBody>
+          <a:bodyPr rtlCol="0" anchor="ctr"/>
+          <a:lstStyle/>
+          <a:p>
+            <a:pPr algn="ctr"/>
+          </a:p>
+        </p:txBody>
+      </p:sp>
+      <p:sp>
+        <p:nvSpPr>
+          <p:cNvPr id="59" name="Rectangle 58"/>
+          <p:cNvSpPr/>
+          <p:nvPr/>
+        </p:nvSpPr>
+        <p:spPr>
+          <a:xfrm>
+            <a:off x="8275320" y="2487168"/>
+            <a:ext cx="50292" cy="676656"/>
+          </a:xfrm>
+          <a:prstGeom prst="rect">
+            <a:avLst/>
+          </a:prstGeom>
+          <a:solidFill>
+            <a:srgbClr val="008CC8"/>
+          </a:solidFill>
+          <a:ln>
+            <a:noFill/>
+          </a:ln>
+          <a:effectLst/>
+        </p:spPr>
+        <p:style>
+          <a:lnRef idx="1">
+            <a:schemeClr val="accent1"/>
+          </a:lnRef>
+          <a:fillRef idx="3">
+            <a:schemeClr val="accent1"/>
+          </a:fillRef>
+          <a:effectRef idx="2">
+            <a:schemeClr val="accent1"/>
+          </a:effectRef>
+          <a:fontRef idx="minor">
+            <a:schemeClr val="lt1"/>
+          </a:fontRef>
+        </p:style>
+        <p:txBody>
+          <a:bodyPr rtlCol="0" anchor="ctr"/>
+          <a:lstStyle/>
+          <a:p>
+            <a:pPr algn="ctr"/>
+          </a:p>
+        </p:txBody>
+      </p:sp>
+      <p:sp>
+        <p:nvSpPr>
+          <p:cNvPr id="60" name="TextBox 59"/>
+          <p:cNvSpPr txBox="1"/>
+          <p:nvPr/>
+        </p:nvSpPr>
+        <p:spPr>
+          <a:xfrm>
+            <a:off x="8412480" y="2551176"/>
+            <a:ext cx="1481328" cy="274320"/>
+          </a:xfrm>
+          <a:prstGeom prst="rect">
+            <a:avLst/>
+          </a:prstGeom>
+          <a:noFill/>
+        </p:spPr>
+        <p:txBody>
+          <a:bodyPr wrap="square" anchor="t" lIns="0" rIns="0" tIns="0" bIns="0">
+            <a:spAutoFit/>
+          </a:bodyPr>
+          <a:lstStyle/>
+          <a:p>
+            <a:pPr algn="l">
+              <a:lnSpc>
+                <a:spcPct val="100000"/>
+              </a:lnSpc>
+              <a:spcAft>
+                <a:spcPts val="0"/>
+              </a:spcAft>
+            </a:pPr>
+            <a:r>
+              <a:rPr sz="1650" b="1">
+                <a:solidFill>
+                  <a:srgbClr val="0E2A47"/>
+                </a:solidFill>
+                <a:latin typeface="Microsoft YaHei"/>
+              </a:rPr>
+              <a:t>15.6 ms</a:t>
+            </a:r>
+          </a:p>
+        </p:txBody>
+      </p:sp>
+      <p:sp>
+        <p:nvSpPr>
+          <p:cNvPr id="61" name="TextBox 60"/>
+          <p:cNvSpPr txBox="1"/>
+          <p:nvPr/>
+        </p:nvSpPr>
+        <p:spPr>
+          <a:xfrm>
+            <a:off x="8412480" y="2852928"/>
+            <a:ext cx="1481328" cy="237744"/>
+          </a:xfrm>
+          <a:prstGeom prst="rect">
+            <a:avLst/>
+          </a:prstGeom>
+          <a:noFill/>
+        </p:spPr>
+        <p:txBody>
+          <a:bodyPr wrap="square" anchor="t" lIns="0" rIns="0" tIns="0" bIns="0">
+            <a:spAutoFit/>
+          </a:bodyPr>
+          <a:lstStyle/>
+          <a:p>
+            <a:pPr algn="l">
+              <a:lnSpc>
+                <a:spcPct val="105000"/>
+              </a:lnSpc>
+              <a:spcAft>
+                <a:spcPts val="0"/>
+              </a:spcAft>
+            </a:pPr>
+            <a:r>
+              <a:rPr sz="819" b="0">
+                <a:solidFill>
+                  <a:srgbClr val="555F6B"/>
+                </a:solidFill>
+                <a:latin typeface="Microsoft YaHei"/>
+              </a:rPr>
+              <a:t>1280×720 单帧处理时间</a:t>
+            </a:r>
+          </a:p>
+        </p:txBody>
+      </p:sp>
+      <p:sp>
+        <p:nvSpPr>
+          <p:cNvPr id="62" name="Rectangle 61"/>
+          <p:cNvSpPr/>
+          <p:nvPr/>
+        </p:nvSpPr>
+        <p:spPr>
+          <a:xfrm>
+            <a:off x="10040112" y="2487168"/>
+            <a:ext cx="1664208" cy="676656"/>
+          </a:xfrm>
+          <a:prstGeom prst="rect">
+            <a:avLst/>
+          </a:prstGeom>
+          <a:solidFill>
+            <a:srgbClr val="F2F5F8"/>
+          </a:solidFill>
+          <a:ln>
+            <a:noFill/>
+          </a:ln>
+          <a:effectLst/>
+        </p:spPr>
+        <p:style>
+          <a:lnRef idx="1">
+            <a:schemeClr val="accent1"/>
+          </a:lnRef>
+          <a:fillRef idx="3">
+            <a:schemeClr val="accent1"/>
+          </a:fillRef>
+          <a:effectRef idx="2">
+            <a:schemeClr val="accent1"/>
+          </a:effectRef>
+          <a:fontRef idx="minor">
+            <a:schemeClr val="lt1"/>
+          </a:fontRef>
+        </p:style>
+        <p:txBody>
+          <a:bodyPr rtlCol="0" anchor="ctr"/>
+          <a:lstStyle/>
+          <a:p>
+            <a:pPr algn="ctr"/>
+          </a:p>
+        </p:txBody>
+      </p:sp>
+      <p:sp>
+        <p:nvSpPr>
+          <p:cNvPr id="63" name="Rectangle 62"/>
+          <p:cNvSpPr/>
+          <p:nvPr/>
+        </p:nvSpPr>
+        <p:spPr>
+          <a:xfrm>
+            <a:off x="10040112" y="2487168"/>
+            <a:ext cx="50292" cy="676656"/>
+          </a:xfrm>
+          <a:prstGeom prst="rect">
+            <a:avLst/>
+          </a:prstGeom>
+          <a:solidFill>
+            <a:srgbClr val="008CC8"/>
+          </a:solidFill>
+          <a:ln>
+            <a:noFill/>
+          </a:ln>
+          <a:effectLst/>
+        </p:spPr>
+        <p:style>
+          <a:lnRef idx="1">
+            <a:schemeClr val="accent1"/>
+          </a:lnRef>
+          <a:fillRef idx="3">
+            <a:schemeClr val="accent1"/>
+          </a:fillRef>
+          <a:effectRef idx="2">
+            <a:schemeClr val="accent1"/>
+          </a:effectRef>
+          <a:fontRef idx="minor">
+            <a:schemeClr val="lt1"/>
+          </a:fontRef>
+        </p:style>
+        <p:txBody>
+          <a:bodyPr rtlCol="0" anchor="ctr"/>
+          <a:lstStyle/>
+          <a:p>
+            <a:pPr algn="ctr"/>
+          </a:p>
+        </p:txBody>
+      </p:sp>
+      <p:sp>
+        <p:nvSpPr>
+          <p:cNvPr id="64" name="TextBox 63"/>
+          <p:cNvSpPr txBox="1"/>
+          <p:nvPr/>
+        </p:nvSpPr>
+        <p:spPr>
+          <a:xfrm>
+            <a:off x="10177272" y="2551176"/>
+            <a:ext cx="1481328" cy="274320"/>
+          </a:xfrm>
+          <a:prstGeom prst="rect">
+            <a:avLst/>
+          </a:prstGeom>
+          <a:noFill/>
+        </p:spPr>
+        <p:txBody>
+          <a:bodyPr wrap="square" anchor="t" lIns="0" rIns="0" tIns="0" bIns="0">
+            <a:spAutoFit/>
+          </a:bodyPr>
+          <a:lstStyle/>
+          <a:p>
+            <a:pPr algn="l">
+              <a:lnSpc>
+                <a:spcPct val="100000"/>
+              </a:lnSpc>
+              <a:spcAft>
+                <a:spcPts val="0"/>
+              </a:spcAft>
+            </a:pPr>
+            <a:r>
+              <a:rPr sz="1650" b="1">
+                <a:solidFill>
+                  <a:srgbClr val="0E2A47"/>
+                </a:solidFill>
+                <a:latin typeface="Microsoft YaHei"/>
+              </a:rPr>
+              <a:t>196.7×</a:t>
+            </a:r>
+          </a:p>
+        </p:txBody>
+      </p:sp>
+      <p:sp>
+        <p:nvSpPr>
+          <p:cNvPr id="65" name="TextBox 64"/>
+          <p:cNvSpPr txBox="1"/>
+          <p:nvPr/>
+        </p:nvSpPr>
+        <p:spPr>
+          <a:xfrm>
+            <a:off x="10177272" y="2852928"/>
+            <a:ext cx="1481328" cy="237744"/>
+          </a:xfrm>
+          <a:prstGeom prst="rect">
+            <a:avLst/>
+          </a:prstGeom>
+          <a:noFill/>
+        </p:spPr>
+        <p:txBody>
+          <a:bodyPr wrap="square" anchor="t" lIns="0" rIns="0" tIns="0" bIns="0">
+            <a:spAutoFit/>
+          </a:bodyPr>
+          <a:lstStyle/>
+          <a:p>
+            <a:pPr algn="l">
+              <a:lnSpc>
+                <a:spcPct val="105000"/>
+              </a:lnSpc>
+              <a:spcAft>
+                <a:spcPts val="0"/>
+              </a:spcAft>
+            </a:pPr>
+            <a:r>
+              <a:rPr sz="819" b="0">
+                <a:solidFill>
+                  <a:srgbClr val="555F6B"/>
+                </a:solidFill>
+                <a:latin typeface="Microsoft YaHei"/>
+              </a:rPr>
+              <a:t>相对 ARM 纯软件的加速比（Sobel）</a:t>
+            </a:r>
+          </a:p>
+        </p:txBody>
+      </p:sp>
+      <p:sp>
+        <p:nvSpPr>
+          <p:cNvPr id="66" name="TextBox 65"/>
+          <p:cNvSpPr txBox="1"/>
+          <p:nvPr/>
+        </p:nvSpPr>
+        <p:spPr>
+          <a:xfrm>
+            <a:off x="8275320" y="3310128"/>
+            <a:ext cx="3429000" cy="256032"/>
+          </a:xfrm>
+          <a:prstGeom prst="rect">
+            <a:avLst/>
+          </a:prstGeom>
+          <a:noFill/>
+        </p:spPr>
+        <p:txBody>
+          <a:bodyPr wrap="square" anchor="t" lIns="0" rIns="0" tIns="0" bIns="0">
+            <a:spAutoFit/>
+          </a:bodyPr>
+          <a:lstStyle/>
+          <a:p>
+            <a:pPr algn="l">
+              <a:lnSpc>
+                <a:spcPct val="100000"/>
+              </a:lnSpc>
+              <a:spcAft>
+                <a:spcPts val="0"/>
+              </a:spcAft>
+            </a:pPr>
+            <a:r>
+              <a:rPr sz="1400" b="1">
+                <a:solidFill>
+                  <a:srgbClr val="008CC8"/>
+                </a:solidFill>
+                <a:latin typeface="Microsoft YaHei"/>
+              </a:rPr>
+              <a:t>5  演示现场</a:t>
+            </a:r>
+          </a:p>
+        </p:txBody>
+      </p:sp>
+      <p:sp>
+        <p:nvSpPr>
+          <p:cNvPr id="67" name="Rectangle 66"/>
+          <p:cNvSpPr/>
+          <p:nvPr/>
+        </p:nvSpPr>
+        <p:spPr>
+          <a:xfrm>
+            <a:off x="8275320" y="3593592"/>
+            <a:ext cx="3429000" cy="13716"/>
+          </a:xfrm>
+          <a:prstGeom prst="rect">
+            <a:avLst/>
+          </a:prstGeom>
+          <a:solidFill>
+            <a:srgbClr val="D8E0E8"/>
+          </a:solidFill>
+          <a:ln>
+            <a:noFill/>
+          </a:ln>
+          <a:effectLst/>
+        </p:spPr>
+        <p:style>
+          <a:lnRef idx="1">
+            <a:schemeClr val="accent1"/>
+          </a:lnRef>
+          <a:fillRef idx="3">
+            <a:schemeClr val="accent1"/>
+          </a:fillRef>
+          <a:effectRef idx="2">
+            <a:schemeClr val="accent1"/>
+          </a:effectRef>
+          <a:fontRef idx="minor">
+            <a:schemeClr val="lt1"/>
+          </a:fontRef>
+        </p:style>
+        <p:txBody>
+          <a:bodyPr rtlCol="0" anchor="ctr"/>
+          <a:lstStyle/>
+          <a:p>
+            <a:pPr algn="ctr"/>
+          </a:p>
+        </p:txBody>
+      </p:sp>
       <p:pic>
         <p:nvPicPr>
-          <p:cNvPr id="26" name="Picture 25" descr="hdmi_presets_2x2.png"/>
+          <p:cNvPr id="68" name="Picture 67" descr="setup_full_view.jpg"/>
           <p:cNvPicPr>
             <a:picLocks noChangeAspect="1"/>
           </p:cNvPicPr>
@@ -4356,8 +5938,8 @@
         </p:blipFill>
         <p:spPr>
           <a:xfrm>
-            <a:off x="4932000" y="8904857"/>
-            <a:ext cx="1548000" cy="1164031"/>
+            <a:off x="8275320" y="3675887"/>
+            <a:ext cx="1439899" cy="1920240"/>
           </a:xfrm>
           <a:prstGeom prst="rect">
             <a:avLst/>
@@ -4366,14 +5948,14 @@
       </p:pic>
       <p:sp>
         <p:nvSpPr>
-          <p:cNvPr id="27" name="TextBox 26"/>
+          <p:cNvPr id="69" name="TextBox 68"/>
           <p:cNvSpPr txBox="1"/>
           <p:nvPr/>
         </p:nvSpPr>
         <p:spPr>
           <a:xfrm>
-            <a:off x="4932000" y="10104888"/>
-            <a:ext cx="1548000" cy="180984"/>
+            <a:off x="8275320" y="5650992"/>
+            <a:ext cx="3429000" cy="219456"/>
           </a:xfrm>
           <a:prstGeom prst="rect">
             <a:avLst/>
@@ -4381,8 +5963,1015 @@
           <a:noFill/>
         </p:spPr>
         <p:txBody>
-          <a:bodyPr wrap="square">
-            <a:noAutofit/>
+          <a:bodyPr wrap="square" anchor="t" lIns="0" rIns="0" tIns="0" bIns="0">
+            <a:spAutoFit/>
+          </a:bodyPr>
+          <a:lstStyle/>
+          <a:p>
+            <a:pPr algn="l">
+              <a:lnSpc>
+                <a:spcPct val="105000"/>
+              </a:lnSpc>
+              <a:spcAft>
+                <a:spcPts val="0"/>
+              </a:spcAft>
+            </a:pPr>
+            <a:r>
+              <a:rPr sz="730" b="0">
+                <a:solidFill>
+                  <a:srgbClr val="555F6B"/>
+                </a:solidFill>
+                <a:latin typeface="Microsoft YaHei"/>
+              </a:rPr>
+              <a:t>照片：笔记本运行 OBS，经采集卡接收板卡 HDMI 输出。</a:t>
+            </a:r>
+          </a:p>
+        </p:txBody>
+      </p:sp>
+      <p:sp>
+        <p:nvSpPr>
+          <p:cNvPr id="70" name="Rectangle 69"/>
+          <p:cNvSpPr/>
+          <p:nvPr/>
+        </p:nvSpPr>
+        <p:spPr>
+          <a:xfrm>
+            <a:off x="502920" y="6053328"/>
+            <a:ext cx="11183112" cy="566928"/>
+          </a:xfrm>
+          <a:prstGeom prst="rect">
+            <a:avLst/>
+          </a:prstGeom>
+          <a:solidFill>
+            <a:srgbClr val="F2F5F8"/>
+          </a:solidFill>
+          <a:ln>
+            <a:noFill/>
+          </a:ln>
+          <a:effectLst/>
+        </p:spPr>
+        <p:style>
+          <a:lnRef idx="1">
+            <a:schemeClr val="accent1"/>
+          </a:lnRef>
+          <a:fillRef idx="3">
+            <a:schemeClr val="accent1"/>
+          </a:fillRef>
+          <a:effectRef idx="2">
+            <a:schemeClr val="accent1"/>
+          </a:effectRef>
+          <a:fontRef idx="minor">
+            <a:schemeClr val="lt1"/>
+          </a:fontRef>
+        </p:style>
+        <p:txBody>
+          <a:bodyPr rtlCol="0" anchor="ctr"/>
+          <a:lstStyle/>
+          <a:p>
+            <a:pPr algn="ctr"/>
+          </a:p>
+        </p:txBody>
+      </p:sp>
+      <p:sp>
+        <p:nvSpPr>
+          <p:cNvPr id="71" name="Rectangle 70"/>
+          <p:cNvSpPr/>
+          <p:nvPr/>
+        </p:nvSpPr>
+        <p:spPr>
+          <a:xfrm>
+            <a:off x="502920" y="6053328"/>
+            <a:ext cx="50292" cy="566928"/>
+          </a:xfrm>
+          <a:prstGeom prst="rect">
+            <a:avLst/>
+          </a:prstGeom>
+          <a:solidFill>
+            <a:srgbClr val="008CC8"/>
+          </a:solidFill>
+          <a:ln>
+            <a:noFill/>
+          </a:ln>
+          <a:effectLst/>
+        </p:spPr>
+        <p:style>
+          <a:lnRef idx="1">
+            <a:schemeClr val="accent1"/>
+          </a:lnRef>
+          <a:fillRef idx="3">
+            <a:schemeClr val="accent1"/>
+          </a:fillRef>
+          <a:effectRef idx="2">
+            <a:schemeClr val="accent1"/>
+          </a:effectRef>
+          <a:fontRef idx="minor">
+            <a:schemeClr val="lt1"/>
+          </a:fontRef>
+        </p:style>
+        <p:txBody>
+          <a:bodyPr rtlCol="0" anchor="ctr"/>
+          <a:lstStyle/>
+          <a:p>
+            <a:pPr algn="ctr"/>
+          </a:p>
+        </p:txBody>
+      </p:sp>
+      <p:sp>
+        <p:nvSpPr>
+          <p:cNvPr id="72" name="TextBox 71"/>
+          <p:cNvSpPr txBox="1"/>
+          <p:nvPr/>
+        </p:nvSpPr>
+        <p:spPr>
+          <a:xfrm>
+            <a:off x="685800" y="6126480"/>
+            <a:ext cx="10835640" cy="420624"/>
+          </a:xfrm>
+          <a:prstGeom prst="rect">
+            <a:avLst/>
+          </a:prstGeom>
+          <a:noFill/>
+        </p:spPr>
+        <p:txBody>
+          <a:bodyPr wrap="square" anchor="t" lIns="0" rIns="0" tIns="0" bIns="0">
+            <a:spAutoFit/>
+          </a:bodyPr>
+          <a:lstStyle/>
+          <a:p>
+            <a:pPr algn="l">
+              <a:lnSpc>
+                <a:spcPct val="112000"/>
+              </a:lnSpc>
+              <a:spcAft>
+                <a:spcPts val="0"/>
+              </a:spcAft>
+            </a:pPr>
+            <a:r>
+              <a:rPr sz="840" b="0">
+                <a:solidFill>
+                  <a:srgbClr val="555F6B"/>
+                </a:solidFill>
+                <a:latin typeface="Microsoft YaHei"/>
+              </a:rPr>
+              <a:t>复现：源码、构建脚本与黄金模型都在仓库，按 README 四步重建。   验证：8 档预设逐位 0 差异，双时间戳实测 16 / 21 拍。   边界：HDMI 固定 640×480@60，延迟指 PL 内部流水线。</a:t>
+            </a:r>
+          </a:p>
+        </p:txBody>
+      </p:sp>
+    </p:spTree>
+  </p:cSld>
+  <p:clrMapOvr>
+    <a:masterClrMapping/>
+  </p:clrMapOvr>
+</p:sld>
+</file>
+
+<file path=ppt/slides/slide2.xml><?xml version="1.0" encoding="utf-8"?>
+<p:sld xmlns:a="http://schemas.openxmlformats.org/drawingml/2006/main" xmlns:p="http://schemas.openxmlformats.org/presentationml/2006/main" xmlns:r="http://schemas.openxmlformats.org/officeDocument/2006/relationships">
+  <p:cSld>
+    <p:spTree>
+      <p:nvGrpSpPr>
+        <p:cNvPr id="1" name=""/>
+        <p:cNvGrpSpPr/>
+        <p:nvPr/>
+      </p:nvGrpSpPr>
+      <p:grpSpPr/>
+      <p:sp>
+        <p:nvSpPr>
+          <p:cNvPr id="2" name="Rectangle 1"/>
+          <p:cNvSpPr/>
+          <p:nvPr/>
+        </p:nvSpPr>
+        <p:spPr>
+          <a:xfrm>
+            <a:off x="0" y="0"/>
+            <a:ext cx="12191695" cy="6858000"/>
+          </a:xfrm>
+          <a:prstGeom prst="rect">
+            <a:avLst/>
+          </a:prstGeom>
+          <a:solidFill>
+            <a:srgbClr val="FFFFFF"/>
+          </a:solidFill>
+          <a:ln>
+            <a:noFill/>
+          </a:ln>
+          <a:effectLst/>
+        </p:spPr>
+        <p:style>
+          <a:lnRef idx="1">
+            <a:schemeClr val="accent1"/>
+          </a:lnRef>
+          <a:fillRef idx="3">
+            <a:schemeClr val="accent1"/>
+          </a:fillRef>
+          <a:effectRef idx="2">
+            <a:schemeClr val="accent1"/>
+          </a:effectRef>
+          <a:fontRef idx="minor">
+            <a:schemeClr val="lt1"/>
+          </a:fontRef>
+        </p:style>
+        <p:txBody>
+          <a:bodyPr rtlCol="0" anchor="ctr"/>
+          <a:lstStyle/>
+          <a:p>
+            <a:pPr algn="ctr"/>
+          </a:p>
+        </p:txBody>
+      </p:sp>
+      <p:sp>
+        <p:nvSpPr>
+          <p:cNvPr id="3" name="Rectangle 2"/>
+          <p:cNvSpPr/>
+          <p:nvPr/>
+        </p:nvSpPr>
+        <p:spPr>
+          <a:xfrm>
+            <a:off x="0" y="0"/>
+            <a:ext cx="12191695" cy="1115568"/>
+          </a:xfrm>
+          <a:prstGeom prst="rect">
+            <a:avLst/>
+          </a:prstGeom>
+          <a:solidFill>
+            <a:srgbClr val="0E2A47"/>
+          </a:solidFill>
+          <a:ln>
+            <a:noFill/>
+          </a:ln>
+          <a:effectLst/>
+        </p:spPr>
+        <p:style>
+          <a:lnRef idx="1">
+            <a:schemeClr val="accent1"/>
+          </a:lnRef>
+          <a:fillRef idx="3">
+            <a:schemeClr val="accent1"/>
+          </a:fillRef>
+          <a:effectRef idx="2">
+            <a:schemeClr val="accent1"/>
+          </a:effectRef>
+          <a:fontRef idx="minor">
+            <a:schemeClr val="lt1"/>
+          </a:fontRef>
+        </p:style>
+        <p:txBody>
+          <a:bodyPr rtlCol="0" anchor="ctr"/>
+          <a:lstStyle/>
+          <a:p>
+            <a:pPr algn="ctr"/>
+          </a:p>
+        </p:txBody>
+      </p:sp>
+      <p:sp>
+        <p:nvSpPr>
+          <p:cNvPr id="4" name="TextBox 3"/>
+          <p:cNvSpPr txBox="1"/>
+          <p:nvPr/>
+        </p:nvSpPr>
+        <p:spPr>
+          <a:xfrm>
+            <a:off x="502920" y="164592"/>
+            <a:ext cx="9052560" cy="548640"/>
+          </a:xfrm>
+          <a:prstGeom prst="rect">
+            <a:avLst/>
+          </a:prstGeom>
+          <a:noFill/>
+        </p:spPr>
+        <p:txBody>
+          <a:bodyPr wrap="square" anchor="t" lIns="0" rIns="0" tIns="0" bIns="0">
+            <a:spAutoFit/>
+          </a:bodyPr>
+          <a:lstStyle/>
+          <a:p>
+            <a:pPr algn="l">
+              <a:lnSpc>
+                <a:spcPct val="100000"/>
+              </a:lnSpc>
+              <a:spcAft>
+                <a:spcPts val="0"/>
+              </a:spcAft>
+            </a:pPr>
+            <a:r>
+              <a:rPr sz="2500" b="1">
+                <a:solidFill>
+                  <a:srgbClr val="FFFFFF"/>
+                </a:solidFill>
+                <a:latin typeface="Microsoft YaHei"/>
+              </a:rPr>
+              <a:t>Low-Latency Vision Enhancement Terminal</a:t>
+            </a:r>
+          </a:p>
+        </p:txBody>
+      </p:sp>
+      <p:sp>
+        <p:nvSpPr>
+          <p:cNvPr id="5" name="TextBox 4"/>
+          <p:cNvSpPr txBox="1"/>
+          <p:nvPr/>
+        </p:nvSpPr>
+        <p:spPr>
+          <a:xfrm>
+            <a:off x="521207" y="731520"/>
+            <a:ext cx="8778240" cy="274320"/>
+          </a:xfrm>
+          <a:prstGeom prst="rect">
+            <a:avLst/>
+          </a:prstGeom>
+          <a:noFill/>
+        </p:spPr>
+        <p:txBody>
+          <a:bodyPr wrap="square" anchor="t" lIns="0" rIns="0" tIns="0" bIns="0">
+            <a:spAutoFit/>
+          </a:bodyPr>
+          <a:lstStyle/>
+          <a:p>
+            <a:pPr algn="l">
+              <a:lnSpc>
+                <a:spcPct val="100000"/>
+              </a:lnSpc>
+              <a:spcAft>
+                <a:spcPts val="0"/>
+              </a:spcAft>
+            </a:pPr>
+            <a:r>
+              <a:rPr sz="1250" b="0">
+                <a:solidFill>
+                  <a:srgbClr val="C8D6E2"/>
+                </a:solidFill>
+                <a:latin typeface="Microsoft YaHei"/>
+              </a:rPr>
+              <a:t>Pixel-stream enhancement on FPGA for low-light image observation</a:t>
+            </a:r>
+          </a:p>
+        </p:txBody>
+      </p:sp>
+      <p:sp>
+        <p:nvSpPr>
+          <p:cNvPr id="6" name="TextBox 5"/>
+          <p:cNvSpPr txBox="1"/>
+          <p:nvPr/>
+        </p:nvSpPr>
+        <p:spPr>
+          <a:xfrm>
+            <a:off x="9052560" y="237744"/>
+            <a:ext cx="2743200" cy="256032"/>
+          </a:xfrm>
+          <a:prstGeom prst="rect">
+            <a:avLst/>
+          </a:prstGeom>
+          <a:noFill/>
+        </p:spPr>
+        <p:txBody>
+          <a:bodyPr wrap="square" anchor="t" lIns="0" rIns="0" tIns="0" bIns="0">
+            <a:spAutoFit/>
+          </a:bodyPr>
+          <a:lstStyle/>
+          <a:p>
+            <a:pPr algn="r">
+              <a:lnSpc>
+                <a:spcPct val="100000"/>
+              </a:lnSpc>
+              <a:spcAft>
+                <a:spcPts val="0"/>
+              </a:spcAft>
+            </a:pPr>
+            <a:r>
+              <a:rPr sz="1100" b="0">
+                <a:solidFill>
+                  <a:srgbClr val="C8D6E2"/>
+                </a:solidFill>
+                <a:latin typeface="Segoe UI"/>
+              </a:rPr>
+              <a:t>English</a:t>
+            </a:r>
+          </a:p>
+        </p:txBody>
+      </p:sp>
+      <p:sp>
+        <p:nvSpPr>
+          <p:cNvPr id="7" name="TextBox 6"/>
+          <p:cNvSpPr txBox="1"/>
+          <p:nvPr/>
+        </p:nvSpPr>
+        <p:spPr>
+          <a:xfrm>
+            <a:off x="9052560" y="530352"/>
+            <a:ext cx="2743200" cy="256032"/>
+          </a:xfrm>
+          <a:prstGeom prst="rect">
+            <a:avLst/>
+          </a:prstGeom>
+          <a:noFill/>
+        </p:spPr>
+        <p:txBody>
+          <a:bodyPr wrap="square" anchor="t" lIns="0" rIns="0" tIns="0" bIns="0">
+            <a:spAutoFit/>
+          </a:bodyPr>
+          <a:lstStyle/>
+          <a:p>
+            <a:pPr algn="r">
+              <a:lnSpc>
+                <a:spcPct val="100000"/>
+              </a:lnSpc>
+              <a:spcAft>
+                <a:spcPts val="0"/>
+              </a:spcAft>
+            </a:pPr>
+            <a:r>
+              <a:rPr sz="1000" b="0">
+                <a:solidFill>
+                  <a:srgbClr val="8FA6BC"/>
+                </a:solidFill>
+                <a:latin typeface="Segoe UI"/>
+              </a:rPr>
+              <a:t>PYNQ-Z2 · XC7Z020 · Vitis HLS 2026.1</a:t>
+            </a:r>
+          </a:p>
+        </p:txBody>
+      </p:sp>
+      <p:sp>
+        <p:nvSpPr>
+          <p:cNvPr id="8" name="TextBox 7"/>
+          <p:cNvSpPr txBox="1"/>
+          <p:nvPr/>
+        </p:nvSpPr>
+        <p:spPr>
+          <a:xfrm>
+            <a:off x="502920" y="1325880"/>
+            <a:ext cx="3474720" cy="256032"/>
+          </a:xfrm>
+          <a:prstGeom prst="rect">
+            <a:avLst/>
+          </a:prstGeom>
+          <a:noFill/>
+        </p:spPr>
+        <p:txBody>
+          <a:bodyPr wrap="square" anchor="t" lIns="0" rIns="0" tIns="0" bIns="0">
+            <a:spAutoFit/>
+          </a:bodyPr>
+          <a:lstStyle/>
+          <a:p>
+            <a:pPr algn="l">
+              <a:lnSpc>
+                <a:spcPct val="100000"/>
+              </a:lnSpc>
+              <a:spcAft>
+                <a:spcPts val="0"/>
+              </a:spcAft>
+            </a:pPr>
+            <a:r>
+              <a:rPr sz="1400" b="1">
+                <a:solidFill>
+                  <a:srgbClr val="008CC8"/>
+                </a:solidFill>
+                <a:latin typeface="Segoe UI"/>
+              </a:rPr>
+              <a:t>1  Background &amp; Goal</a:t>
+            </a:r>
+          </a:p>
+        </p:txBody>
+      </p:sp>
+      <p:sp>
+        <p:nvSpPr>
+          <p:cNvPr id="9" name="Rectangle 8"/>
+          <p:cNvSpPr/>
+          <p:nvPr/>
+        </p:nvSpPr>
+        <p:spPr>
+          <a:xfrm>
+            <a:off x="502920" y="1609344"/>
+            <a:ext cx="3474720" cy="13716"/>
+          </a:xfrm>
+          <a:prstGeom prst="rect">
+            <a:avLst/>
+          </a:prstGeom>
+          <a:solidFill>
+            <a:srgbClr val="D8E0E8"/>
+          </a:solidFill>
+          <a:ln>
+            <a:noFill/>
+          </a:ln>
+          <a:effectLst/>
+        </p:spPr>
+        <p:style>
+          <a:lnRef idx="1">
+            <a:schemeClr val="accent1"/>
+          </a:lnRef>
+          <a:fillRef idx="3">
+            <a:schemeClr val="accent1"/>
+          </a:fillRef>
+          <a:effectRef idx="2">
+            <a:schemeClr val="accent1"/>
+          </a:effectRef>
+          <a:fontRef idx="minor">
+            <a:schemeClr val="lt1"/>
+          </a:fontRef>
+        </p:style>
+        <p:txBody>
+          <a:bodyPr rtlCol="0" anchor="ctr"/>
+          <a:lstStyle/>
+          <a:p>
+            <a:pPr algn="ctr"/>
+          </a:p>
+        </p:txBody>
+      </p:sp>
+      <p:sp>
+        <p:nvSpPr>
+          <p:cNvPr id="10" name="TextBox 9"/>
+          <p:cNvSpPr txBox="1"/>
+          <p:nvPr/>
+        </p:nvSpPr>
+        <p:spPr>
+          <a:xfrm>
+            <a:off x="502920" y="1755648"/>
+            <a:ext cx="3474720" cy="201168"/>
+          </a:xfrm>
+          <a:prstGeom prst="rect">
+            <a:avLst/>
+          </a:prstGeom>
+          <a:noFill/>
+        </p:spPr>
+        <p:txBody>
+          <a:bodyPr wrap="square" anchor="t" lIns="0" rIns="0" tIns="0" bIns="0">
+            <a:spAutoFit/>
+          </a:bodyPr>
+          <a:lstStyle/>
+          <a:p>
+            <a:pPr algn="l">
+              <a:lnSpc>
+                <a:spcPct val="100000"/>
+              </a:lnSpc>
+              <a:spcAft>
+                <a:spcPts val="0"/>
+              </a:spcAft>
+            </a:pPr>
+            <a:r>
+              <a:rPr sz="1000" b="1">
+                <a:solidFill>
+                  <a:srgbClr val="1A1A1A"/>
+                </a:solidFill>
+                <a:latin typeface="Segoe UI"/>
+              </a:rPr>
+              <a:t>Problem</a:t>
+            </a:r>
+          </a:p>
+        </p:txBody>
+      </p:sp>
+      <p:sp>
+        <p:nvSpPr>
+          <p:cNvPr id="11" name="TextBox 10"/>
+          <p:cNvSpPr txBox="1"/>
+          <p:nvPr/>
+        </p:nvSpPr>
+        <p:spPr>
+          <a:xfrm>
+            <a:off x="502920" y="2002536"/>
+            <a:ext cx="3474720" cy="438912"/>
+          </a:xfrm>
+          <a:prstGeom prst="rect">
+            <a:avLst/>
+          </a:prstGeom>
+          <a:noFill/>
+        </p:spPr>
+        <p:txBody>
+          <a:bodyPr wrap="square" anchor="t" lIns="0" rIns="0" tIns="0" bIns="0">
+            <a:spAutoFit/>
+          </a:bodyPr>
+          <a:lstStyle/>
+          <a:p>
+            <a:pPr algn="l">
+              <a:lnSpc>
+                <a:spcPct val="112000"/>
+              </a:lnSpc>
+              <a:spcAft>
+                <a:spcPts val="0"/>
+              </a:spcAft>
+            </a:pPr>
+            <a:r>
+              <a:rPr sz="940" b="0">
+                <a:solidFill>
+                  <a:srgbClr val="555F6B"/>
+                </a:solidFill>
+                <a:latin typeface="Segoe UI"/>
+              </a:rPr>
+              <a:t>Low-light images are noisy and flat; software enhancement takes 3.1 s per frame.</a:t>
+            </a:r>
+          </a:p>
+        </p:txBody>
+      </p:sp>
+      <p:sp>
+        <p:nvSpPr>
+          <p:cNvPr id="12" name="TextBox 11"/>
+          <p:cNvSpPr txBox="1"/>
+          <p:nvPr/>
+        </p:nvSpPr>
+        <p:spPr>
+          <a:xfrm>
+            <a:off x="502920" y="2688336"/>
+            <a:ext cx="3474720" cy="201168"/>
+          </a:xfrm>
+          <a:prstGeom prst="rect">
+            <a:avLst/>
+          </a:prstGeom>
+          <a:noFill/>
+        </p:spPr>
+        <p:txBody>
+          <a:bodyPr wrap="square" anchor="t" lIns="0" rIns="0" tIns="0" bIns="0">
+            <a:spAutoFit/>
+          </a:bodyPr>
+          <a:lstStyle/>
+          <a:p>
+            <a:pPr algn="l">
+              <a:lnSpc>
+                <a:spcPct val="100000"/>
+              </a:lnSpc>
+              <a:spcAft>
+                <a:spcPts val="0"/>
+              </a:spcAft>
+            </a:pPr>
+            <a:r>
+              <a:rPr sz="1000" b="1">
+                <a:solidFill>
+                  <a:srgbClr val="1A1A1A"/>
+                </a:solidFill>
+                <a:latin typeface="Segoe UI"/>
+              </a:rPr>
+              <a:t>Approach</a:t>
+            </a:r>
+          </a:p>
+        </p:txBody>
+      </p:sp>
+      <p:sp>
+        <p:nvSpPr>
+          <p:cNvPr id="13" name="TextBox 12"/>
+          <p:cNvSpPr txBox="1"/>
+          <p:nvPr/>
+        </p:nvSpPr>
+        <p:spPr>
+          <a:xfrm>
+            <a:off x="502920" y="2935224"/>
+            <a:ext cx="3474720" cy="438912"/>
+          </a:xfrm>
+          <a:prstGeom prst="rect">
+            <a:avLst/>
+          </a:prstGeom>
+          <a:noFill/>
+        </p:spPr>
+        <p:txBody>
+          <a:bodyPr wrap="square" anchor="t" lIns="0" rIns="0" tIns="0" bIns="0">
+            <a:spAutoFit/>
+          </a:bodyPr>
+          <a:lstStyle/>
+          <a:p>
+            <a:pPr algn="l">
+              <a:lnSpc>
+                <a:spcPct val="112000"/>
+              </a:lnSpc>
+              <a:spcAft>
+                <a:spcPts val="0"/>
+              </a:spcAft>
+            </a:pPr>
+            <a:r>
+              <a:rPr sz="940" b="0">
+                <a:solidFill>
+                  <a:srgbClr val="555F6B"/>
+                </a:solidFill>
+                <a:latin typeface="Segoe UI"/>
+              </a:rPr>
+              <a:t>The chain runs inside the PL pixel path: pixels in, pixels out, latency in clocks, not frames.</a:t>
+            </a:r>
+          </a:p>
+        </p:txBody>
+      </p:sp>
+      <p:sp>
+        <p:nvSpPr>
+          <p:cNvPr id="14" name="TextBox 13"/>
+          <p:cNvSpPr txBox="1"/>
+          <p:nvPr/>
+        </p:nvSpPr>
+        <p:spPr>
+          <a:xfrm>
+            <a:off x="502920" y="3621024"/>
+            <a:ext cx="3474720" cy="201168"/>
+          </a:xfrm>
+          <a:prstGeom prst="rect">
+            <a:avLst/>
+          </a:prstGeom>
+          <a:noFill/>
+        </p:spPr>
+        <p:txBody>
+          <a:bodyPr wrap="square" anchor="t" lIns="0" rIns="0" tIns="0" bIns="0">
+            <a:spAutoFit/>
+          </a:bodyPr>
+          <a:lstStyle/>
+          <a:p>
+            <a:pPr algn="l">
+              <a:lnSpc>
+                <a:spcPct val="100000"/>
+              </a:lnSpc>
+              <a:spcAft>
+                <a:spcPts val="0"/>
+              </a:spcAft>
+            </a:pPr>
+            <a:r>
+              <a:rPr sz="1000" b="1">
+                <a:solidFill>
+                  <a:srgbClr val="1A1A1A"/>
+                </a:solidFill>
+                <a:latin typeface="Segoe UI"/>
+              </a:rPr>
+              <a:t>Goal</a:t>
+            </a:r>
+          </a:p>
+        </p:txBody>
+      </p:sp>
+      <p:sp>
+        <p:nvSpPr>
+          <p:cNvPr id="15" name="TextBox 14"/>
+          <p:cNvSpPr txBox="1"/>
+          <p:nvPr/>
+        </p:nvSpPr>
+        <p:spPr>
+          <a:xfrm>
+            <a:off x="502920" y="3867912"/>
+            <a:ext cx="3474720" cy="438912"/>
+          </a:xfrm>
+          <a:prstGeom prst="rect">
+            <a:avLst/>
+          </a:prstGeom>
+          <a:noFill/>
+        </p:spPr>
+        <p:txBody>
+          <a:bodyPr wrap="square" anchor="t" lIns="0" rIns="0" tIns="0" bIns="0">
+            <a:spAutoFit/>
+          </a:bodyPr>
+          <a:lstStyle/>
+          <a:p>
+            <a:pPr algn="l">
+              <a:lnSpc>
+                <a:spcPct val="112000"/>
+              </a:lnSpc>
+              <a:spcAft>
+                <a:spcPts val="0"/>
+              </a:spcAft>
+            </a:pPr>
+            <a:r>
+              <a:rPr sz="940" b="0">
+                <a:solidFill>
+                  <a:srgbClr val="555F6B"/>
+                </a:solidFill>
+                <a:latin typeface="Segoe UI"/>
+              </a:rPr>
+              <a:t>Adjustable quality, reproducible results and live preset switching, no extra frame buffer.</a:t>
+            </a:r>
+          </a:p>
+        </p:txBody>
+      </p:sp>
+      <p:sp>
+        <p:nvSpPr>
+          <p:cNvPr id="16" name="TextBox 15"/>
+          <p:cNvSpPr txBox="1"/>
+          <p:nvPr/>
+        </p:nvSpPr>
+        <p:spPr>
+          <a:xfrm>
+            <a:off x="502920" y="4553712"/>
+            <a:ext cx="3474720" cy="201168"/>
+          </a:xfrm>
+          <a:prstGeom prst="rect">
+            <a:avLst/>
+          </a:prstGeom>
+          <a:noFill/>
+        </p:spPr>
+        <p:txBody>
+          <a:bodyPr wrap="square" anchor="t" lIns="0" rIns="0" tIns="0" bIns="0">
+            <a:spAutoFit/>
+          </a:bodyPr>
+          <a:lstStyle/>
+          <a:p>
+            <a:pPr algn="l">
+              <a:lnSpc>
+                <a:spcPct val="100000"/>
+              </a:lnSpc>
+              <a:spcAft>
+                <a:spcPts val="0"/>
+              </a:spcAft>
+            </a:pPr>
+            <a:r>
+              <a:rPr sz="1000" b="1">
+                <a:solidFill>
+                  <a:srgbClr val="1A1A1A"/>
+                </a:solidFill>
+                <a:latin typeface="Segoe UI"/>
+              </a:rPr>
+              <a:t>Method</a:t>
+            </a:r>
+          </a:p>
+        </p:txBody>
+      </p:sp>
+      <p:sp>
+        <p:nvSpPr>
+          <p:cNvPr id="17" name="TextBox 16"/>
+          <p:cNvSpPr txBox="1"/>
+          <p:nvPr/>
+        </p:nvSpPr>
+        <p:spPr>
+          <a:xfrm>
+            <a:off x="502920" y="4800600"/>
+            <a:ext cx="3474720" cy="438912"/>
+          </a:xfrm>
+          <a:prstGeom prst="rect">
+            <a:avLst/>
+          </a:prstGeom>
+          <a:noFill/>
+        </p:spPr>
+        <p:txBody>
+          <a:bodyPr wrap="square" anchor="t" lIns="0" rIns="0" tIns="0" bIns="0">
+            <a:spAutoFit/>
+          </a:bodyPr>
+          <a:lstStyle/>
+          <a:p>
+            <a:pPr algn="l">
+              <a:lnSpc>
+                <a:spcPct val="112000"/>
+              </a:lnSpc>
+              <a:spcAft>
+                <a:spcPts val="0"/>
+              </a:spcAft>
+            </a:pPr>
+            <a:r>
+              <a:rPr sz="940" b="0">
+                <a:solidFill>
+                  <a:srgbClr val="555F6B"/>
+                </a:solidFill>
+                <a:latin typeface="Segoe UI"/>
+              </a:rPr>
+              <a:t>Correctness by bit-exact compare, latency by dual timestamps, switching by one register write.</a:t>
+            </a:r>
+          </a:p>
+        </p:txBody>
+      </p:sp>
+      <p:sp>
+        <p:nvSpPr>
+          <p:cNvPr id="18" name="TextBox 17"/>
+          <p:cNvSpPr txBox="1"/>
+          <p:nvPr/>
+        </p:nvSpPr>
+        <p:spPr>
+          <a:xfrm>
+            <a:off x="4251960" y="1325880"/>
+            <a:ext cx="3794760" cy="256032"/>
+          </a:xfrm>
+          <a:prstGeom prst="rect">
+            <a:avLst/>
+          </a:prstGeom>
+          <a:noFill/>
+        </p:spPr>
+        <p:txBody>
+          <a:bodyPr wrap="square" anchor="t" lIns="0" rIns="0" tIns="0" bIns="0">
+            <a:spAutoFit/>
+          </a:bodyPr>
+          <a:lstStyle/>
+          <a:p>
+            <a:pPr algn="l">
+              <a:lnSpc>
+                <a:spcPct val="100000"/>
+              </a:lnSpc>
+              <a:spcAft>
+                <a:spcPts val="0"/>
+              </a:spcAft>
+            </a:pPr>
+            <a:r>
+              <a:rPr sz="1400" b="1">
+                <a:solidFill>
+                  <a:srgbClr val="008CC8"/>
+                </a:solidFill>
+                <a:latin typeface="Segoe UI"/>
+              </a:rPr>
+              <a:t>2  System Architecture</a:t>
+            </a:r>
+          </a:p>
+        </p:txBody>
+      </p:sp>
+      <p:sp>
+        <p:nvSpPr>
+          <p:cNvPr id="19" name="Rectangle 18"/>
+          <p:cNvSpPr/>
+          <p:nvPr/>
+        </p:nvSpPr>
+        <p:spPr>
+          <a:xfrm>
+            <a:off x="4251960" y="1609344"/>
+            <a:ext cx="3794760" cy="13716"/>
+          </a:xfrm>
+          <a:prstGeom prst="rect">
+            <a:avLst/>
+          </a:prstGeom>
+          <a:solidFill>
+            <a:srgbClr val="D8E0E8"/>
+          </a:solidFill>
+          <a:ln>
+            <a:noFill/>
+          </a:ln>
+          <a:effectLst/>
+        </p:spPr>
+        <p:style>
+          <a:lnRef idx="1">
+            <a:schemeClr val="accent1"/>
+          </a:lnRef>
+          <a:fillRef idx="3">
+            <a:schemeClr val="accent1"/>
+          </a:fillRef>
+          <a:effectRef idx="2">
+            <a:schemeClr val="accent1"/>
+          </a:effectRef>
+          <a:fontRef idx="minor">
+            <a:schemeClr val="lt1"/>
+          </a:fontRef>
+        </p:style>
+        <p:txBody>
+          <a:bodyPr rtlCol="0" anchor="ctr"/>
+          <a:lstStyle/>
+          <a:p>
+            <a:pPr algn="ctr"/>
+          </a:p>
+        </p:txBody>
+      </p:sp>
+      <p:sp>
+        <p:nvSpPr>
+          <p:cNvPr id="20" name="Rounded Rectangle 19"/>
+          <p:cNvSpPr/>
+          <p:nvPr/>
+        </p:nvSpPr>
+        <p:spPr>
+          <a:xfrm>
+            <a:off x="4251960" y="1755648"/>
+            <a:ext cx="1051560" cy="420624"/>
+          </a:xfrm>
+          <a:prstGeom prst="roundRect">
+            <a:avLst/>
+          </a:prstGeom>
+          <a:solidFill>
+            <a:srgbClr val="0E2A47"/>
+          </a:solidFill>
+          <a:ln>
+            <a:noFill/>
+          </a:ln>
+          <a:effectLst/>
+        </p:spPr>
+        <p:style>
+          <a:lnRef idx="1">
+            <a:schemeClr val="accent1"/>
+          </a:lnRef>
+          <a:fillRef idx="3">
+            <a:schemeClr val="accent1"/>
+          </a:fillRef>
+          <a:effectRef idx="2">
+            <a:schemeClr val="accent1"/>
+          </a:effectRef>
+          <a:fontRef idx="minor">
+            <a:schemeClr val="lt1"/>
+          </a:fontRef>
+        </p:style>
+        <p:txBody>
+          <a:bodyPr rtlCol="0" anchor="ctr" wrap="square" lIns="27432" rIns="27432"/>
+          <a:lstStyle/>
+          <a:p>
+            <a:pPr algn="ctr"/>
+            <a:r>
+              <a:rPr sz="850" b="1">
+                <a:solidFill>
+                  <a:srgbClr val="FFFFFF"/>
+                </a:solidFill>
+                <a:latin typeface="Segoe UI"/>
+              </a:rPr>
+              <a:t>Host browser</a:t>
+            </a:r>
+          </a:p>
+        </p:txBody>
+      </p:sp>
+      <p:sp>
+        <p:nvSpPr>
+          <p:cNvPr id="21" name="TextBox 20"/>
+          <p:cNvSpPr txBox="1"/>
+          <p:nvPr/>
+        </p:nvSpPr>
+        <p:spPr>
+          <a:xfrm>
+            <a:off x="4251960" y="2194560"/>
+            <a:ext cx="1051560" cy="146304"/>
+          </a:xfrm>
+          <a:prstGeom prst="rect">
+            <a:avLst/>
+          </a:prstGeom>
+          <a:noFill/>
+        </p:spPr>
+        <p:txBody>
+          <a:bodyPr wrap="square" anchor="t" lIns="0" rIns="0" tIns="0" bIns="0">
+            <a:spAutoFit/>
           </a:bodyPr>
           <a:lstStyle/>
           <a:p>
@@ -4390,29 +6979,120 @@
               <a:lnSpc>
                 <a:spcPct val="100000"/>
               </a:lnSpc>
+              <a:spcAft>
+                <a:spcPts val="0"/>
+              </a:spcAft>
             </a:pPr>
             <a:r>
-              <a:rPr sz="800" b="0">
-                <a:solidFill>
-                  <a:srgbClr val="777777"/>
-                </a:solidFill>
-                <a:latin typeface="Arial"/>
-              </a:rPr>
-              <a:t>Captures (right: split)</a:t>
-            </a:r>
-          </a:p>
-        </p:txBody>
-      </p:sp>
-      <p:sp>
-        <p:nvSpPr>
-          <p:cNvPr id="28" name="TextBox 27"/>
+              <a:rPr sz="720" b="0">
+                <a:solidFill>
+                  <a:srgbClr val="555F6B"/>
+                </a:solidFill>
+                <a:latin typeface="Segoe UI"/>
+              </a:rPr>
+              <a:t>PC</a:t>
+            </a:r>
+          </a:p>
+        </p:txBody>
+      </p:sp>
+      <p:cxnSp>
+        <p:nvCxnSpPr>
+          <p:cNvPr id="22" name="Connector 21"/>
+          <p:cNvCxnSpPr/>
+          <p:nvPr/>
+        </p:nvCxnSpPr>
+        <p:spPr>
+          <a:xfrm>
+            <a:off x="5321808" y="1965960"/>
+            <a:ext cx="173736" cy="0"/>
+          </a:xfrm>
+          <a:prstGeom prst="line">
+            <a:avLst/>
+          </a:prstGeom>
+          <a:ln w="17780">
+            <a:solidFill>
+              <a:srgbClr val="008CC8"/>
+            </a:solidFill>
+          </a:ln>
+        </p:spPr>
+        <p:style>
+          <a:lnRef idx="2">
+            <a:schemeClr val="accent1"/>
+          </a:lnRef>
+          <a:fillRef idx="0">
+            <a:schemeClr val="accent1"/>
+          </a:fillRef>
+          <a:effectRef idx="1">
+            <a:schemeClr val="accent1"/>
+          </a:effectRef>
+          <a:fontRef idx="minor">
+            <a:schemeClr val="tx1"/>
+          </a:fontRef>
+        </p:style>
+      </p:cxnSp>
+      <p:sp>
+        <p:nvSpPr>
+          <p:cNvPr id="23" name="Rounded Rectangle 22"/>
+          <p:cNvSpPr/>
+          <p:nvPr/>
+        </p:nvSpPr>
+        <p:spPr>
+          <a:xfrm>
+            <a:off x="5532120" y="1755648"/>
+            <a:ext cx="1051560" cy="420624"/>
+          </a:xfrm>
+          <a:prstGeom prst="roundRect">
+            <a:avLst/>
+          </a:prstGeom>
+          <a:solidFill>
+            <a:srgbClr val="0E2A47"/>
+          </a:solidFill>
+          <a:ln>
+            <a:noFill/>
+          </a:ln>
+          <a:effectLst/>
+        </p:spPr>
+        <p:style>
+          <a:lnRef idx="1">
+            <a:schemeClr val="accent1"/>
+          </a:lnRef>
+          <a:fillRef idx="3">
+            <a:schemeClr val="accent1"/>
+          </a:fillRef>
+          <a:effectRef idx="2">
+            <a:schemeClr val="accent1"/>
+          </a:effectRef>
+          <a:fontRef idx="minor">
+            <a:schemeClr val="lt1"/>
+          </a:fontRef>
+        </p:style>
+        <p:txBody>
+          <a:bodyPr rtlCol="0" anchor="ctr" wrap="square" lIns="27432" rIns="27432"/>
+          <a:lstStyle/>
+          <a:p>
+            <a:pPr algn="ctr"/>
+            <a:r>
+              <a:rPr sz="850" b="1">
+                <a:solidFill>
+                  <a:srgbClr val="FFFFFF"/>
+                </a:solidFill>
+                <a:latin typeface="Segoe UI"/>
+              </a:rPr>
+              <a:t>DDR frame buffer</a:t>
+            </a:r>
+          </a:p>
+        </p:txBody>
+      </p:sp>
+      <p:sp>
+        <p:nvSpPr>
+          <p:cNvPr id="24" name="TextBox 23"/>
           <p:cNvSpPr txBox="1"/>
           <p:nvPr/>
         </p:nvSpPr>
         <p:spPr>
           <a:xfrm>
-            <a:off x="360000" y="10281288"/>
-            <a:ext cx="6840000" cy="307968"/>
+            <a:off x="5532120" y="2194560"/>
+            <a:ext cx="1051560" cy="146304"/>
           </a:xfrm>
           <a:prstGeom prst="rect">
             <a:avLst/>
@@ -4420,8 +7100,612 @@
           <a:noFill/>
         </p:spPr>
         <p:txBody>
-          <a:bodyPr wrap="square">
-            <a:noAutofit/>
+          <a:bodyPr wrap="square" anchor="t" lIns="0" rIns="0" tIns="0" bIns="0">
+            <a:spAutoFit/>
+          </a:bodyPr>
+          <a:lstStyle/>
+          <a:p>
+            <a:pPr algn="ctr">
+              <a:lnSpc>
+                <a:spcPct val="100000"/>
+              </a:lnSpc>
+              <a:spcAft>
+                <a:spcPts val="0"/>
+              </a:spcAft>
+            </a:pPr>
+            <a:r>
+              <a:rPr sz="720" b="0">
+                <a:solidFill>
+                  <a:srgbClr val="555F6B"/>
+                </a:solidFill>
+                <a:latin typeface="Segoe UI"/>
+              </a:rPr>
+              <a:t>PS</a:t>
+            </a:r>
+          </a:p>
+        </p:txBody>
+      </p:sp>
+      <p:cxnSp>
+        <p:nvCxnSpPr>
+          <p:cNvPr id="25" name="Connector 24"/>
+          <p:cNvCxnSpPr/>
+          <p:nvPr/>
+        </p:nvCxnSpPr>
+        <p:spPr>
+          <a:xfrm>
+            <a:off x="6601967" y="1965960"/>
+            <a:ext cx="173736" cy="0"/>
+          </a:xfrm>
+          <a:prstGeom prst="line">
+            <a:avLst/>
+          </a:prstGeom>
+          <a:ln w="17780">
+            <a:solidFill>
+              <a:srgbClr val="008CC8"/>
+            </a:solidFill>
+          </a:ln>
+        </p:spPr>
+        <p:style>
+          <a:lnRef idx="2">
+            <a:schemeClr val="accent1"/>
+          </a:lnRef>
+          <a:fillRef idx="0">
+            <a:schemeClr val="accent1"/>
+          </a:fillRef>
+          <a:effectRef idx="1">
+            <a:schemeClr val="accent1"/>
+          </a:effectRef>
+          <a:fontRef idx="minor">
+            <a:schemeClr val="tx1"/>
+          </a:fontRef>
+        </p:style>
+      </p:cxnSp>
+      <p:sp>
+        <p:nvSpPr>
+          <p:cNvPr id="26" name="Rounded Rectangle 25"/>
+          <p:cNvSpPr/>
+          <p:nvPr/>
+        </p:nvSpPr>
+        <p:spPr>
+          <a:xfrm>
+            <a:off x="6812280" y="1755648"/>
+            <a:ext cx="1051560" cy="420624"/>
+          </a:xfrm>
+          <a:prstGeom prst="roundRect">
+            <a:avLst/>
+          </a:prstGeom>
+          <a:solidFill>
+            <a:srgbClr val="0E2A47"/>
+          </a:solidFill>
+          <a:ln>
+            <a:noFill/>
+          </a:ln>
+          <a:effectLst/>
+        </p:spPr>
+        <p:style>
+          <a:lnRef idx="1">
+            <a:schemeClr val="accent1"/>
+          </a:lnRef>
+          <a:fillRef idx="3">
+            <a:schemeClr val="accent1"/>
+          </a:fillRef>
+          <a:effectRef idx="2">
+            <a:schemeClr val="accent1"/>
+          </a:effectRef>
+          <a:fontRef idx="minor">
+            <a:schemeClr val="lt1"/>
+          </a:fontRef>
+        </p:style>
+        <p:txBody>
+          <a:bodyPr rtlCol="0" anchor="ctr" wrap="square" lIns="27432" rIns="27432"/>
+          <a:lstStyle/>
+          <a:p>
+            <a:pPr algn="ctr"/>
+            <a:r>
+              <a:rPr sz="850" b="1">
+                <a:solidFill>
+                  <a:srgbClr val="FFFFFF"/>
+                </a:solidFill>
+                <a:latin typeface="Segoe UI"/>
+              </a:rPr>
+              <a:t>VDMA</a:t>
+            </a:r>
+          </a:p>
+        </p:txBody>
+      </p:sp>
+      <p:sp>
+        <p:nvSpPr>
+          <p:cNvPr id="27" name="TextBox 26"/>
+          <p:cNvSpPr txBox="1"/>
+          <p:nvPr/>
+        </p:nvSpPr>
+        <p:spPr>
+          <a:xfrm>
+            <a:off x="6812280" y="2194560"/>
+            <a:ext cx="1051560" cy="146304"/>
+          </a:xfrm>
+          <a:prstGeom prst="rect">
+            <a:avLst/>
+          </a:prstGeom>
+          <a:noFill/>
+        </p:spPr>
+        <p:txBody>
+          <a:bodyPr wrap="square" anchor="t" lIns="0" rIns="0" tIns="0" bIns="0">
+            <a:spAutoFit/>
+          </a:bodyPr>
+          <a:lstStyle/>
+          <a:p>
+            <a:pPr algn="ctr">
+              <a:lnSpc>
+                <a:spcPct val="100000"/>
+              </a:lnSpc>
+              <a:spcAft>
+                <a:spcPts val="0"/>
+              </a:spcAft>
+            </a:pPr>
+            <a:r>
+              <a:rPr sz="720" b="0">
+                <a:solidFill>
+                  <a:srgbClr val="555F6B"/>
+                </a:solidFill>
+                <a:latin typeface="Segoe UI"/>
+              </a:rPr>
+              <a:t>AXI</a:t>
+            </a:r>
+          </a:p>
+        </p:txBody>
+      </p:sp>
+      <p:sp>
+        <p:nvSpPr>
+          <p:cNvPr id="28" name="Rounded Rectangle 27"/>
+          <p:cNvSpPr/>
+          <p:nvPr/>
+        </p:nvSpPr>
+        <p:spPr>
+          <a:xfrm>
+            <a:off x="4251960" y="2615184"/>
+            <a:ext cx="1051560" cy="420624"/>
+          </a:xfrm>
+          <a:prstGeom prst="roundRect">
+            <a:avLst/>
+          </a:prstGeom>
+          <a:solidFill>
+            <a:srgbClr val="0E2A47"/>
+          </a:solidFill>
+          <a:ln>
+            <a:noFill/>
+          </a:ln>
+          <a:effectLst/>
+        </p:spPr>
+        <p:style>
+          <a:lnRef idx="1">
+            <a:schemeClr val="accent1"/>
+          </a:lnRef>
+          <a:fillRef idx="3">
+            <a:schemeClr val="accent1"/>
+          </a:fillRef>
+          <a:effectRef idx="2">
+            <a:schemeClr val="accent1"/>
+          </a:effectRef>
+          <a:fontRef idx="minor">
+            <a:schemeClr val="lt1"/>
+          </a:fontRef>
+        </p:style>
+        <p:txBody>
+          <a:bodyPr rtlCol="0" anchor="ctr" wrap="square" lIns="27432" rIns="27432"/>
+          <a:lstStyle/>
+          <a:p>
+            <a:pPr algn="ctr"/>
+            <a:r>
+              <a:rPr sz="850" b="1">
+                <a:solidFill>
+                  <a:srgbClr val="FFFFFF"/>
+                </a:solidFill>
+                <a:latin typeface="Segoe UI"/>
+              </a:rPr>
+              <a:t>Capture / OBS</a:t>
+            </a:r>
+          </a:p>
+        </p:txBody>
+      </p:sp>
+      <p:sp>
+        <p:nvSpPr>
+          <p:cNvPr id="29" name="TextBox 28"/>
+          <p:cNvSpPr txBox="1"/>
+          <p:nvPr/>
+        </p:nvSpPr>
+        <p:spPr>
+          <a:xfrm>
+            <a:off x="4251960" y="3054096"/>
+            <a:ext cx="1051560" cy="146304"/>
+          </a:xfrm>
+          <a:prstGeom prst="rect">
+            <a:avLst/>
+          </a:prstGeom>
+          <a:noFill/>
+        </p:spPr>
+        <p:txBody>
+          <a:bodyPr wrap="square" anchor="t" lIns="0" rIns="0" tIns="0" bIns="0">
+            <a:spAutoFit/>
+          </a:bodyPr>
+          <a:lstStyle/>
+          <a:p>
+            <a:pPr algn="ctr">
+              <a:lnSpc>
+                <a:spcPct val="100000"/>
+              </a:lnSpc>
+              <a:spcAft>
+                <a:spcPts val="0"/>
+              </a:spcAft>
+            </a:pPr>
+            <a:r>
+              <a:rPr sz="720" b="0">
+                <a:solidFill>
+                  <a:srgbClr val="555F6B"/>
+                </a:solidFill>
+                <a:latin typeface="Segoe UI"/>
+              </a:rPr>
+              <a:t>host</a:t>
+            </a:r>
+          </a:p>
+        </p:txBody>
+      </p:sp>
+      <p:sp>
+        <p:nvSpPr>
+          <p:cNvPr id="30" name="Rounded Rectangle 29"/>
+          <p:cNvSpPr/>
+          <p:nvPr/>
+        </p:nvSpPr>
+        <p:spPr>
+          <a:xfrm>
+            <a:off x="5532120" y="2615184"/>
+            <a:ext cx="1051560" cy="420624"/>
+          </a:xfrm>
+          <a:prstGeom prst="roundRect">
+            <a:avLst/>
+          </a:prstGeom>
+          <a:solidFill>
+            <a:srgbClr val="0E2A47"/>
+          </a:solidFill>
+          <a:ln>
+            <a:noFill/>
+          </a:ln>
+          <a:effectLst/>
+        </p:spPr>
+        <p:style>
+          <a:lnRef idx="1">
+            <a:schemeClr val="accent1"/>
+          </a:lnRef>
+          <a:fillRef idx="3">
+            <a:schemeClr val="accent1"/>
+          </a:fillRef>
+          <a:effectRef idx="2">
+            <a:schemeClr val="accent1"/>
+          </a:effectRef>
+          <a:fontRef idx="minor">
+            <a:schemeClr val="lt1"/>
+          </a:fontRef>
+        </p:style>
+        <p:txBody>
+          <a:bodyPr rtlCol="0" anchor="ctr" wrap="square" lIns="27432" rIns="27432"/>
+          <a:lstStyle/>
+          <a:p>
+            <a:pPr algn="ctr"/>
+            <a:r>
+              <a:rPr sz="850" b="1">
+                <a:solidFill>
+                  <a:srgbClr val="FFFFFF"/>
+                </a:solidFill>
+                <a:latin typeface="Segoe UI"/>
+              </a:rPr>
+              <a:t>HDMI out</a:t>
+            </a:r>
+          </a:p>
+        </p:txBody>
+      </p:sp>
+      <p:sp>
+        <p:nvSpPr>
+          <p:cNvPr id="31" name="TextBox 30"/>
+          <p:cNvSpPr txBox="1"/>
+          <p:nvPr/>
+        </p:nvSpPr>
+        <p:spPr>
+          <a:xfrm>
+            <a:off x="5532120" y="3054096"/>
+            <a:ext cx="1051560" cy="146304"/>
+          </a:xfrm>
+          <a:prstGeom prst="rect">
+            <a:avLst/>
+          </a:prstGeom>
+          <a:noFill/>
+        </p:spPr>
+        <p:txBody>
+          <a:bodyPr wrap="square" anchor="t" lIns="0" rIns="0" tIns="0" bIns="0">
+            <a:spAutoFit/>
+          </a:bodyPr>
+          <a:lstStyle/>
+          <a:p>
+            <a:pPr algn="ctr">
+              <a:lnSpc>
+                <a:spcPct val="100000"/>
+              </a:lnSpc>
+              <a:spcAft>
+                <a:spcPts val="0"/>
+              </a:spcAft>
+            </a:pPr>
+            <a:r>
+              <a:rPr sz="720" b="0">
+                <a:solidFill>
+                  <a:srgbClr val="555F6B"/>
+                </a:solidFill>
+                <a:latin typeface="Segoe UI"/>
+              </a:rPr>
+              <a:t>640×480</a:t>
+            </a:r>
+          </a:p>
+        </p:txBody>
+      </p:sp>
+      <p:sp>
+        <p:nvSpPr>
+          <p:cNvPr id="32" name="Rounded Rectangle 31"/>
+          <p:cNvSpPr/>
+          <p:nvPr/>
+        </p:nvSpPr>
+        <p:spPr>
+          <a:xfrm>
+            <a:off x="6812280" y="2615184"/>
+            <a:ext cx="1051560" cy="420624"/>
+          </a:xfrm>
+          <a:prstGeom prst="roundRect">
+            <a:avLst/>
+          </a:prstGeom>
+          <a:solidFill>
+            <a:srgbClr val="0E2A47"/>
+          </a:solidFill>
+          <a:ln>
+            <a:noFill/>
+          </a:ln>
+          <a:effectLst/>
+        </p:spPr>
+        <p:style>
+          <a:lnRef idx="1">
+            <a:schemeClr val="accent1"/>
+          </a:lnRef>
+          <a:fillRef idx="3">
+            <a:schemeClr val="accent1"/>
+          </a:fillRef>
+          <a:effectRef idx="2">
+            <a:schemeClr val="accent1"/>
+          </a:effectRef>
+          <a:fontRef idx="minor">
+            <a:schemeClr val="lt1"/>
+          </a:fontRef>
+        </p:style>
+        <p:txBody>
+          <a:bodyPr rtlCol="0" anchor="ctr" wrap="square" lIns="27432" rIns="27432"/>
+          <a:lstStyle/>
+          <a:p>
+            <a:pPr algn="ctr"/>
+            <a:r>
+              <a:rPr sz="850" b="1">
+                <a:solidFill>
+                  <a:srgbClr val="FFFFFF"/>
+                </a:solidFill>
+                <a:latin typeface="Segoe UI"/>
+              </a:rPr>
+              <a:t>Enhance core</a:t>
+            </a:r>
+          </a:p>
+        </p:txBody>
+      </p:sp>
+      <p:sp>
+        <p:nvSpPr>
+          <p:cNvPr id="33" name="TextBox 32"/>
+          <p:cNvSpPr txBox="1"/>
+          <p:nvPr/>
+        </p:nvSpPr>
+        <p:spPr>
+          <a:xfrm>
+            <a:off x="6812280" y="3054096"/>
+            <a:ext cx="1051560" cy="146304"/>
+          </a:xfrm>
+          <a:prstGeom prst="rect">
+            <a:avLst/>
+          </a:prstGeom>
+          <a:noFill/>
+        </p:spPr>
+        <p:txBody>
+          <a:bodyPr wrap="square" anchor="t" lIns="0" rIns="0" tIns="0" bIns="0">
+            <a:spAutoFit/>
+          </a:bodyPr>
+          <a:lstStyle/>
+          <a:p>
+            <a:pPr algn="ctr">
+              <a:lnSpc>
+                <a:spcPct val="100000"/>
+              </a:lnSpc>
+              <a:spcAft>
+                <a:spcPts val="0"/>
+              </a:spcAft>
+            </a:pPr>
+            <a:r>
+              <a:rPr sz="720" b="0">
+                <a:solidFill>
+                  <a:srgbClr val="555F6B"/>
+                </a:solidFill>
+                <a:latin typeface="Segoe UI"/>
+              </a:rPr>
+              <a:t>PL</a:t>
+            </a:r>
+          </a:p>
+        </p:txBody>
+      </p:sp>
+      <p:cxnSp>
+        <p:nvCxnSpPr>
+          <p:cNvPr id="34" name="Connector 33"/>
+          <p:cNvCxnSpPr/>
+          <p:nvPr/>
+        </p:nvCxnSpPr>
+        <p:spPr>
+          <a:xfrm>
+            <a:off x="7338060" y="2322576"/>
+            <a:ext cx="0" cy="274320"/>
+          </a:xfrm>
+          <a:prstGeom prst="line">
+            <a:avLst/>
+          </a:prstGeom>
+          <a:ln w="17780">
+            <a:solidFill>
+              <a:srgbClr val="008CC8"/>
+            </a:solidFill>
+          </a:ln>
+        </p:spPr>
+        <p:style>
+          <a:lnRef idx="2">
+            <a:schemeClr val="accent1"/>
+          </a:lnRef>
+          <a:fillRef idx="0">
+            <a:schemeClr val="accent1"/>
+          </a:fillRef>
+          <a:effectRef idx="1">
+            <a:schemeClr val="accent1"/>
+          </a:effectRef>
+          <a:fontRef idx="minor">
+            <a:schemeClr val="tx1"/>
+          </a:fontRef>
+        </p:style>
+      </p:cxnSp>
+      <p:cxnSp>
+        <p:nvCxnSpPr>
+          <p:cNvPr id="35" name="Connector 34"/>
+          <p:cNvCxnSpPr/>
+          <p:nvPr/>
+        </p:nvCxnSpPr>
+        <p:spPr>
+          <a:xfrm flipH="1">
+            <a:off x="6620256" y="2825496"/>
+            <a:ext cx="173736" cy="0"/>
+          </a:xfrm>
+          <a:prstGeom prst="line">
+            <a:avLst/>
+          </a:prstGeom>
+          <a:ln w="17780">
+            <a:solidFill>
+              <a:srgbClr val="008CC8"/>
+            </a:solidFill>
+          </a:ln>
+        </p:spPr>
+        <p:style>
+          <a:lnRef idx="2">
+            <a:schemeClr val="accent1"/>
+          </a:lnRef>
+          <a:fillRef idx="0">
+            <a:schemeClr val="accent1"/>
+          </a:fillRef>
+          <a:effectRef idx="1">
+            <a:schemeClr val="accent1"/>
+          </a:effectRef>
+          <a:fontRef idx="minor">
+            <a:schemeClr val="tx1"/>
+          </a:fontRef>
+        </p:style>
+      </p:cxnSp>
+      <p:cxnSp>
+        <p:nvCxnSpPr>
+          <p:cNvPr id="36" name="Connector 35"/>
+          <p:cNvCxnSpPr/>
+          <p:nvPr/>
+        </p:nvCxnSpPr>
+        <p:spPr>
+          <a:xfrm flipH="1">
+            <a:off x="5340096" y="2825496"/>
+            <a:ext cx="173736" cy="0"/>
+          </a:xfrm>
+          <a:prstGeom prst="line">
+            <a:avLst/>
+          </a:prstGeom>
+          <a:ln w="17780">
+            <a:solidFill>
+              <a:srgbClr val="008CC8"/>
+            </a:solidFill>
+          </a:ln>
+        </p:spPr>
+        <p:style>
+          <a:lnRef idx="2">
+            <a:schemeClr val="accent1"/>
+          </a:lnRef>
+          <a:fillRef idx="0">
+            <a:schemeClr val="accent1"/>
+          </a:fillRef>
+          <a:effectRef idx="1">
+            <a:schemeClr val="accent1"/>
+          </a:effectRef>
+          <a:fontRef idx="minor">
+            <a:schemeClr val="tx1"/>
+          </a:fontRef>
+        </p:style>
+      </p:cxnSp>
+      <p:sp>
+        <p:nvSpPr>
+          <p:cNvPr id="37" name="TextBox 36"/>
+          <p:cNvSpPr txBox="1"/>
+          <p:nvPr/>
+        </p:nvSpPr>
+        <p:spPr>
+          <a:xfrm>
+            <a:off x="4251960" y="3218688"/>
+            <a:ext cx="3794760" cy="182880"/>
+          </a:xfrm>
+          <a:prstGeom prst="rect">
+            <a:avLst/>
+          </a:prstGeom>
+          <a:noFill/>
+        </p:spPr>
+        <p:txBody>
+          <a:bodyPr wrap="square" anchor="t" lIns="0" rIns="0" tIns="0" bIns="0">
+            <a:spAutoFit/>
+          </a:bodyPr>
+          <a:lstStyle/>
+          <a:p>
+            <a:pPr algn="ctr">
+              <a:lnSpc>
+                <a:spcPct val="100000"/>
+              </a:lnSpc>
+              <a:spcAft>
+                <a:spcPts val="0"/>
+              </a:spcAft>
+            </a:pPr>
+            <a:r>
+              <a:rPr sz="800" b="1">
+                <a:solidFill>
+                  <a:srgbClr val="008CC8"/>
+                </a:solidFill>
+                <a:latin typeface="Segoe UI"/>
+              </a:rPr>
+              <a:t>pixels in, pixels out · no frame buffer in the chain</a:t>
+            </a:r>
+          </a:p>
+        </p:txBody>
+      </p:sp>
+      <p:sp>
+        <p:nvSpPr>
+          <p:cNvPr id="38" name="TextBox 37"/>
+          <p:cNvSpPr txBox="1"/>
+          <p:nvPr/>
+        </p:nvSpPr>
+        <p:spPr>
+          <a:xfrm>
+            <a:off x="4251960" y="3438144"/>
+            <a:ext cx="3794760" cy="256032"/>
+          </a:xfrm>
+          <a:prstGeom prst="rect">
+            <a:avLst/>
+          </a:prstGeom>
+          <a:noFill/>
+        </p:spPr>
+        <p:txBody>
+          <a:bodyPr wrap="square" anchor="t" lIns="0" rIns="0" tIns="0" bIns="0">
+            <a:spAutoFit/>
           </a:bodyPr>
           <a:lstStyle/>
           <a:p>
@@ -4429,15 +7713,1454 @@
               <a:lnSpc>
                 <a:spcPct val="100000"/>
               </a:lnSpc>
+              <a:spcAft>
+                <a:spcPts val="0"/>
+              </a:spcAft>
             </a:pPr>
             <a:r>
-              <a:rPr sz="800" b="0">
-                <a:solidFill>
-                  <a:srgbClr val="888888"/>
-                </a:solidFill>
-                <a:latin typeface="Arial"/>
-              </a:rPr>
-              <a:t>Tool versions: Vivado / Vitis HLS 2026.1, PYNQ 3.1.1 image, device xc7z020clg400-1.  Repository: README.md, docs/ (docs/hdmi_status.md records the HDMI measurements and the two hardware limits), report/design_report.md, report/comparison.md.</a:t>
+              <a:rPr sz="1400" b="1">
+                <a:solidFill>
+                  <a:srgbClr val="008CC8"/>
+                </a:solidFill>
+                <a:latin typeface="Segoe UI"/>
+              </a:rPr>
+              <a:t>3  Key Design</a:t>
+            </a:r>
+          </a:p>
+        </p:txBody>
+      </p:sp>
+      <p:sp>
+        <p:nvSpPr>
+          <p:cNvPr id="39" name="Rectangle 38"/>
+          <p:cNvSpPr/>
+          <p:nvPr/>
+        </p:nvSpPr>
+        <p:spPr>
+          <a:xfrm>
+            <a:off x="4251960" y="3721607"/>
+            <a:ext cx="3794760" cy="13716"/>
+          </a:xfrm>
+          <a:prstGeom prst="rect">
+            <a:avLst/>
+          </a:prstGeom>
+          <a:solidFill>
+            <a:srgbClr val="D8E0E8"/>
+          </a:solidFill>
+          <a:ln>
+            <a:noFill/>
+          </a:ln>
+          <a:effectLst/>
+        </p:spPr>
+        <p:style>
+          <a:lnRef idx="1">
+            <a:schemeClr val="accent1"/>
+          </a:lnRef>
+          <a:fillRef idx="3">
+            <a:schemeClr val="accent1"/>
+          </a:fillRef>
+          <a:effectRef idx="2">
+            <a:schemeClr val="accent1"/>
+          </a:effectRef>
+          <a:fontRef idx="minor">
+            <a:schemeClr val="lt1"/>
+          </a:fontRef>
+        </p:style>
+        <p:txBody>
+          <a:bodyPr rtlCol="0" anchor="ctr"/>
+          <a:lstStyle/>
+          <a:p>
+            <a:pPr algn="ctr"/>
+          </a:p>
+        </p:txBody>
+      </p:sp>
+      <p:sp>
+        <p:nvSpPr>
+          <p:cNvPr id="40" name="TextBox 39"/>
+          <p:cNvSpPr txBox="1"/>
+          <p:nvPr/>
+        </p:nvSpPr>
+        <p:spPr>
+          <a:xfrm>
+            <a:off x="4251960" y="3822191"/>
+            <a:ext cx="3794760" cy="182880"/>
+          </a:xfrm>
+          <a:prstGeom prst="rect">
+            <a:avLst/>
+          </a:prstGeom>
+          <a:noFill/>
+        </p:spPr>
+        <p:txBody>
+          <a:bodyPr wrap="square" anchor="t" lIns="0" rIns="0" tIns="0" bIns="0">
+            <a:spAutoFit/>
+          </a:bodyPr>
+          <a:lstStyle/>
+          <a:p>
+            <a:pPr algn="l">
+              <a:lnSpc>
+                <a:spcPct val="100000"/>
+              </a:lnSpc>
+              <a:spcAft>
+                <a:spcPts val="0"/>
+              </a:spcAft>
+            </a:pPr>
+            <a:r>
+              <a:rPr sz="930" b="1">
+                <a:solidFill>
+                  <a:srgbClr val="1A1A1A"/>
+                </a:solidFill>
+                <a:latin typeface="Segoe UI"/>
+              </a:rPr>
+              <a:t>Three-tap line buffer</a:t>
+            </a:r>
+          </a:p>
+        </p:txBody>
+      </p:sp>
+      <p:sp>
+        <p:nvSpPr>
+          <p:cNvPr id="41" name="TextBox 40"/>
+          <p:cNvSpPr txBox="1"/>
+          <p:nvPr/>
+        </p:nvSpPr>
+        <p:spPr>
+          <a:xfrm>
+            <a:off x="4251960" y="4005072"/>
+            <a:ext cx="3794760" cy="164592"/>
+          </a:xfrm>
+          <a:prstGeom prst="rect">
+            <a:avLst/>
+          </a:prstGeom>
+          <a:noFill/>
+        </p:spPr>
+        <p:txBody>
+          <a:bodyPr wrap="square" anchor="t" lIns="0" rIns="0" tIns="0" bIns="0">
+            <a:spAutoFit/>
+          </a:bodyPr>
+          <a:lstStyle/>
+          <a:p>
+            <a:pPr algn="l">
+              <a:lnSpc>
+                <a:spcPct val="105000"/>
+              </a:lnSpc>
+              <a:spcAft>
+                <a:spcPts val="0"/>
+              </a:spcAft>
+            </a:pPr>
+            <a:r>
+              <a:rPr sz="760" b="0">
+                <a:solidFill>
+                  <a:srgbClr val="555F6B"/>
+                </a:solidFill>
+                <a:latin typeface="Segoe UI"/>
+              </a:rPr>
+              <a:t>Each line buffer is read once per cycle, keeping II = 1 for all eight operators.</a:t>
+            </a:r>
+          </a:p>
+        </p:txBody>
+      </p:sp>
+      <p:sp>
+        <p:nvSpPr>
+          <p:cNvPr id="42" name="TextBox 41"/>
+          <p:cNvSpPr txBox="1"/>
+          <p:nvPr/>
+        </p:nvSpPr>
+        <p:spPr>
+          <a:xfrm>
+            <a:off x="4251960" y="4334256"/>
+            <a:ext cx="3794760" cy="182880"/>
+          </a:xfrm>
+          <a:prstGeom prst="rect">
+            <a:avLst/>
+          </a:prstGeom>
+          <a:noFill/>
+        </p:spPr>
+        <p:txBody>
+          <a:bodyPr wrap="square" anchor="t" lIns="0" rIns="0" tIns="0" bIns="0">
+            <a:spAutoFit/>
+          </a:bodyPr>
+          <a:lstStyle/>
+          <a:p>
+            <a:pPr algn="l">
+              <a:lnSpc>
+                <a:spcPct val="100000"/>
+              </a:lnSpc>
+              <a:spcAft>
+                <a:spcPts val="0"/>
+              </a:spcAft>
+            </a:pPr>
+            <a:r>
+              <a:rPr sz="930" b="1">
+                <a:solidFill>
+                  <a:srgbClr val="1A1A1A"/>
+                </a:solidFill>
+                <a:latin typeface="Segoe UI"/>
+              </a:rPr>
+              <a:t>Parameters in BRAM</a:t>
+            </a:r>
+          </a:p>
+        </p:txBody>
+      </p:sp>
+      <p:sp>
+        <p:nvSpPr>
+          <p:cNvPr id="43" name="TextBox 42"/>
+          <p:cNvSpPr txBox="1"/>
+          <p:nvPr/>
+        </p:nvSpPr>
+        <p:spPr>
+          <a:xfrm>
+            <a:off x="4251960" y="4517136"/>
+            <a:ext cx="3794760" cy="164592"/>
+          </a:xfrm>
+          <a:prstGeom prst="rect">
+            <a:avLst/>
+          </a:prstGeom>
+          <a:noFill/>
+        </p:spPr>
+        <p:txBody>
+          <a:bodyPr wrap="square" anchor="t" lIns="0" rIns="0" tIns="0" bIns="0">
+            <a:spAutoFit/>
+          </a:bodyPr>
+          <a:lstStyle/>
+          <a:p>
+            <a:pPr algn="l">
+              <a:lnSpc>
+                <a:spcPct val="105000"/>
+              </a:lnSpc>
+              <a:spcAft>
+                <a:spcPts val="0"/>
+              </a:spcAft>
+            </a:pPr>
+            <a:r>
+              <a:rPr sz="760" b="0">
+                <a:solidFill>
+                  <a:srgbClr val="555F6B"/>
+                </a:solidFill>
+                <a:latin typeface="Segoe UI"/>
+              </a:rPr>
+              <a:t>Ten presets take effect on a register write, without reset or stream interruption.</a:t>
+            </a:r>
+          </a:p>
+        </p:txBody>
+      </p:sp>
+      <p:sp>
+        <p:nvSpPr>
+          <p:cNvPr id="44" name="TextBox 43"/>
+          <p:cNvSpPr txBox="1"/>
+          <p:nvPr/>
+        </p:nvSpPr>
+        <p:spPr>
+          <a:xfrm>
+            <a:off x="4251960" y="4846320"/>
+            <a:ext cx="3794760" cy="182880"/>
+          </a:xfrm>
+          <a:prstGeom prst="rect">
+            <a:avLst/>
+          </a:prstGeom>
+          <a:noFill/>
+        </p:spPr>
+        <p:txBody>
+          <a:bodyPr wrap="square" anchor="t" lIns="0" rIns="0" tIns="0" bIns="0">
+            <a:spAutoFit/>
+          </a:bodyPr>
+          <a:lstStyle/>
+          <a:p>
+            <a:pPr algn="l">
+              <a:lnSpc>
+                <a:spcPct val="100000"/>
+              </a:lnSpc>
+              <a:spcAft>
+                <a:spcPts val="0"/>
+              </a:spcAft>
+            </a:pPr>
+            <a:r>
+              <a:rPr sz="930" b="1">
+                <a:solidFill>
+                  <a:srgbClr val="1A1A1A"/>
+                </a:solidFill>
+                <a:latin typeface="Segoe UI"/>
+              </a:rPr>
+              <a:t>Integer datapath</a:t>
+            </a:r>
+          </a:p>
+        </p:txBody>
+      </p:sp>
+      <p:sp>
+        <p:nvSpPr>
+          <p:cNvPr id="45" name="TextBox 44"/>
+          <p:cNvSpPr txBox="1"/>
+          <p:nvPr/>
+        </p:nvSpPr>
+        <p:spPr>
+          <a:xfrm>
+            <a:off x="4251960" y="5029200"/>
+            <a:ext cx="3794760" cy="164592"/>
+          </a:xfrm>
+          <a:prstGeom prst="rect">
+            <a:avLst/>
+          </a:prstGeom>
+          <a:noFill/>
+        </p:spPr>
+        <p:txBody>
+          <a:bodyPr wrap="square" anchor="t" lIns="0" rIns="0" tIns="0" bIns="0">
+            <a:spAutoFit/>
+          </a:bodyPr>
+          <a:lstStyle/>
+          <a:p>
+            <a:pPr algn="l">
+              <a:lnSpc>
+                <a:spcPct val="105000"/>
+              </a:lnSpc>
+              <a:spcAft>
+                <a:spcPts val="0"/>
+              </a:spcAft>
+            </a:pPr>
+            <a:r>
+              <a:rPr sz="760" b="0">
+                <a:solidFill>
+                  <a:srgbClr val="555F6B"/>
+                </a:solidFill>
+                <a:latin typeface="Segoe UI"/>
+              </a:rPr>
+              <a:t>Bit-exact against a NumPy golden model: 0 of 2,764,800 channels differ across 8 presets.</a:t>
+            </a:r>
+          </a:p>
+        </p:txBody>
+      </p:sp>
+      <p:sp>
+        <p:nvSpPr>
+          <p:cNvPr id="46" name="TextBox 45"/>
+          <p:cNvSpPr txBox="1"/>
+          <p:nvPr/>
+        </p:nvSpPr>
+        <p:spPr>
+          <a:xfrm>
+            <a:off x="4251960" y="5358384"/>
+            <a:ext cx="3794760" cy="182880"/>
+          </a:xfrm>
+          <a:prstGeom prst="rect">
+            <a:avLst/>
+          </a:prstGeom>
+          <a:noFill/>
+        </p:spPr>
+        <p:txBody>
+          <a:bodyPr wrap="square" anchor="t" lIns="0" rIns="0" tIns="0" bIns="0">
+            <a:spAutoFit/>
+          </a:bodyPr>
+          <a:lstStyle/>
+          <a:p>
+            <a:pPr algn="l">
+              <a:lnSpc>
+                <a:spcPct val="100000"/>
+              </a:lnSpc>
+              <a:spcAft>
+                <a:spcPts val="0"/>
+              </a:spcAft>
+            </a:pPr>
+            <a:r>
+              <a:rPr sz="930" b="1">
+                <a:solidFill>
+                  <a:srgbClr val="1A1A1A"/>
+                </a:solidFill>
+                <a:latin typeface="Segoe UI"/>
+              </a:rPr>
+              <a:t>Dual timestamps</a:t>
+            </a:r>
+          </a:p>
+        </p:txBody>
+      </p:sp>
+      <p:sp>
+        <p:nvSpPr>
+          <p:cNvPr id="47" name="TextBox 46"/>
+          <p:cNvSpPr txBox="1"/>
+          <p:nvPr/>
+        </p:nvSpPr>
+        <p:spPr>
+          <a:xfrm>
+            <a:off x="4251960" y="5541264"/>
+            <a:ext cx="3794760" cy="164592"/>
+          </a:xfrm>
+          <a:prstGeom prst="rect">
+            <a:avLst/>
+          </a:prstGeom>
+          <a:noFill/>
+        </p:spPr>
+        <p:txBody>
+          <a:bodyPr wrap="square" anchor="t" lIns="0" rIns="0" tIns="0" bIns="0">
+            <a:spAutoFit/>
+          </a:bodyPr>
+          <a:lstStyle/>
+          <a:p>
+            <a:pPr algn="l">
+              <a:lnSpc>
+                <a:spcPct val="105000"/>
+              </a:lnSpc>
+              <a:spcAft>
+                <a:spcPts val="0"/>
+              </a:spcAft>
+            </a:pPr>
+            <a:r>
+              <a:rPr sz="760" b="0">
+                <a:solidFill>
+                  <a:srgbClr val="555F6B"/>
+                </a:solidFill>
+                <a:latin typeface="Segoe UI"/>
+              </a:rPr>
+              <a:t>DMA and HDMI paths are timed separately; measured latency is 16 clocks / 160 ns.</a:t>
+            </a:r>
+          </a:p>
+        </p:txBody>
+      </p:sp>
+      <p:sp>
+        <p:nvSpPr>
+          <p:cNvPr id="48" name="TextBox 47"/>
+          <p:cNvSpPr txBox="1"/>
+          <p:nvPr/>
+        </p:nvSpPr>
+        <p:spPr>
+          <a:xfrm>
+            <a:off x="8275320" y="1325880"/>
+            <a:ext cx="3429000" cy="256032"/>
+          </a:xfrm>
+          <a:prstGeom prst="rect">
+            <a:avLst/>
+          </a:prstGeom>
+          <a:noFill/>
+        </p:spPr>
+        <p:txBody>
+          <a:bodyPr wrap="square" anchor="t" lIns="0" rIns="0" tIns="0" bIns="0">
+            <a:spAutoFit/>
+          </a:bodyPr>
+          <a:lstStyle/>
+          <a:p>
+            <a:pPr algn="l">
+              <a:lnSpc>
+                <a:spcPct val="100000"/>
+              </a:lnSpc>
+              <a:spcAft>
+                <a:spcPts val="0"/>
+              </a:spcAft>
+            </a:pPr>
+            <a:r>
+              <a:rPr sz="1400" b="1">
+                <a:solidFill>
+                  <a:srgbClr val="008CC8"/>
+                </a:solidFill>
+                <a:latin typeface="Segoe UI"/>
+              </a:rPr>
+              <a:t>4  Results</a:t>
+            </a:r>
+          </a:p>
+        </p:txBody>
+      </p:sp>
+      <p:sp>
+        <p:nvSpPr>
+          <p:cNvPr id="49" name="Rectangle 48"/>
+          <p:cNvSpPr/>
+          <p:nvPr/>
+        </p:nvSpPr>
+        <p:spPr>
+          <a:xfrm>
+            <a:off x="8275320" y="1609344"/>
+            <a:ext cx="3429000" cy="13716"/>
+          </a:xfrm>
+          <a:prstGeom prst="rect">
+            <a:avLst/>
+          </a:prstGeom>
+          <a:solidFill>
+            <a:srgbClr val="D8E0E8"/>
+          </a:solidFill>
+          <a:ln>
+            <a:noFill/>
+          </a:ln>
+          <a:effectLst/>
+        </p:spPr>
+        <p:style>
+          <a:lnRef idx="1">
+            <a:schemeClr val="accent1"/>
+          </a:lnRef>
+          <a:fillRef idx="3">
+            <a:schemeClr val="accent1"/>
+          </a:fillRef>
+          <a:effectRef idx="2">
+            <a:schemeClr val="accent1"/>
+          </a:effectRef>
+          <a:fontRef idx="minor">
+            <a:schemeClr val="lt1"/>
+          </a:fontRef>
+        </p:style>
+        <p:txBody>
+          <a:bodyPr rtlCol="0" anchor="ctr"/>
+          <a:lstStyle/>
+          <a:p>
+            <a:pPr algn="ctr"/>
+          </a:p>
+        </p:txBody>
+      </p:sp>
+      <p:sp>
+        <p:nvSpPr>
+          <p:cNvPr id="50" name="Rectangle 49"/>
+          <p:cNvSpPr/>
+          <p:nvPr/>
+        </p:nvSpPr>
+        <p:spPr>
+          <a:xfrm>
+            <a:off x="8275320" y="1737360"/>
+            <a:ext cx="1664208" cy="676656"/>
+          </a:xfrm>
+          <a:prstGeom prst="rect">
+            <a:avLst/>
+          </a:prstGeom>
+          <a:solidFill>
+            <a:srgbClr val="F2F5F8"/>
+          </a:solidFill>
+          <a:ln>
+            <a:noFill/>
+          </a:ln>
+          <a:effectLst/>
+        </p:spPr>
+        <p:style>
+          <a:lnRef idx="1">
+            <a:schemeClr val="accent1"/>
+          </a:lnRef>
+          <a:fillRef idx="3">
+            <a:schemeClr val="accent1"/>
+          </a:fillRef>
+          <a:effectRef idx="2">
+            <a:schemeClr val="accent1"/>
+          </a:effectRef>
+          <a:fontRef idx="minor">
+            <a:schemeClr val="lt1"/>
+          </a:fontRef>
+        </p:style>
+        <p:txBody>
+          <a:bodyPr rtlCol="0" anchor="ctr"/>
+          <a:lstStyle/>
+          <a:p>
+            <a:pPr algn="ctr"/>
+          </a:p>
+        </p:txBody>
+      </p:sp>
+      <p:sp>
+        <p:nvSpPr>
+          <p:cNvPr id="51" name="Rectangle 50"/>
+          <p:cNvSpPr/>
+          <p:nvPr/>
+        </p:nvSpPr>
+        <p:spPr>
+          <a:xfrm>
+            <a:off x="8275320" y="1737360"/>
+            <a:ext cx="50292" cy="676656"/>
+          </a:xfrm>
+          <a:prstGeom prst="rect">
+            <a:avLst/>
+          </a:prstGeom>
+          <a:solidFill>
+            <a:srgbClr val="008CC8"/>
+          </a:solidFill>
+          <a:ln>
+            <a:noFill/>
+          </a:ln>
+          <a:effectLst/>
+        </p:spPr>
+        <p:style>
+          <a:lnRef idx="1">
+            <a:schemeClr val="accent1"/>
+          </a:lnRef>
+          <a:fillRef idx="3">
+            <a:schemeClr val="accent1"/>
+          </a:fillRef>
+          <a:effectRef idx="2">
+            <a:schemeClr val="accent1"/>
+          </a:effectRef>
+          <a:fontRef idx="minor">
+            <a:schemeClr val="lt1"/>
+          </a:fontRef>
+        </p:style>
+        <p:txBody>
+          <a:bodyPr rtlCol="0" anchor="ctr"/>
+          <a:lstStyle/>
+          <a:p>
+            <a:pPr algn="ctr"/>
+          </a:p>
+        </p:txBody>
+      </p:sp>
+      <p:sp>
+        <p:nvSpPr>
+          <p:cNvPr id="52" name="TextBox 51"/>
+          <p:cNvSpPr txBox="1"/>
+          <p:nvPr/>
+        </p:nvSpPr>
+        <p:spPr>
+          <a:xfrm>
+            <a:off x="8412480" y="1801368"/>
+            <a:ext cx="1481328" cy="274320"/>
+          </a:xfrm>
+          <a:prstGeom prst="rect">
+            <a:avLst/>
+          </a:prstGeom>
+          <a:noFill/>
+        </p:spPr>
+        <p:txBody>
+          <a:bodyPr wrap="square" anchor="t" lIns="0" rIns="0" tIns="0" bIns="0">
+            <a:spAutoFit/>
+          </a:bodyPr>
+          <a:lstStyle/>
+          <a:p>
+            <a:pPr algn="l">
+              <a:lnSpc>
+                <a:spcPct val="100000"/>
+              </a:lnSpc>
+              <a:spcAft>
+                <a:spcPts val="0"/>
+              </a:spcAft>
+            </a:pPr>
+            <a:r>
+              <a:rPr sz="1650" b="1">
+                <a:solidFill>
+                  <a:srgbClr val="0E2A47"/>
+                </a:solidFill>
+                <a:latin typeface="Microsoft YaHei"/>
+              </a:rPr>
+              <a:t>194.59 MHz</a:t>
+            </a:r>
+          </a:p>
+        </p:txBody>
+      </p:sp>
+      <p:sp>
+        <p:nvSpPr>
+          <p:cNvPr id="53" name="TextBox 52"/>
+          <p:cNvSpPr txBox="1"/>
+          <p:nvPr/>
+        </p:nvSpPr>
+        <p:spPr>
+          <a:xfrm>
+            <a:off x="8412480" y="2103120"/>
+            <a:ext cx="1481328" cy="237744"/>
+          </a:xfrm>
+          <a:prstGeom prst="rect">
+            <a:avLst/>
+          </a:prstGeom>
+          <a:noFill/>
+        </p:spPr>
+        <p:txBody>
+          <a:bodyPr wrap="square" anchor="t" lIns="0" rIns="0" tIns="0" bIns="0">
+            <a:spAutoFit/>
+          </a:bodyPr>
+          <a:lstStyle/>
+          <a:p>
+            <a:pPr algn="l">
+              <a:lnSpc>
+                <a:spcPct val="105000"/>
+              </a:lnSpc>
+              <a:spcAft>
+                <a:spcPts val="0"/>
+              </a:spcAft>
+            </a:pPr>
+            <a:r>
+              <a:rPr sz="819" b="0">
+                <a:solidFill>
+                  <a:srgbClr val="555F6B"/>
+                </a:solidFill>
+                <a:latin typeface="Segoe UI"/>
+              </a:rPr>
+              <a:t>clock after implementation, WNS +0.206 ns</a:t>
+            </a:r>
+          </a:p>
+        </p:txBody>
+      </p:sp>
+      <p:sp>
+        <p:nvSpPr>
+          <p:cNvPr id="54" name="Rectangle 53"/>
+          <p:cNvSpPr/>
+          <p:nvPr/>
+        </p:nvSpPr>
+        <p:spPr>
+          <a:xfrm>
+            <a:off x="10040112" y="1737360"/>
+            <a:ext cx="1664208" cy="676656"/>
+          </a:xfrm>
+          <a:prstGeom prst="rect">
+            <a:avLst/>
+          </a:prstGeom>
+          <a:solidFill>
+            <a:srgbClr val="F2F5F8"/>
+          </a:solidFill>
+          <a:ln>
+            <a:noFill/>
+          </a:ln>
+          <a:effectLst/>
+        </p:spPr>
+        <p:style>
+          <a:lnRef idx="1">
+            <a:schemeClr val="accent1"/>
+          </a:lnRef>
+          <a:fillRef idx="3">
+            <a:schemeClr val="accent1"/>
+          </a:fillRef>
+          <a:effectRef idx="2">
+            <a:schemeClr val="accent1"/>
+          </a:effectRef>
+          <a:fontRef idx="minor">
+            <a:schemeClr val="lt1"/>
+          </a:fontRef>
+        </p:style>
+        <p:txBody>
+          <a:bodyPr rtlCol="0" anchor="ctr"/>
+          <a:lstStyle/>
+          <a:p>
+            <a:pPr algn="ctr"/>
+          </a:p>
+        </p:txBody>
+      </p:sp>
+      <p:sp>
+        <p:nvSpPr>
+          <p:cNvPr id="55" name="Rectangle 54"/>
+          <p:cNvSpPr/>
+          <p:nvPr/>
+        </p:nvSpPr>
+        <p:spPr>
+          <a:xfrm>
+            <a:off x="10040112" y="1737360"/>
+            <a:ext cx="50292" cy="676656"/>
+          </a:xfrm>
+          <a:prstGeom prst="rect">
+            <a:avLst/>
+          </a:prstGeom>
+          <a:solidFill>
+            <a:srgbClr val="008CC8"/>
+          </a:solidFill>
+          <a:ln>
+            <a:noFill/>
+          </a:ln>
+          <a:effectLst/>
+        </p:spPr>
+        <p:style>
+          <a:lnRef idx="1">
+            <a:schemeClr val="accent1"/>
+          </a:lnRef>
+          <a:fillRef idx="3">
+            <a:schemeClr val="accent1"/>
+          </a:fillRef>
+          <a:effectRef idx="2">
+            <a:schemeClr val="accent1"/>
+          </a:effectRef>
+          <a:fontRef idx="minor">
+            <a:schemeClr val="lt1"/>
+          </a:fontRef>
+        </p:style>
+        <p:txBody>
+          <a:bodyPr rtlCol="0" anchor="ctr"/>
+          <a:lstStyle/>
+          <a:p>
+            <a:pPr algn="ctr"/>
+          </a:p>
+        </p:txBody>
+      </p:sp>
+      <p:sp>
+        <p:nvSpPr>
+          <p:cNvPr id="56" name="TextBox 55"/>
+          <p:cNvSpPr txBox="1"/>
+          <p:nvPr/>
+        </p:nvSpPr>
+        <p:spPr>
+          <a:xfrm>
+            <a:off x="10177272" y="1801368"/>
+            <a:ext cx="1481328" cy="274320"/>
+          </a:xfrm>
+          <a:prstGeom prst="rect">
+            <a:avLst/>
+          </a:prstGeom>
+          <a:noFill/>
+        </p:spPr>
+        <p:txBody>
+          <a:bodyPr wrap="square" anchor="t" lIns="0" rIns="0" tIns="0" bIns="0">
+            <a:spAutoFit/>
+          </a:bodyPr>
+          <a:lstStyle/>
+          <a:p>
+            <a:pPr algn="l">
+              <a:lnSpc>
+                <a:spcPct val="100000"/>
+              </a:lnSpc>
+              <a:spcAft>
+                <a:spcPts val="0"/>
+              </a:spcAft>
+            </a:pPr>
+            <a:r>
+              <a:rPr sz="1650" b="1">
+                <a:solidFill>
+                  <a:srgbClr val="0E2A47"/>
+                </a:solidFill>
+                <a:latin typeface="Microsoft YaHei"/>
+              </a:rPr>
+              <a:t>1,659 LUT</a:t>
+            </a:r>
+          </a:p>
+        </p:txBody>
+      </p:sp>
+      <p:sp>
+        <p:nvSpPr>
+          <p:cNvPr id="57" name="TextBox 56"/>
+          <p:cNvSpPr txBox="1"/>
+          <p:nvPr/>
+        </p:nvSpPr>
+        <p:spPr>
+          <a:xfrm>
+            <a:off x="10177272" y="2103120"/>
+            <a:ext cx="1481328" cy="237744"/>
+          </a:xfrm>
+          <a:prstGeom prst="rect">
+            <a:avLst/>
+          </a:prstGeom>
+          <a:noFill/>
+        </p:spPr>
+        <p:txBody>
+          <a:bodyPr wrap="square" anchor="t" lIns="0" rIns="0" tIns="0" bIns="0">
+            <a:spAutoFit/>
+          </a:bodyPr>
+          <a:lstStyle/>
+          <a:p>
+            <a:pPr algn="l">
+              <a:lnSpc>
+                <a:spcPct val="105000"/>
+              </a:lnSpc>
+              <a:spcAft>
+                <a:spcPts val="0"/>
+              </a:spcAft>
+            </a:pPr>
+            <a:r>
+              <a:rPr sz="819" b="0">
+                <a:solidFill>
+                  <a:srgbClr val="555F6B"/>
+                </a:solidFill>
+                <a:latin typeface="Segoe UI"/>
+              </a:rPr>
+              <a:t>3% of XC7Z020; FF 2,168 / BRAM 3 / DSP 2</a:t>
+            </a:r>
+          </a:p>
+        </p:txBody>
+      </p:sp>
+      <p:sp>
+        <p:nvSpPr>
+          <p:cNvPr id="58" name="Rectangle 57"/>
+          <p:cNvSpPr/>
+          <p:nvPr/>
+        </p:nvSpPr>
+        <p:spPr>
+          <a:xfrm>
+            <a:off x="8275320" y="2487168"/>
+            <a:ext cx="1664208" cy="676656"/>
+          </a:xfrm>
+          <a:prstGeom prst="rect">
+            <a:avLst/>
+          </a:prstGeom>
+          <a:solidFill>
+            <a:srgbClr val="F2F5F8"/>
+          </a:solidFill>
+          <a:ln>
+            <a:noFill/>
+          </a:ln>
+          <a:effectLst/>
+        </p:spPr>
+        <p:style>
+          <a:lnRef idx="1">
+            <a:schemeClr val="accent1"/>
+          </a:lnRef>
+          <a:fillRef idx="3">
+            <a:schemeClr val="accent1"/>
+          </a:fillRef>
+          <a:effectRef idx="2">
+            <a:schemeClr val="accent1"/>
+          </a:effectRef>
+          <a:fontRef idx="minor">
+            <a:schemeClr val="lt1"/>
+          </a:fontRef>
+        </p:style>
+        <p:txBody>
+          <a:bodyPr rtlCol="0" anchor="ctr"/>
+          <a:lstStyle/>
+          <a:p>
+            <a:pPr algn="ctr"/>
+          </a:p>
+        </p:txBody>
+      </p:sp>
+      <p:sp>
+        <p:nvSpPr>
+          <p:cNvPr id="59" name="Rectangle 58"/>
+          <p:cNvSpPr/>
+          <p:nvPr/>
+        </p:nvSpPr>
+        <p:spPr>
+          <a:xfrm>
+            <a:off x="8275320" y="2487168"/>
+            <a:ext cx="50292" cy="676656"/>
+          </a:xfrm>
+          <a:prstGeom prst="rect">
+            <a:avLst/>
+          </a:prstGeom>
+          <a:solidFill>
+            <a:srgbClr val="008CC8"/>
+          </a:solidFill>
+          <a:ln>
+            <a:noFill/>
+          </a:ln>
+          <a:effectLst/>
+        </p:spPr>
+        <p:style>
+          <a:lnRef idx="1">
+            <a:schemeClr val="accent1"/>
+          </a:lnRef>
+          <a:fillRef idx="3">
+            <a:schemeClr val="accent1"/>
+          </a:fillRef>
+          <a:effectRef idx="2">
+            <a:schemeClr val="accent1"/>
+          </a:effectRef>
+          <a:fontRef idx="minor">
+            <a:schemeClr val="lt1"/>
+          </a:fontRef>
+        </p:style>
+        <p:txBody>
+          <a:bodyPr rtlCol="0" anchor="ctr"/>
+          <a:lstStyle/>
+          <a:p>
+            <a:pPr algn="ctr"/>
+          </a:p>
+        </p:txBody>
+      </p:sp>
+      <p:sp>
+        <p:nvSpPr>
+          <p:cNvPr id="60" name="TextBox 59"/>
+          <p:cNvSpPr txBox="1"/>
+          <p:nvPr/>
+        </p:nvSpPr>
+        <p:spPr>
+          <a:xfrm>
+            <a:off x="8412480" y="2551176"/>
+            <a:ext cx="1481328" cy="274320"/>
+          </a:xfrm>
+          <a:prstGeom prst="rect">
+            <a:avLst/>
+          </a:prstGeom>
+          <a:noFill/>
+        </p:spPr>
+        <p:txBody>
+          <a:bodyPr wrap="square" anchor="t" lIns="0" rIns="0" tIns="0" bIns="0">
+            <a:spAutoFit/>
+          </a:bodyPr>
+          <a:lstStyle/>
+          <a:p>
+            <a:pPr algn="l">
+              <a:lnSpc>
+                <a:spcPct val="100000"/>
+              </a:lnSpc>
+              <a:spcAft>
+                <a:spcPts val="0"/>
+              </a:spcAft>
+            </a:pPr>
+            <a:r>
+              <a:rPr sz="1650" b="1">
+                <a:solidFill>
+                  <a:srgbClr val="0E2A47"/>
+                </a:solidFill>
+                <a:latin typeface="Microsoft YaHei"/>
+              </a:rPr>
+              <a:t>15.6 ms</a:t>
+            </a:r>
+          </a:p>
+        </p:txBody>
+      </p:sp>
+      <p:sp>
+        <p:nvSpPr>
+          <p:cNvPr id="61" name="TextBox 60"/>
+          <p:cNvSpPr txBox="1"/>
+          <p:nvPr/>
+        </p:nvSpPr>
+        <p:spPr>
+          <a:xfrm>
+            <a:off x="8412480" y="2852928"/>
+            <a:ext cx="1481328" cy="237744"/>
+          </a:xfrm>
+          <a:prstGeom prst="rect">
+            <a:avLst/>
+          </a:prstGeom>
+          <a:noFill/>
+        </p:spPr>
+        <p:txBody>
+          <a:bodyPr wrap="square" anchor="t" lIns="0" rIns="0" tIns="0" bIns="0">
+            <a:spAutoFit/>
+          </a:bodyPr>
+          <a:lstStyle/>
+          <a:p>
+            <a:pPr algn="l">
+              <a:lnSpc>
+                <a:spcPct val="105000"/>
+              </a:lnSpc>
+              <a:spcAft>
+                <a:spcPts val="0"/>
+              </a:spcAft>
+            </a:pPr>
+            <a:r>
+              <a:rPr sz="819" b="0">
+                <a:solidFill>
+                  <a:srgbClr val="555F6B"/>
+                </a:solidFill>
+                <a:latin typeface="Segoe UI"/>
+              </a:rPr>
+              <a:t>per frame at 1280×720</a:t>
+            </a:r>
+          </a:p>
+        </p:txBody>
+      </p:sp>
+      <p:sp>
+        <p:nvSpPr>
+          <p:cNvPr id="62" name="Rectangle 61"/>
+          <p:cNvSpPr/>
+          <p:nvPr/>
+        </p:nvSpPr>
+        <p:spPr>
+          <a:xfrm>
+            <a:off x="10040112" y="2487168"/>
+            <a:ext cx="1664208" cy="676656"/>
+          </a:xfrm>
+          <a:prstGeom prst="rect">
+            <a:avLst/>
+          </a:prstGeom>
+          <a:solidFill>
+            <a:srgbClr val="F2F5F8"/>
+          </a:solidFill>
+          <a:ln>
+            <a:noFill/>
+          </a:ln>
+          <a:effectLst/>
+        </p:spPr>
+        <p:style>
+          <a:lnRef idx="1">
+            <a:schemeClr val="accent1"/>
+          </a:lnRef>
+          <a:fillRef idx="3">
+            <a:schemeClr val="accent1"/>
+          </a:fillRef>
+          <a:effectRef idx="2">
+            <a:schemeClr val="accent1"/>
+          </a:effectRef>
+          <a:fontRef idx="minor">
+            <a:schemeClr val="lt1"/>
+          </a:fontRef>
+        </p:style>
+        <p:txBody>
+          <a:bodyPr rtlCol="0" anchor="ctr"/>
+          <a:lstStyle/>
+          <a:p>
+            <a:pPr algn="ctr"/>
+          </a:p>
+        </p:txBody>
+      </p:sp>
+      <p:sp>
+        <p:nvSpPr>
+          <p:cNvPr id="63" name="Rectangle 62"/>
+          <p:cNvSpPr/>
+          <p:nvPr/>
+        </p:nvSpPr>
+        <p:spPr>
+          <a:xfrm>
+            <a:off x="10040112" y="2487168"/>
+            <a:ext cx="50292" cy="676656"/>
+          </a:xfrm>
+          <a:prstGeom prst="rect">
+            <a:avLst/>
+          </a:prstGeom>
+          <a:solidFill>
+            <a:srgbClr val="008CC8"/>
+          </a:solidFill>
+          <a:ln>
+            <a:noFill/>
+          </a:ln>
+          <a:effectLst/>
+        </p:spPr>
+        <p:style>
+          <a:lnRef idx="1">
+            <a:schemeClr val="accent1"/>
+          </a:lnRef>
+          <a:fillRef idx="3">
+            <a:schemeClr val="accent1"/>
+          </a:fillRef>
+          <a:effectRef idx="2">
+            <a:schemeClr val="accent1"/>
+          </a:effectRef>
+          <a:fontRef idx="minor">
+            <a:schemeClr val="lt1"/>
+          </a:fontRef>
+        </p:style>
+        <p:txBody>
+          <a:bodyPr rtlCol="0" anchor="ctr"/>
+          <a:lstStyle/>
+          <a:p>
+            <a:pPr algn="ctr"/>
+          </a:p>
+        </p:txBody>
+      </p:sp>
+      <p:sp>
+        <p:nvSpPr>
+          <p:cNvPr id="64" name="TextBox 63"/>
+          <p:cNvSpPr txBox="1"/>
+          <p:nvPr/>
+        </p:nvSpPr>
+        <p:spPr>
+          <a:xfrm>
+            <a:off x="10177272" y="2551176"/>
+            <a:ext cx="1481328" cy="274320"/>
+          </a:xfrm>
+          <a:prstGeom prst="rect">
+            <a:avLst/>
+          </a:prstGeom>
+          <a:noFill/>
+        </p:spPr>
+        <p:txBody>
+          <a:bodyPr wrap="square" anchor="t" lIns="0" rIns="0" tIns="0" bIns="0">
+            <a:spAutoFit/>
+          </a:bodyPr>
+          <a:lstStyle/>
+          <a:p>
+            <a:pPr algn="l">
+              <a:lnSpc>
+                <a:spcPct val="100000"/>
+              </a:lnSpc>
+              <a:spcAft>
+                <a:spcPts val="0"/>
+              </a:spcAft>
+            </a:pPr>
+            <a:r>
+              <a:rPr sz="1650" b="1">
+                <a:solidFill>
+                  <a:srgbClr val="0E2A47"/>
+                </a:solidFill>
+                <a:latin typeface="Microsoft YaHei"/>
+              </a:rPr>
+              <a:t>196.7×</a:t>
+            </a:r>
+          </a:p>
+        </p:txBody>
+      </p:sp>
+      <p:sp>
+        <p:nvSpPr>
+          <p:cNvPr id="65" name="TextBox 64"/>
+          <p:cNvSpPr txBox="1"/>
+          <p:nvPr/>
+        </p:nvSpPr>
+        <p:spPr>
+          <a:xfrm>
+            <a:off x="10177272" y="2852928"/>
+            <a:ext cx="1481328" cy="237744"/>
+          </a:xfrm>
+          <a:prstGeom prst="rect">
+            <a:avLst/>
+          </a:prstGeom>
+          <a:noFill/>
+        </p:spPr>
+        <p:txBody>
+          <a:bodyPr wrap="square" anchor="t" lIns="0" rIns="0" tIns="0" bIns="0">
+            <a:spAutoFit/>
+          </a:bodyPr>
+          <a:lstStyle/>
+          <a:p>
+            <a:pPr algn="l">
+              <a:lnSpc>
+                <a:spcPct val="105000"/>
+              </a:lnSpc>
+              <a:spcAft>
+                <a:spcPts val="0"/>
+              </a:spcAft>
+            </a:pPr>
+            <a:r>
+              <a:rPr sz="819" b="0">
+                <a:solidFill>
+                  <a:srgbClr val="555F6B"/>
+                </a:solidFill>
+                <a:latin typeface="Segoe UI"/>
+              </a:rPr>
+              <a:t>speed-up over ARM software (Sobel)</a:t>
+            </a:r>
+          </a:p>
+        </p:txBody>
+      </p:sp>
+      <p:sp>
+        <p:nvSpPr>
+          <p:cNvPr id="66" name="TextBox 65"/>
+          <p:cNvSpPr txBox="1"/>
+          <p:nvPr/>
+        </p:nvSpPr>
+        <p:spPr>
+          <a:xfrm>
+            <a:off x="8275320" y="3310128"/>
+            <a:ext cx="3429000" cy="256032"/>
+          </a:xfrm>
+          <a:prstGeom prst="rect">
+            <a:avLst/>
+          </a:prstGeom>
+          <a:noFill/>
+        </p:spPr>
+        <p:txBody>
+          <a:bodyPr wrap="square" anchor="t" lIns="0" rIns="0" tIns="0" bIns="0">
+            <a:spAutoFit/>
+          </a:bodyPr>
+          <a:lstStyle/>
+          <a:p>
+            <a:pPr algn="l">
+              <a:lnSpc>
+                <a:spcPct val="100000"/>
+              </a:lnSpc>
+              <a:spcAft>
+                <a:spcPts val="0"/>
+              </a:spcAft>
+            </a:pPr>
+            <a:r>
+              <a:rPr sz="1400" b="1">
+                <a:solidFill>
+                  <a:srgbClr val="008CC8"/>
+                </a:solidFill>
+                <a:latin typeface="Segoe UI"/>
+              </a:rPr>
+              <a:t>5  Demo setup</a:t>
+            </a:r>
+          </a:p>
+        </p:txBody>
+      </p:sp>
+      <p:sp>
+        <p:nvSpPr>
+          <p:cNvPr id="67" name="Rectangle 66"/>
+          <p:cNvSpPr/>
+          <p:nvPr/>
+        </p:nvSpPr>
+        <p:spPr>
+          <a:xfrm>
+            <a:off x="8275320" y="3593592"/>
+            <a:ext cx="3429000" cy="13716"/>
+          </a:xfrm>
+          <a:prstGeom prst="rect">
+            <a:avLst/>
+          </a:prstGeom>
+          <a:solidFill>
+            <a:srgbClr val="D8E0E8"/>
+          </a:solidFill>
+          <a:ln>
+            <a:noFill/>
+          </a:ln>
+          <a:effectLst/>
+        </p:spPr>
+        <p:style>
+          <a:lnRef idx="1">
+            <a:schemeClr val="accent1"/>
+          </a:lnRef>
+          <a:fillRef idx="3">
+            <a:schemeClr val="accent1"/>
+          </a:fillRef>
+          <a:effectRef idx="2">
+            <a:schemeClr val="accent1"/>
+          </a:effectRef>
+          <a:fontRef idx="minor">
+            <a:schemeClr val="lt1"/>
+          </a:fontRef>
+        </p:style>
+        <p:txBody>
+          <a:bodyPr rtlCol="0" anchor="ctr"/>
+          <a:lstStyle/>
+          <a:p>
+            <a:pPr algn="ctr"/>
+          </a:p>
+        </p:txBody>
+      </p:sp>
+      <p:pic>
+        <p:nvPicPr>
+          <p:cNvPr id="68" name="Picture 67" descr="setup_full_view.jpg"/>
+          <p:cNvPicPr>
+            <a:picLocks noChangeAspect="1"/>
+          </p:cNvPicPr>
+          <p:nvPr/>
+        </p:nvPicPr>
+        <p:blipFill>
+          <a:blip r:embed="rId2"/>
+          <a:stretch>
+            <a:fillRect/>
+          </a:stretch>
+        </p:blipFill>
+        <p:spPr>
+          <a:xfrm>
+            <a:off x="8275320" y="3675887"/>
+            <a:ext cx="1439899" cy="1920240"/>
+          </a:xfrm>
+          <a:prstGeom prst="rect">
+            <a:avLst/>
+          </a:prstGeom>
+        </p:spPr>
+      </p:pic>
+      <p:sp>
+        <p:nvSpPr>
+          <p:cNvPr id="69" name="TextBox 68"/>
+          <p:cNvSpPr txBox="1"/>
+          <p:nvPr/>
+        </p:nvSpPr>
+        <p:spPr>
+          <a:xfrm>
+            <a:off x="8275320" y="5650992"/>
+            <a:ext cx="3429000" cy="219456"/>
+          </a:xfrm>
+          <a:prstGeom prst="rect">
+            <a:avLst/>
+          </a:prstGeom>
+          <a:noFill/>
+        </p:spPr>
+        <p:txBody>
+          <a:bodyPr wrap="square" anchor="t" lIns="0" rIns="0" tIns="0" bIns="0">
+            <a:spAutoFit/>
+          </a:bodyPr>
+          <a:lstStyle/>
+          <a:p>
+            <a:pPr algn="l">
+              <a:lnSpc>
+                <a:spcPct val="105000"/>
+              </a:lnSpc>
+              <a:spcAft>
+                <a:spcPts val="0"/>
+              </a:spcAft>
+            </a:pPr>
+            <a:r>
+              <a:rPr sz="730" b="0">
+                <a:solidFill>
+                  <a:srgbClr val="555F6B"/>
+                </a:solidFill>
+                <a:latin typeface="Segoe UI"/>
+              </a:rPr>
+              <a:t>Photo: host running OBS, receiving the board's HDMI output through a capture card.</a:t>
+            </a:r>
+          </a:p>
+        </p:txBody>
+      </p:sp>
+      <p:sp>
+        <p:nvSpPr>
+          <p:cNvPr id="70" name="Rectangle 69"/>
+          <p:cNvSpPr/>
+          <p:nvPr/>
+        </p:nvSpPr>
+        <p:spPr>
+          <a:xfrm>
+            <a:off x="502920" y="6053328"/>
+            <a:ext cx="11183112" cy="566928"/>
+          </a:xfrm>
+          <a:prstGeom prst="rect">
+            <a:avLst/>
+          </a:prstGeom>
+          <a:solidFill>
+            <a:srgbClr val="F2F5F8"/>
+          </a:solidFill>
+          <a:ln>
+            <a:noFill/>
+          </a:ln>
+          <a:effectLst/>
+        </p:spPr>
+        <p:style>
+          <a:lnRef idx="1">
+            <a:schemeClr val="accent1"/>
+          </a:lnRef>
+          <a:fillRef idx="3">
+            <a:schemeClr val="accent1"/>
+          </a:fillRef>
+          <a:effectRef idx="2">
+            <a:schemeClr val="accent1"/>
+          </a:effectRef>
+          <a:fontRef idx="minor">
+            <a:schemeClr val="lt1"/>
+          </a:fontRef>
+        </p:style>
+        <p:txBody>
+          <a:bodyPr rtlCol="0" anchor="ctr"/>
+          <a:lstStyle/>
+          <a:p>
+            <a:pPr algn="ctr"/>
+          </a:p>
+        </p:txBody>
+      </p:sp>
+      <p:sp>
+        <p:nvSpPr>
+          <p:cNvPr id="71" name="Rectangle 70"/>
+          <p:cNvSpPr/>
+          <p:nvPr/>
+        </p:nvSpPr>
+        <p:spPr>
+          <a:xfrm>
+            <a:off x="502920" y="6053328"/>
+            <a:ext cx="50292" cy="566928"/>
+          </a:xfrm>
+          <a:prstGeom prst="rect">
+            <a:avLst/>
+          </a:prstGeom>
+          <a:solidFill>
+            <a:srgbClr val="008CC8"/>
+          </a:solidFill>
+          <a:ln>
+            <a:noFill/>
+          </a:ln>
+          <a:effectLst/>
+        </p:spPr>
+        <p:style>
+          <a:lnRef idx="1">
+            <a:schemeClr val="accent1"/>
+          </a:lnRef>
+          <a:fillRef idx="3">
+            <a:schemeClr val="accent1"/>
+          </a:fillRef>
+          <a:effectRef idx="2">
+            <a:schemeClr val="accent1"/>
+          </a:effectRef>
+          <a:fontRef idx="minor">
+            <a:schemeClr val="lt1"/>
+          </a:fontRef>
+        </p:style>
+        <p:txBody>
+          <a:bodyPr rtlCol="0" anchor="ctr"/>
+          <a:lstStyle/>
+          <a:p>
+            <a:pPr algn="ctr"/>
+          </a:p>
+        </p:txBody>
+      </p:sp>
+      <p:sp>
+        <p:nvSpPr>
+          <p:cNvPr id="72" name="TextBox 71"/>
+          <p:cNvSpPr txBox="1"/>
+          <p:nvPr/>
+        </p:nvSpPr>
+        <p:spPr>
+          <a:xfrm>
+            <a:off x="685800" y="6126480"/>
+            <a:ext cx="10835640" cy="420624"/>
+          </a:xfrm>
+          <a:prstGeom prst="rect">
+            <a:avLst/>
+          </a:prstGeom>
+          <a:noFill/>
+        </p:spPr>
+        <p:txBody>
+          <a:bodyPr wrap="square" anchor="t" lIns="0" rIns="0" tIns="0" bIns="0">
+            <a:spAutoFit/>
+          </a:bodyPr>
+          <a:lstStyle/>
+          <a:p>
+            <a:pPr algn="l">
+              <a:lnSpc>
+                <a:spcPct val="112000"/>
+              </a:lnSpc>
+              <a:spcAft>
+                <a:spcPts val="0"/>
+              </a:spcAft>
+            </a:pPr>
+            <a:r>
+              <a:rPr sz="840" b="0">
+                <a:solidFill>
+                  <a:srgbClr val="555F6B"/>
+                </a:solidFill>
+                <a:latin typeface="Segoe UI"/>
+              </a:rPr>
+              <a:t>Reproduce: sources, scripts and golden model in the repo, four steps rebuild it.   Verify: 0 differences across 8 presets, 16 / 21 clocks by dual timestamps.   Scope: HDMI 640×480@60; latency is PL pipeline only.</a:t>
             </a:r>
           </a:p>
         </p:txBody>
